--- a/Employee_Leave_Management_System_Presentation.pptx
+++ b/Employee_Leave_Management_System_Presentation.pptx
@@ -3112,7 +3112,7 @@
             <a:avLst/>
           </a:prstGeom>
           <a:solidFill>
-            <a:srgbClr val="1E1B4B"/>
+            <a:srgbClr val="1A365D"/>
           </a:solidFill>
           <a:ln>
             <a:noFill/>
@@ -3149,13 +3149,13 @@
         <p:spPr>
           <a:xfrm>
             <a:off x="0" y="0"/>
-            <a:ext cx="12191695" cy="109728"/>
+            <a:ext cx="12191695" cy="73152"/>
           </a:xfrm>
           <a:prstGeom prst="rect">
             <a:avLst/>
           </a:prstGeom>
           <a:solidFill>
-            <a:srgbClr val="4F46E5"/>
+            <a:srgbClr val="4299E1"/>
           </a:solidFill>
           <a:ln>
             <a:noFill/>
@@ -3185,25 +3185,91 @@
       </p:sp>
       <p:sp>
         <p:nvSpPr>
-          <p:cNvPr id="4" name="Rounded Rectangle 3"/>
+          <p:cNvPr id="4" name="TextBox 3"/>
+          <p:cNvSpPr txBox="1"/>
+          <p:nvPr/>
+        </p:nvSpPr>
+        <p:spPr>
+          <a:xfrm>
+            <a:off x="914400" y="1371600"/>
+            <a:ext cx="10332720" cy="2011680"/>
+          </a:xfrm>
+          <a:prstGeom prst="rect">
+            <a:avLst/>
+          </a:prstGeom>
+          <a:noFill/>
+        </p:spPr>
+        <p:txBody>
+          <a:bodyPr wrap="square">
+            <a:spAutoFit/>
+          </a:bodyPr>
+          <a:lstStyle/>
+          <a:p>
+            <a:pPr>
+              <a:defRPr sz="1200" b="1">
+                <a:solidFill>
+                  <a:srgbClr val="BEE3F8"/>
+                </a:solidFill>
+                <a:latin typeface="Arial"/>
+              </a:defRPr>
+            </a:pPr>
+            <a:r>
+              <a:t>FINAL YEAR PROJECT PRESENTATION</a:t>
+            </a:r>
+          </a:p>
+          <a:p>
+            <a:pPr>
+              <a:spcBef>
+                <a:spcPts val="800"/>
+              </a:spcBef>
+              <a:defRPr sz="3600" b="1">
+                <a:solidFill>
+                  <a:srgbClr val="FFFFFF"/>
+                </a:solidFill>
+                <a:latin typeface="Arial"/>
+              </a:defRPr>
+            </a:pPr>
+            <a:r>
+              <a:t>Employee Leave Management System</a:t>
+            </a:r>
+          </a:p>
+          <a:p>
+            <a:pPr>
+              <a:spcBef>
+                <a:spcPts val="800"/>
+              </a:spcBef>
+              <a:defRPr sz="1600">
+                <a:solidFill>
+                  <a:srgbClr val="E2E8F0"/>
+                </a:solidFill>
+                <a:latin typeface="Arial"/>
+              </a:defRPr>
+            </a:pPr>
+            <a:r>
+              <a:t>A Web-Based Portal for Automating Corporate Leave Applications and Approval Workflows</a:t>
+            </a:r>
+          </a:p>
+        </p:txBody>
+      </p:sp>
+      <p:sp>
+        <p:nvSpPr>
+          <p:cNvPr id="5" name="Rectangle 4"/>
           <p:cNvSpPr/>
           <p:nvPr/>
         </p:nvSpPr>
         <p:spPr>
           <a:xfrm>
-            <a:off x="914400" y="1188720"/>
-            <a:ext cx="2926080" cy="384048"/>
-          </a:xfrm>
-          <a:prstGeom prst="roundRect">
+            <a:off x="914400" y="3566160"/>
+            <a:ext cx="10332720" cy="18288"/>
+          </a:xfrm>
+          <a:prstGeom prst="rect">
             <a:avLst/>
           </a:prstGeom>
           <a:solidFill>
-            <a:srgbClr val="312E81"/>
+            <a:srgbClr val="4A5568"/>
           </a:solidFill>
           <a:ln>
-            <a:solidFill>
-              <a:srgbClr val="4F46E5"/>
-            </a:solidFill>
+            <a:noFill/>
           </a:ln>
         </p:spPr>
         <p:style>
@@ -3224,29 +3290,20 @@
           <a:bodyPr rtlCol="0" anchor="ctr"/>
           <a:lstStyle/>
           <a:p>
-            <a:pPr algn="ctr">
-              <a:defRPr sz="1100" b="1">
-                <a:solidFill>
-                  <a:srgbClr val="A5B4FC"/>
-                </a:solidFill>
-              </a:defRPr>
-            </a:pPr>
-            <a:r>
-              <a:t>ENTERPRISE SOFTWARE PROJECT</a:t>
-            </a:r>
-          </a:p>
-        </p:txBody>
-      </p:sp>
-      <p:sp>
-        <p:nvSpPr>
-          <p:cNvPr id="5" name="TextBox 4"/>
+            <a:pPr algn="ctr"/>
+          </a:p>
+        </p:txBody>
+      </p:sp>
+      <p:sp>
+        <p:nvSpPr>
+          <p:cNvPr id="6" name="TextBox 5"/>
           <p:cNvSpPr txBox="1"/>
           <p:nvPr/>
         </p:nvSpPr>
         <p:spPr>
           <a:xfrm>
-            <a:off x="914400" y="1828800"/>
-            <a:ext cx="10332720" cy="1645920"/>
+            <a:off x="914400" y="3840480"/>
+            <a:ext cx="10332720" cy="2103120"/>
           </a:xfrm>
           <a:prstGeom prst="rect">
             <a:avLst/>
@@ -3260,83 +3317,15 @@
           <a:lstStyle/>
           <a:p>
             <a:pPr>
-              <a:defRPr sz="4000" b="1">
-                <a:solidFill>
-                  <a:srgbClr val="FFFFFF"/>
-                </a:solidFill>
-              </a:defRPr>
-            </a:pPr>
-            <a:r>
-              <a:t>Employee Leave Management System</a:t>
-            </a:r>
-          </a:p>
-          <a:p>
-            <a:pPr>
-              <a:spcBef>
-                <a:spcPts val="1200"/>
-              </a:spcBef>
-              <a:defRPr sz="1800">
-                <a:solidFill>
-                  <a:srgbClr val="C7D2FE"/>
-                </a:solidFill>
-              </a:defRPr>
-            </a:pPr>
-            <a:r>
-              <a:t>LeaveFlow — Next-Generation Automated Corporate Time-Off &amp; Attendance Platform</a:t>
-            </a:r>
-          </a:p>
-        </p:txBody>
-      </p:sp>
-      <p:sp>
-        <p:nvSpPr>
-          <p:cNvPr id="6" name="Rounded Rectangle 5"/>
-          <p:cNvSpPr/>
-          <p:nvPr/>
-        </p:nvSpPr>
-        <p:spPr>
-          <a:xfrm>
-            <a:off x="914400" y="3840480"/>
-            <a:ext cx="3291840" cy="1097280"/>
-          </a:xfrm>
-          <a:prstGeom prst="roundRect">
-            <a:avLst/>
-          </a:prstGeom>
-          <a:solidFill>
-            <a:srgbClr val="312E81"/>
-          </a:solidFill>
-          <a:ln>
-            <a:solidFill>
-              <a:srgbClr val="4F46E5"/>
-            </a:solidFill>
-          </a:ln>
-        </p:spPr>
-        <p:style>
-          <a:lnRef idx="1">
-            <a:schemeClr val="accent1"/>
-          </a:lnRef>
-          <a:fillRef idx="3">
-            <a:schemeClr val="accent1"/>
-          </a:fillRef>
-          <a:effectRef idx="2">
-            <a:schemeClr val="accent1"/>
-          </a:effectRef>
-          <a:fontRef idx="minor">
-            <a:schemeClr val="lt1"/>
-          </a:fontRef>
-        </p:style>
-        <p:txBody>
-          <a:bodyPr rtlCol="0" anchor="ctr" wrap="square" lIns="182880" tIns="182880"/>
-          <a:lstStyle/>
-          <a:p>
-            <a:pPr algn="ctr">
               <a:defRPr sz="1300" b="1">
                 <a:solidFill>
-                  <a:srgbClr val="FFFFFF"/>
-                </a:solidFill>
-              </a:defRPr>
-            </a:pPr>
-            <a:r>
-              <a:t>✔ Smart Working Days</a:t>
+                  <a:srgbClr val="BEE3F8"/>
+                </a:solidFill>
+                <a:latin typeface="Arial"/>
+              </a:defRPr>
+            </a:pPr>
+            <a:r>
+              <a:t>Submitted By:</a:t>
             </a:r>
           </a:p>
           <a:p>
@@ -3344,230 +3333,15 @@
               <a:spcBef>
                 <a:spcPts val="400"/>
               </a:spcBef>
-              <a:defRPr sz="1050">
-                <a:solidFill>
-                  <a:srgbClr val="C7D2FE"/>
-                </a:solidFill>
-              </a:defRPr>
-            </a:pPr>
-            <a:r>
-              <a:t>Automated exclusion of weekends &amp; public holidays</a:t>
-            </a:r>
-          </a:p>
-        </p:txBody>
-      </p:sp>
-      <p:sp>
-        <p:nvSpPr>
-          <p:cNvPr id="7" name="Rounded Rectangle 6"/>
-          <p:cNvSpPr/>
-          <p:nvPr/>
-        </p:nvSpPr>
-        <p:spPr>
-          <a:xfrm>
-            <a:off x="4389120" y="3840480"/>
-            <a:ext cx="3291840" cy="1097280"/>
-          </a:xfrm>
-          <a:prstGeom prst="roundRect">
-            <a:avLst/>
-          </a:prstGeom>
-          <a:solidFill>
-            <a:srgbClr val="312E81"/>
-          </a:solidFill>
-          <a:ln>
-            <a:solidFill>
-              <a:srgbClr val="4F46E5"/>
-            </a:solidFill>
-          </a:ln>
-        </p:spPr>
-        <p:style>
-          <a:lnRef idx="1">
-            <a:schemeClr val="accent1"/>
-          </a:lnRef>
-          <a:fillRef idx="3">
-            <a:schemeClr val="accent1"/>
-          </a:fillRef>
-          <a:effectRef idx="2">
-            <a:schemeClr val="accent1"/>
-          </a:effectRef>
-          <a:fontRef idx="minor">
-            <a:schemeClr val="lt1"/>
-          </a:fontRef>
-        </p:style>
-        <p:txBody>
-          <a:bodyPr rtlCol="0" anchor="ctr" wrap="square" lIns="182880" tIns="182880"/>
-          <a:lstStyle/>
-          <a:p>
-            <a:pPr algn="ctr">
-              <a:defRPr sz="1300" b="1">
+              <a:defRPr sz="1600" b="1">
                 <a:solidFill>
                   <a:srgbClr val="FFFFFF"/>
                 </a:solidFill>
-              </a:defRPr>
-            </a:pPr>
-            <a:r>
-              <a:t>✔ Dual-Role Portals</a:t>
-            </a:r>
-          </a:p>
-          <a:p>
-            <a:pPr>
-              <a:spcBef>
-                <a:spcPts val="400"/>
-              </a:spcBef>
-              <a:defRPr sz="1050">
-                <a:solidFill>
-                  <a:srgbClr val="C7D2FE"/>
-                </a:solidFill>
-              </a:defRPr>
-            </a:pPr>
-            <a:r>
-              <a:t>Employee Self-Service &amp; HR Administrator Queue</a:t>
-            </a:r>
-          </a:p>
-        </p:txBody>
-      </p:sp>
-      <p:sp>
-        <p:nvSpPr>
-          <p:cNvPr id="8" name="Rounded Rectangle 7"/>
-          <p:cNvSpPr/>
-          <p:nvPr/>
-        </p:nvSpPr>
-        <p:spPr>
-          <a:xfrm>
-            <a:off x="7863840" y="3840480"/>
-            <a:ext cx="3291840" cy="1097280"/>
-          </a:xfrm>
-          <a:prstGeom prst="roundRect">
-            <a:avLst/>
-          </a:prstGeom>
-          <a:solidFill>
-            <a:srgbClr val="312E81"/>
-          </a:solidFill>
-          <a:ln>
-            <a:solidFill>
-              <a:srgbClr val="4F46E5"/>
-            </a:solidFill>
-          </a:ln>
-        </p:spPr>
-        <p:style>
-          <a:lnRef idx="1">
-            <a:schemeClr val="accent1"/>
-          </a:lnRef>
-          <a:fillRef idx="3">
-            <a:schemeClr val="accent1"/>
-          </a:fillRef>
-          <a:effectRef idx="2">
-            <a:schemeClr val="accent1"/>
-          </a:effectRef>
-          <a:fontRef idx="minor">
-            <a:schemeClr val="lt1"/>
-          </a:fontRef>
-        </p:style>
-        <p:txBody>
-          <a:bodyPr rtlCol="0" anchor="ctr" wrap="square" lIns="182880" tIns="182880"/>
-          <a:lstStyle/>
-          <a:p>
-            <a:pPr algn="ctr">
-              <a:defRPr sz="1300" b="1">
-                <a:solidFill>
-                  <a:srgbClr val="FFFFFF"/>
-                </a:solidFill>
-              </a:defRPr>
-            </a:pPr>
-            <a:r>
-              <a:t>✔ 100% Tested Architecture</a:t>
-            </a:r>
-          </a:p>
-          <a:p>
-            <a:pPr>
-              <a:spcBef>
-                <a:spcPts val="400"/>
-              </a:spcBef>
-              <a:defRPr sz="1050">
-                <a:solidFill>
-                  <a:srgbClr val="C7D2FE"/>
-                </a:solidFill>
-              </a:defRPr>
-            </a:pPr>
-            <a:r>
-              <a:t>17/17 Automated Unit Tests with Zero-Defect QA</a:t>
-            </a:r>
-          </a:p>
-        </p:txBody>
-      </p:sp>
-      <p:sp>
-        <p:nvSpPr>
-          <p:cNvPr id="9" name="Rectangle 8"/>
-          <p:cNvSpPr/>
-          <p:nvPr/>
-        </p:nvSpPr>
-        <p:spPr>
-          <a:xfrm>
-            <a:off x="0" y="5760720"/>
-            <a:ext cx="12191695" cy="1097280"/>
-          </a:xfrm>
-          <a:prstGeom prst="rect">
-            <a:avLst/>
-          </a:prstGeom>
-          <a:solidFill>
-            <a:srgbClr val="111827"/>
-          </a:solidFill>
-          <a:ln>
-            <a:noFill/>
-          </a:ln>
-        </p:spPr>
-        <p:style>
-          <a:lnRef idx="1">
-            <a:schemeClr val="accent1"/>
-          </a:lnRef>
-          <a:fillRef idx="3">
-            <a:schemeClr val="accent1"/>
-          </a:fillRef>
-          <a:effectRef idx="2">
-            <a:schemeClr val="accent1"/>
-          </a:effectRef>
-          <a:fontRef idx="minor">
-            <a:schemeClr val="lt1"/>
-          </a:fontRef>
-        </p:style>
-        <p:txBody>
-          <a:bodyPr rtlCol="0" anchor="ctr"/>
-          <a:lstStyle/>
-          <a:p>
-            <a:pPr algn="ctr"/>
-          </a:p>
-        </p:txBody>
-      </p:sp>
-      <p:sp>
-        <p:nvSpPr>
-          <p:cNvPr id="10" name="TextBox 9"/>
-          <p:cNvSpPr txBox="1"/>
-          <p:nvPr/>
-        </p:nvSpPr>
-        <p:spPr>
-          <a:xfrm>
-            <a:off x="914400" y="5897880"/>
-            <a:ext cx="10332720" cy="822960"/>
-          </a:xfrm>
-          <a:prstGeom prst="rect">
-            <a:avLst/>
-          </a:prstGeom>
-          <a:noFill/>
-        </p:spPr>
-        <p:txBody>
-          <a:bodyPr wrap="none">
-            <a:spAutoFit/>
-          </a:bodyPr>
-          <a:lstStyle/>
-          <a:p>
-            <a:pPr>
-              <a:defRPr sz="1400" b="1">
-                <a:solidFill>
-                  <a:srgbClr val="FFFFFF"/>
-                </a:solidFill>
-              </a:defRPr>
-            </a:pPr>
-            <a:r>
-              <a:t>Student Presenter: Abhishek Yadav    |    Roll No: 06    |    Academic Year: 2026</a:t>
+                <a:latin typeface="Arial"/>
+              </a:defRPr>
+            </a:pPr>
+            <a:r>
+              <a:t>Abhishek Yadav</a:t>
             </a:r>
           </a:p>
           <a:p>
@@ -3575,14 +3349,31 @@
               <a:spcBef>
                 <a:spcPts val="300"/>
               </a:spcBef>
-              <a:defRPr sz="1100">
-                <a:solidFill>
-                  <a:srgbClr val="9CA3AF"/>
-                </a:solidFill>
-              </a:defRPr>
-            </a:pPr>
-            <a:r>
-              <a:t>Full-Stack Technology Stack: Python 3.12 • Flask 3.0 • SQLite3 • Tailwind CSS • Chart.js • Render Cloud</a:t>
+              <a:defRPr sz="1300">
+                <a:solidFill>
+                  <a:srgbClr val="E2E8F0"/>
+                </a:solidFill>
+                <a:latin typeface="Arial"/>
+              </a:defRPr>
+            </a:pPr>
+            <a:r>
+              <a:t>Roll Number: 06    |    Degree Program: Bachelor of Technology (B.Tech)</a:t>
+            </a:r>
+          </a:p>
+          <a:p>
+            <a:pPr>
+              <a:spcBef>
+                <a:spcPts val="300"/>
+              </a:spcBef>
+              <a:defRPr sz="1300">
+                <a:solidFill>
+                  <a:srgbClr val="CBD5E1"/>
+                </a:solidFill>
+                <a:latin typeface="Arial"/>
+              </a:defRPr>
+            </a:pPr>
+            <a:r>
+              <a:t>Department of Computer Science &amp; Engineering</a:t>
             </a:r>
           </a:p>
         </p:txBody>
@@ -3607,20 +3398,92 @@
       <p:grpSpPr/>
       <p:sp>
         <p:nvSpPr>
-          <p:cNvPr id="2" name="Rectangle 1"/>
+          <p:cNvPr id="2" name="TextBox 1"/>
+          <p:cNvSpPr txBox="1"/>
+          <p:nvPr/>
+        </p:nvSpPr>
+        <p:spPr>
+          <a:xfrm>
+            <a:off x="731520" y="411480"/>
+            <a:ext cx="10698480" cy="274320"/>
+          </a:xfrm>
+          <a:prstGeom prst="rect">
+            <a:avLst/>
+          </a:prstGeom>
+          <a:noFill/>
+        </p:spPr>
+        <p:txBody>
+          <a:bodyPr wrap="none" lIns="0" tIns="0" rIns="0" bIns="0">
+            <a:spAutoFit/>
+          </a:bodyPr>
+          <a:lstStyle/>
+          <a:p>
+            <a:pPr>
+              <a:defRPr sz="1000" b="1">
+                <a:solidFill>
+                  <a:srgbClr val="2B6CB0"/>
+                </a:solidFill>
+                <a:latin typeface="Arial"/>
+              </a:defRPr>
+            </a:pPr>
+            <a:r>
+              <a:t>PROJECT SUMMARY</a:t>
+            </a:r>
+          </a:p>
+        </p:txBody>
+      </p:sp>
+      <p:sp>
+        <p:nvSpPr>
+          <p:cNvPr id="3" name="TextBox 2"/>
+          <p:cNvSpPr txBox="1"/>
+          <p:nvPr/>
+        </p:nvSpPr>
+        <p:spPr>
+          <a:xfrm>
+            <a:off x="731520" y="685800"/>
+            <a:ext cx="10698480" cy="548640"/>
+          </a:xfrm>
+          <a:prstGeom prst="rect">
+            <a:avLst/>
+          </a:prstGeom>
+          <a:noFill/>
+        </p:spPr>
+        <p:txBody>
+          <a:bodyPr wrap="none" lIns="0" tIns="0" rIns="0" bIns="0">
+            <a:spAutoFit/>
+          </a:bodyPr>
+          <a:lstStyle/>
+          <a:p>
+            <a:pPr>
+              <a:defRPr sz="2200" b="1">
+                <a:solidFill>
+                  <a:srgbClr val="1A365D"/>
+                </a:solidFill>
+                <a:latin typeface="Arial"/>
+              </a:defRPr>
+            </a:pPr>
+            <a:r>
+              <a:t>Conclusion &amp; Future Enhancements</a:t>
+            </a:r>
+          </a:p>
+        </p:txBody>
+      </p:sp>
+      <p:sp>
+        <p:nvSpPr>
+          <p:cNvPr id="4" name="Rectangle 3"/>
           <p:cNvSpPr/>
           <p:nvPr/>
         </p:nvSpPr>
         <p:spPr>
           <a:xfrm>
-            <a:off x="0" y="0"/>
-            <a:ext cx="12191695" cy="6858000"/>
+            <a:off x="731520" y="1325880"/>
+            <a:ext cx="10728655" cy="18288"/>
           </a:xfrm>
           <a:prstGeom prst="rect">
             <a:avLst/>
           </a:prstGeom>
           <a:solidFill>
-            <a:srgbClr val="1E1B4B"/>
+            <a:srgbClr val="2B6CB0"/>
           </a:solidFill>
           <a:ln>
             <a:noFill/>
@@ -3650,20 +3513,20 @@
       </p:sp>
       <p:sp>
         <p:nvSpPr>
-          <p:cNvPr id="3" name="Rectangle 2"/>
+          <p:cNvPr id="5" name="Rectangle 4"/>
           <p:cNvSpPr/>
           <p:nvPr/>
         </p:nvSpPr>
         <p:spPr>
           <a:xfrm>
-            <a:off x="0" y="0"/>
-            <a:ext cx="12191695" cy="109728"/>
+            <a:off x="731520" y="6217920"/>
+            <a:ext cx="10728655" cy="13716"/>
           </a:xfrm>
           <a:prstGeom prst="rect">
             <a:avLst/>
           </a:prstGeom>
           <a:solidFill>
-            <a:srgbClr val="059669"/>
+            <a:srgbClr val="E2E8F0"/>
           </a:solidFill>
           <a:ln>
             <a:noFill/>
@@ -3693,14 +3556,14 @@
       </p:sp>
       <p:sp>
         <p:nvSpPr>
-          <p:cNvPr id="4" name="TextBox 3"/>
+          <p:cNvPr id="6" name="TextBox 5"/>
           <p:cNvSpPr txBox="1"/>
           <p:nvPr/>
         </p:nvSpPr>
         <p:spPr>
           <a:xfrm>
-            <a:off x="914400" y="1645920"/>
-            <a:ext cx="10332720" cy="2743200"/>
+            <a:off x="731520" y="6263640"/>
+            <a:ext cx="7315200" cy="365760"/>
           </a:xfrm>
           <a:prstGeom prst="rect">
             <a:avLst/>
@@ -3708,74 +3571,81 @@
           <a:noFill/>
         </p:spPr>
         <p:txBody>
-          <a:bodyPr wrap="square">
+          <a:bodyPr wrap="none" lIns="0" tIns="0" rIns="0" bIns="0">
             <a:spAutoFit/>
           </a:bodyPr>
           <a:lstStyle/>
           <a:p>
-            <a:pPr algn="ctr">
-              <a:defRPr sz="4800" b="1">
-                <a:solidFill>
-                  <a:srgbClr val="FFFFFF"/>
-                </a:solidFill>
-              </a:defRPr>
-            </a:pPr>
-            <a:r>
-              <a:t>Thank You!</a:t>
-            </a:r>
-          </a:p>
-          <a:p>
-            <a:pPr algn="ctr">
-              <a:spcBef>
-                <a:spcPts val="1000"/>
-              </a:spcBef>
-              <a:defRPr sz="2200" b="1">
-                <a:solidFill>
-                  <a:srgbClr val="A5B4FC"/>
-                </a:solidFill>
-              </a:defRPr>
-            </a:pPr>
-            <a:r>
-              <a:t>Employee Leave Management System (LeaveFlow)</a:t>
-            </a:r>
-          </a:p>
-          <a:p>
-            <a:pPr algn="ctr">
-              <a:spcBef>
-                <a:spcPts val="1600"/>
-              </a:spcBef>
-              <a:defRPr sz="1800">
-                <a:solidFill>
-                  <a:srgbClr val="D1D5DB"/>
-                </a:solidFill>
-              </a:defRPr>
-            </a:pPr>
-            <a:r>
-              <a:t>Questions &amp; Answers</a:t>
-            </a:r>
-          </a:p>
-        </p:txBody>
-      </p:sp>
-      <p:sp>
-        <p:nvSpPr>
-          <p:cNvPr id="5" name="Rounded Rectangle 4"/>
+            <a:pPr>
+              <a:defRPr sz="950">
+                <a:solidFill>
+                  <a:srgbClr val="718096"/>
+                </a:solidFill>
+                <a:latin typeface="Arial"/>
+              </a:defRPr>
+            </a:pPr>
+            <a:r>
+              <a:t>Employee Leave Management System | Project Presentation</a:t>
+            </a:r>
+          </a:p>
+        </p:txBody>
+      </p:sp>
+      <p:sp>
+        <p:nvSpPr>
+          <p:cNvPr id="7" name="TextBox 6"/>
+          <p:cNvSpPr txBox="1"/>
+          <p:nvPr/>
+        </p:nvSpPr>
+        <p:spPr>
+          <a:xfrm>
+            <a:off x="9601200" y="6263640"/>
+            <a:ext cx="1828800" cy="365760"/>
+          </a:xfrm>
+          <a:prstGeom prst="rect">
+            <a:avLst/>
+          </a:prstGeom>
+          <a:noFill/>
+        </p:spPr>
+        <p:txBody>
+          <a:bodyPr wrap="none" lIns="0" tIns="0" rIns="0" bIns="0">
+            <a:spAutoFit/>
+          </a:bodyPr>
+          <a:lstStyle/>
+          <a:p>
+            <a:pPr algn="r">
+              <a:defRPr sz="950">
+                <a:solidFill>
+                  <a:srgbClr val="718096"/>
+                </a:solidFill>
+                <a:latin typeface="Arial"/>
+              </a:defRPr>
+            </a:pPr>
+            <a:r>
+              <a:t>Slide 10 of 10</a:t>
+            </a:r>
+          </a:p>
+        </p:txBody>
+      </p:sp>
+      <p:sp>
+        <p:nvSpPr>
+          <p:cNvPr id="8" name="Rectangle 7"/>
           <p:cNvSpPr/>
           <p:nvPr/>
         </p:nvSpPr>
         <p:spPr>
           <a:xfrm>
-            <a:off x="2286000" y="4114800"/>
-            <a:ext cx="7619695" cy="1645920"/>
-          </a:xfrm>
-          <a:prstGeom prst="roundRect">
+            <a:off x="731520" y="1554480"/>
+            <a:ext cx="5120640" cy="4389120"/>
+          </a:xfrm>
+          <a:prstGeom prst="rect">
             <a:avLst/>
           </a:prstGeom>
           <a:solidFill>
-            <a:srgbClr val="312E81"/>
+            <a:srgbClr val="FFFFFF"/>
           </a:solidFill>
-          <a:ln>
+          <a:ln w="12700">
             <a:solidFill>
-              <a:srgbClr val="4F46E5"/>
+              <a:srgbClr val="E2E8F0"/>
             </a:solidFill>
           </a:ln>
         </p:spPr>
@@ -3794,48 +3664,254 @@
           </a:fontRef>
         </p:style>
         <p:txBody>
-          <a:bodyPr rtlCol="0" anchor="ctr" wrap="square"/>
-          <a:lstStyle/>
-          <a:p>
-            <a:pPr algn="ctr">
-              <a:defRPr sz="1300" b="1">
-                <a:solidFill>
-                  <a:srgbClr val="C7D2FE"/>
-                </a:solidFill>
-              </a:defRPr>
-            </a:pPr>
-            <a:r>
-              <a:t>Project Metadata &amp; Repository</a:t>
-            </a:r>
-          </a:p>
-          <a:p>
-            <a:pPr algn="ctr">
+          <a:bodyPr rtlCol="0" anchor="ctr"/>
+          <a:lstStyle/>
+          <a:p>
+            <a:pPr algn="ctr"/>
+          </a:p>
+        </p:txBody>
+      </p:sp>
+      <p:sp>
+        <p:nvSpPr>
+          <p:cNvPr id="9" name="TextBox 8"/>
+          <p:cNvSpPr txBox="1"/>
+          <p:nvPr/>
+        </p:nvSpPr>
+        <p:spPr>
+          <a:xfrm>
+            <a:off x="914400" y="1691640"/>
+            <a:ext cx="4754880" cy="4114800"/>
+          </a:xfrm>
+          <a:prstGeom prst="rect">
+            <a:avLst/>
+          </a:prstGeom>
+          <a:noFill/>
+        </p:spPr>
+        <p:txBody>
+          <a:bodyPr wrap="square">
+            <a:spAutoFit/>
+          </a:bodyPr>
+          <a:lstStyle/>
+          <a:p>
+            <a:pPr>
+              <a:defRPr sz="1500" b="1">
+                <a:solidFill>
+                  <a:srgbClr val="1A365D"/>
+                </a:solidFill>
+                <a:latin typeface="Arial"/>
+              </a:defRPr>
+            </a:pPr>
+            <a:r>
+              <a:t>Conclusion &amp; Summary</a:t>
+            </a:r>
+          </a:p>
+          <a:p>
+            <a:pPr>
               <a:spcBef>
-                <a:spcPts val="600"/>
+                <a:spcPts val="1000"/>
               </a:spcBef>
-              <a:defRPr sz="1300">
-                <a:solidFill>
-                  <a:srgbClr val="FFFFFF"/>
-                </a:solidFill>
-              </a:defRPr>
-            </a:pPr>
-            <a:r>
-              <a:t>Presenter: Abhishek Yadav  |  Roll No: 06  |  Email: abhishek176170@gmail.com</a:t>
-            </a:r>
-          </a:p>
-          <a:p>
-            <a:pPr algn="ctr">
+              <a:defRPr sz="1150">
+                <a:solidFill>
+                  <a:srgbClr val="2D3748"/>
+                </a:solidFill>
+                <a:latin typeface="Arial"/>
+              </a:defRPr>
+            </a:pPr>
+            <a:r>
+              <a:t>•  Automated Administrative Process: The system successfully replaces paper-based and email-based leave tracking with an automated, responsive web application.</a:t>
+            </a:r>
+          </a:p>
+          <a:p>
+            <a:pPr>
               <a:spcBef>
-                <a:spcPts val="600"/>
+                <a:spcPts val="1000"/>
               </a:spcBef>
-              <a:defRPr sz="1200" b="1">
-                <a:solidFill>
-                  <a:srgbClr val="34D399"/>
-                </a:solidFill>
-              </a:defRPr>
-            </a:pPr>
-            <a:r>
-              <a:t>GitHub Repository: https://github.com/abhishek176170-9867/Employee-management-system</a:t>
+              <a:defRPr sz="1150">
+                <a:solidFill>
+                  <a:srgbClr val="2D3748"/>
+                </a:solidFill>
+                <a:latin typeface="Arial"/>
+              </a:defRPr>
+            </a:pPr>
+            <a:r>
+              <a:t>•  Elimination of Calculation Errors: Smart business-days engine accurately excludes non-working days, preventing human counting errors.</a:t>
+            </a:r>
+          </a:p>
+          <a:p>
+            <a:pPr>
+              <a:spcBef>
+                <a:spcPts val="1000"/>
+              </a:spcBef>
+              <a:defRPr sz="1150">
+                <a:solidFill>
+                  <a:srgbClr val="2D3748"/>
+                </a:solidFill>
+                <a:latin typeface="Arial"/>
+              </a:defRPr>
+            </a:pPr>
+            <a:r>
+              <a:t>•  Improved Transparency: Both employees and managers have real-time visibility over balances, request statuses, and historical records.</a:t>
+            </a:r>
+          </a:p>
+          <a:p>
+            <a:pPr>
+              <a:spcBef>
+                <a:spcPts val="1000"/>
+              </a:spcBef>
+              <a:defRPr sz="1150">
+                <a:solidFill>
+                  <a:srgbClr val="2D3748"/>
+                </a:solidFill>
+                <a:latin typeface="Arial"/>
+              </a:defRPr>
+            </a:pPr>
+            <a:r>
+              <a:t>•  Production Cloud Readiness: Configured with Gunicorn WSGI and deployed to cloud hosting with continuous GitHub deployment.</a:t>
+            </a:r>
+          </a:p>
+        </p:txBody>
+      </p:sp>
+      <p:sp>
+        <p:nvSpPr>
+          <p:cNvPr id="10" name="Rectangle 9"/>
+          <p:cNvSpPr/>
+          <p:nvPr/>
+        </p:nvSpPr>
+        <p:spPr>
+          <a:xfrm>
+            <a:off x="6217920" y="1554480"/>
+            <a:ext cx="5212080" cy="4389120"/>
+          </a:xfrm>
+          <a:prstGeom prst="rect">
+            <a:avLst/>
+          </a:prstGeom>
+          <a:solidFill>
+            <a:srgbClr val="FFFFFF"/>
+          </a:solidFill>
+          <a:ln w="12700">
+            <a:solidFill>
+              <a:srgbClr val="E2E8F0"/>
+            </a:solidFill>
+          </a:ln>
+        </p:spPr>
+        <p:style>
+          <a:lnRef idx="1">
+            <a:schemeClr val="accent1"/>
+          </a:lnRef>
+          <a:fillRef idx="3">
+            <a:schemeClr val="accent1"/>
+          </a:fillRef>
+          <a:effectRef idx="2">
+            <a:schemeClr val="accent1"/>
+          </a:effectRef>
+          <a:fontRef idx="minor">
+            <a:schemeClr val="lt1"/>
+          </a:fontRef>
+        </p:style>
+        <p:txBody>
+          <a:bodyPr rtlCol="0" anchor="ctr"/>
+          <a:lstStyle/>
+          <a:p>
+            <a:pPr algn="ctr"/>
+          </a:p>
+        </p:txBody>
+      </p:sp>
+      <p:sp>
+        <p:nvSpPr>
+          <p:cNvPr id="11" name="TextBox 10"/>
+          <p:cNvSpPr txBox="1"/>
+          <p:nvPr/>
+        </p:nvSpPr>
+        <p:spPr>
+          <a:xfrm>
+            <a:off x="6400800" y="1691640"/>
+            <a:ext cx="4846320" cy="4114800"/>
+          </a:xfrm>
+          <a:prstGeom prst="rect">
+            <a:avLst/>
+          </a:prstGeom>
+          <a:noFill/>
+        </p:spPr>
+        <p:txBody>
+          <a:bodyPr wrap="square">
+            <a:spAutoFit/>
+          </a:bodyPr>
+          <a:lstStyle/>
+          <a:p>
+            <a:pPr>
+              <a:defRPr sz="1500" b="1">
+                <a:solidFill>
+                  <a:srgbClr val="2B6CB0"/>
+                </a:solidFill>
+                <a:latin typeface="Arial"/>
+              </a:defRPr>
+            </a:pPr>
+            <a:r>
+              <a:t>Future Scope &amp; Enhancements</a:t>
+            </a:r>
+          </a:p>
+          <a:p>
+            <a:pPr>
+              <a:spcBef>
+                <a:spcPts val="1000"/>
+              </a:spcBef>
+              <a:defRPr sz="1150">
+                <a:solidFill>
+                  <a:srgbClr val="2D3748"/>
+                </a:solidFill>
+                <a:latin typeface="Arial"/>
+              </a:defRPr>
+            </a:pPr>
+            <a:r>
+              <a:t>•  Email and SMS Notifications: Automated email alerts sent to managers upon new requests and to employees upon status updates.</a:t>
+            </a:r>
+          </a:p>
+          <a:p>
+            <a:pPr>
+              <a:spcBef>
+                <a:spcPts val="1000"/>
+              </a:spcBef>
+              <a:defRPr sz="1150">
+                <a:solidFill>
+                  <a:srgbClr val="2D3748"/>
+                </a:solidFill>
+                <a:latin typeface="Arial"/>
+              </a:defRPr>
+            </a:pPr>
+            <a:r>
+              <a:t>•  Calendar Synchronization: Integration with Google Calendar and Microsoft Outlook for synchronized team availability.</a:t>
+            </a:r>
+          </a:p>
+          <a:p>
+            <a:pPr>
+              <a:spcBef>
+                <a:spcPts val="1000"/>
+              </a:spcBef>
+              <a:defRPr sz="1150">
+                <a:solidFill>
+                  <a:srgbClr val="2D3748"/>
+                </a:solidFill>
+                <a:latin typeface="Arial"/>
+              </a:defRPr>
+            </a:pPr>
+            <a:r>
+              <a:t>•  Biometric Attendance Integration: Connecting leave records with physical office punch clocks or biometric attendance systems.</a:t>
+            </a:r>
+          </a:p>
+          <a:p>
+            <a:pPr>
+              <a:spcBef>
+                <a:spcPts val="1000"/>
+              </a:spcBef>
+              <a:defRPr sz="1150">
+                <a:solidFill>
+                  <a:srgbClr val="2D3748"/>
+                </a:solidFill>
+                <a:latin typeface="Arial"/>
+              </a:defRPr>
+            </a:pPr>
+            <a:r>
+              <a:t>•  Mobile Application: Developing dedicated Android and iOS companion apps using Flutter or React Native.</a:t>
             </a:r>
           </a:p>
         </p:txBody>
@@ -3860,25 +3936,95 @@
       <p:grpSpPr/>
       <p:sp>
         <p:nvSpPr>
-          <p:cNvPr id="2" name="Rounded Rectangle 1"/>
+          <p:cNvPr id="2" name="TextBox 1"/>
+          <p:cNvSpPr txBox="1"/>
+          <p:nvPr/>
+        </p:nvSpPr>
+        <p:spPr>
+          <a:xfrm>
+            <a:off x="731520" y="411480"/>
+            <a:ext cx="10698480" cy="274320"/>
+          </a:xfrm>
+          <a:prstGeom prst="rect">
+            <a:avLst/>
+          </a:prstGeom>
+          <a:noFill/>
+        </p:spPr>
+        <p:txBody>
+          <a:bodyPr wrap="none" lIns="0" tIns="0" rIns="0" bIns="0">
+            <a:spAutoFit/>
+          </a:bodyPr>
+          <a:lstStyle/>
+          <a:p>
+            <a:pPr>
+              <a:defRPr sz="1000" b="1">
+                <a:solidFill>
+                  <a:srgbClr val="2B6CB0"/>
+                </a:solidFill>
+                <a:latin typeface="Arial"/>
+              </a:defRPr>
+            </a:pPr>
+            <a:r>
+              <a:t>PROJECT BACKGROUND</a:t>
+            </a:r>
+          </a:p>
+        </p:txBody>
+      </p:sp>
+      <p:sp>
+        <p:nvSpPr>
+          <p:cNvPr id="3" name="TextBox 2"/>
+          <p:cNvSpPr txBox="1"/>
+          <p:nvPr/>
+        </p:nvSpPr>
+        <p:spPr>
+          <a:xfrm>
+            <a:off x="731520" y="685800"/>
+            <a:ext cx="10698480" cy="548640"/>
+          </a:xfrm>
+          <a:prstGeom prst="rect">
+            <a:avLst/>
+          </a:prstGeom>
+          <a:noFill/>
+        </p:spPr>
+        <p:txBody>
+          <a:bodyPr wrap="none" lIns="0" tIns="0" rIns="0" bIns="0">
+            <a:spAutoFit/>
+          </a:bodyPr>
+          <a:lstStyle/>
+          <a:p>
+            <a:pPr>
+              <a:defRPr sz="2200" b="1">
+                <a:solidFill>
+                  <a:srgbClr val="1A365D"/>
+                </a:solidFill>
+                <a:latin typeface="Arial"/>
+              </a:defRPr>
+            </a:pPr>
+            <a:r>
+              <a:t>Introduction &amp; Problem Statement</a:t>
+            </a:r>
+          </a:p>
+        </p:txBody>
+      </p:sp>
+      <p:sp>
+        <p:nvSpPr>
+          <p:cNvPr id="4" name="Rectangle 3"/>
           <p:cNvSpPr/>
           <p:nvPr/>
         </p:nvSpPr>
         <p:spPr>
           <a:xfrm>
-            <a:off x="731520" y="365760"/>
-            <a:ext cx="2560320" cy="320040"/>
-          </a:xfrm>
-          <a:prstGeom prst="roundRect">
+            <a:off x="731520" y="1325880"/>
+            <a:ext cx="10728655" cy="18288"/>
+          </a:xfrm>
+          <a:prstGeom prst="rect">
             <a:avLst/>
           </a:prstGeom>
           <a:solidFill>
-            <a:srgbClr val="EEF2FF"/>
+            <a:srgbClr val="2B6CB0"/>
           </a:solidFill>
-          <a:ln w="12700">
-            <a:solidFill>
-              <a:srgbClr val="C7D2FE"/>
-            </a:solidFill>
+          <a:ln>
+            <a:noFill/>
           </a:ln>
         </p:spPr>
         <p:style>
@@ -3896,67 +4042,23 @@
           </a:fontRef>
         </p:style>
         <p:txBody>
-          <a:bodyPr rtlCol="0" anchor="ctr" wrap="square" lIns="0" tIns="0" rIns="0" bIns="0"/>
-          <a:lstStyle/>
-          <a:p>
-            <a:pPr algn="ctr">
-              <a:defRPr sz="1000" b="1">
-                <a:solidFill>
-                  <a:srgbClr val="4F46E5"/>
-                </a:solidFill>
-              </a:defRPr>
-            </a:pPr>
-            <a:r>
-              <a:t>●  EXECUTIVE SUMMARY</a:t>
-            </a:r>
-          </a:p>
-        </p:txBody>
-      </p:sp>
-      <p:sp>
-        <p:nvSpPr>
-          <p:cNvPr id="3" name="TextBox 2"/>
-          <p:cNvSpPr txBox="1"/>
-          <p:nvPr/>
-        </p:nvSpPr>
-        <p:spPr>
-          <a:xfrm>
-            <a:off x="731520" y="777240"/>
-            <a:ext cx="10698480" cy="640080"/>
-          </a:xfrm>
-          <a:prstGeom prst="rect">
-            <a:avLst/>
-          </a:prstGeom>
-          <a:noFill/>
-        </p:spPr>
-        <p:txBody>
-          <a:bodyPr wrap="square" lIns="0" tIns="0" rIns="0" bIns="0">
-            <a:spAutoFit/>
-          </a:bodyPr>
-          <a:lstStyle/>
-          <a:p>
-            <a:pPr>
-              <a:defRPr sz="2600" b="1">
-                <a:solidFill>
-                  <a:srgbClr val="0F172A"/>
-                </a:solidFill>
-              </a:defRPr>
-            </a:pPr>
-            <a:r>
-              <a:t>Project Overview &amp; Business Problem</a:t>
-            </a:r>
-          </a:p>
-        </p:txBody>
-      </p:sp>
-      <p:sp>
-        <p:nvSpPr>
-          <p:cNvPr id="4" name="Rectangle 3"/>
+          <a:bodyPr rtlCol="0" anchor="ctr"/>
+          <a:lstStyle/>
+          <a:p>
+            <a:pPr algn="ctr"/>
+          </a:p>
+        </p:txBody>
+      </p:sp>
+      <p:sp>
+        <p:nvSpPr>
+          <p:cNvPr id="5" name="Rectangle 4"/>
           <p:cNvSpPr/>
           <p:nvPr/>
         </p:nvSpPr>
         <p:spPr>
           <a:xfrm>
-            <a:off x="731520" y="1463040"/>
-            <a:ext cx="10728655" cy="18288"/>
+            <a:off x="731520" y="6217920"/>
+            <a:ext cx="10728655" cy="13716"/>
           </a:xfrm>
           <a:prstGeom prst="rect">
             <a:avLst/>
@@ -3992,24 +4094,96 @@
       </p:sp>
       <p:sp>
         <p:nvSpPr>
-          <p:cNvPr id="5" name="Rounded Rectangle 4"/>
+          <p:cNvPr id="6" name="TextBox 5"/>
+          <p:cNvSpPr txBox="1"/>
+          <p:nvPr/>
+        </p:nvSpPr>
+        <p:spPr>
+          <a:xfrm>
+            <a:off x="731520" y="6263640"/>
+            <a:ext cx="7315200" cy="365760"/>
+          </a:xfrm>
+          <a:prstGeom prst="rect">
+            <a:avLst/>
+          </a:prstGeom>
+          <a:noFill/>
+        </p:spPr>
+        <p:txBody>
+          <a:bodyPr wrap="none" lIns="0" tIns="0" rIns="0" bIns="0">
+            <a:spAutoFit/>
+          </a:bodyPr>
+          <a:lstStyle/>
+          <a:p>
+            <a:pPr>
+              <a:defRPr sz="950">
+                <a:solidFill>
+                  <a:srgbClr val="718096"/>
+                </a:solidFill>
+                <a:latin typeface="Arial"/>
+              </a:defRPr>
+            </a:pPr>
+            <a:r>
+              <a:t>Employee Leave Management System | Project Presentation</a:t>
+            </a:r>
+          </a:p>
+        </p:txBody>
+      </p:sp>
+      <p:sp>
+        <p:nvSpPr>
+          <p:cNvPr id="7" name="TextBox 6"/>
+          <p:cNvSpPr txBox="1"/>
+          <p:nvPr/>
+        </p:nvSpPr>
+        <p:spPr>
+          <a:xfrm>
+            <a:off x="9601200" y="6263640"/>
+            <a:ext cx="1828800" cy="365760"/>
+          </a:xfrm>
+          <a:prstGeom prst="rect">
+            <a:avLst/>
+          </a:prstGeom>
+          <a:noFill/>
+        </p:spPr>
+        <p:txBody>
+          <a:bodyPr wrap="none" lIns="0" tIns="0" rIns="0" bIns="0">
+            <a:spAutoFit/>
+          </a:bodyPr>
+          <a:lstStyle/>
+          <a:p>
+            <a:pPr algn="r">
+              <a:defRPr sz="950">
+                <a:solidFill>
+                  <a:srgbClr val="718096"/>
+                </a:solidFill>
+                <a:latin typeface="Arial"/>
+              </a:defRPr>
+            </a:pPr>
+            <a:r>
+              <a:t>Slide 2 of 10</a:t>
+            </a:r>
+          </a:p>
+        </p:txBody>
+      </p:sp>
+      <p:sp>
+        <p:nvSpPr>
+          <p:cNvPr id="8" name="Rectangle 7"/>
           <p:cNvSpPr/>
           <p:nvPr/>
         </p:nvSpPr>
         <p:spPr>
           <a:xfrm>
-            <a:off x="731520" y="1737360"/>
-            <a:ext cx="5120640" cy="4572000"/>
-          </a:xfrm>
-          <a:prstGeom prst="roundRect">
+            <a:off x="731520" y="1554480"/>
+            <a:ext cx="5120640" cy="4389120"/>
+          </a:xfrm>
+          <a:prstGeom prst="rect">
             <a:avLst/>
           </a:prstGeom>
           <a:solidFill>
-            <a:srgbClr val="FEF2F2"/>
+            <a:srgbClr val="FFFFFF"/>
           </a:solidFill>
           <a:ln w="12700">
             <a:solidFill>
-              <a:srgbClr val="FECACA"/>
+              <a:srgbClr val="E2E8F0"/>
             </a:solidFill>
           </a:ln>
         </p:spPr>
@@ -4037,14 +4211,14 @@
       </p:sp>
       <p:sp>
         <p:nvSpPr>
-          <p:cNvPr id="6" name="TextBox 5"/>
+          <p:cNvPr id="9" name="TextBox 8"/>
           <p:cNvSpPr txBox="1"/>
           <p:nvPr/>
         </p:nvSpPr>
         <p:spPr>
           <a:xfrm>
-            <a:off x="1005840" y="1920240"/>
-            <a:ext cx="4572000" cy="4206240"/>
+            <a:off x="914400" y="1737360"/>
+            <a:ext cx="4754880" cy="4023360"/>
           </a:xfrm>
           <a:prstGeom prst="rect">
             <a:avLst/>
@@ -4058,98 +4232,103 @@
           <a:lstStyle/>
           <a:p>
             <a:pPr>
-              <a:defRPr sz="1600" b="1">
-                <a:solidFill>
-                  <a:srgbClr val="B91C1C"/>
-                </a:solidFill>
-              </a:defRPr>
-            </a:pPr>
-            <a:r>
-              <a:t>The Legacy Challenge: Manual &amp; Paper Leaves</a:t>
+              <a:defRPr sz="1500" b="1">
+                <a:solidFill>
+                  <a:srgbClr val="1A365D"/>
+                </a:solidFill>
+                <a:latin typeface="Arial"/>
+              </a:defRPr>
+            </a:pPr>
+            <a:r>
+              <a:t>Limitations of Manual Leave Systems</a:t>
             </a:r>
           </a:p>
           <a:p>
             <a:pPr>
               <a:spcBef>
-                <a:spcPts val="1200"/>
+                <a:spcPts val="1000"/>
               </a:spcBef>
               <a:defRPr sz="1200">
                 <a:solidFill>
-                  <a:srgbClr val="0F172A"/>
-                </a:solidFill>
-              </a:defRPr>
-            </a:pPr>
-            <a:r>
-              <a:t>❌  Calculation Errors: Weekends and company public holidays manually included, unfairly deducting employee allowances.</a:t>
+                  <a:srgbClr val="2D3748"/>
+                </a:solidFill>
+                <a:latin typeface="Arial"/>
+              </a:defRPr>
+            </a:pPr>
+            <a:r>
+              <a:t>•  Paper-Based Approvals: Leave applications submitted on physical forms or unorganized emails result in delayed responses and lost records.</a:t>
             </a:r>
           </a:p>
           <a:p>
             <a:pPr>
               <a:spcBef>
-                <a:spcPts val="1200"/>
+                <a:spcPts val="1000"/>
               </a:spcBef>
               <a:defRPr sz="1200">
                 <a:solidFill>
-                  <a:srgbClr val="0F172A"/>
-                </a:solidFill>
-              </a:defRPr>
-            </a:pPr>
-            <a:r>
-              <a:t>❌  Approval Delays: Physical paper forms and unorganized emails cause multi-day review bottlenecks for managers.</a:t>
+                  <a:srgbClr val="2D3748"/>
+                </a:solidFill>
+                <a:latin typeface="Arial"/>
+              </a:defRPr>
+            </a:pPr>
+            <a:r>
+              <a:t>•  Inaccurate Day Calculations: Weekends and official holidays are frequently miscounted, leading to incorrect deductions from employee allowances.</a:t>
             </a:r>
           </a:p>
           <a:p>
             <a:pPr>
               <a:spcBef>
-                <a:spcPts val="1200"/>
+                <a:spcPts val="1000"/>
               </a:spcBef>
               <a:defRPr sz="1200">
                 <a:solidFill>
-                  <a:srgbClr val="0F172A"/>
-                </a:solidFill>
-              </a:defRPr>
-            </a:pPr>
-            <a:r>
-              <a:t>❌  Quota Discrepancies: Lack of automated pending holds leads to double-booking and negative quota balances.</a:t>
+                  <a:srgbClr val="2D3748"/>
+                </a:solidFill>
+                <a:latin typeface="Arial"/>
+              </a:defRPr>
+            </a:pPr>
+            <a:r>
+              <a:t>•  Quota Discrepancies: Without centralized balance tracking, employees may overdraw their quotas before approval.</a:t>
             </a:r>
           </a:p>
           <a:p>
             <a:pPr>
               <a:spcBef>
-                <a:spcPts val="1200"/>
+                <a:spcPts val="1000"/>
               </a:spcBef>
               <a:defRPr sz="1200">
                 <a:solidFill>
-                  <a:srgbClr val="0F172A"/>
-                </a:solidFill>
-              </a:defRPr>
-            </a:pPr>
-            <a:r>
-              <a:t>❌  Audit Non-Compliance: No centralized immutable audit logs or CSV compliance exports for HR audits.</a:t>
-            </a:r>
-          </a:p>
-        </p:txBody>
-      </p:sp>
-      <p:sp>
-        <p:nvSpPr>
-          <p:cNvPr id="7" name="Rounded Rectangle 6"/>
+                  <a:srgbClr val="2D3748"/>
+                </a:solidFill>
+                <a:latin typeface="Arial"/>
+              </a:defRPr>
+            </a:pPr>
+            <a:r>
+              <a:t>•  Lack of Audit Trail: Difficult for HR departments to maintain transparent records and generate compliance reports for management audits.</a:t>
+            </a:r>
+          </a:p>
+        </p:txBody>
+      </p:sp>
+      <p:sp>
+        <p:nvSpPr>
+          <p:cNvPr id="10" name="Rectangle 9"/>
           <p:cNvSpPr/>
           <p:nvPr/>
         </p:nvSpPr>
         <p:spPr>
           <a:xfrm>
-            <a:off x="6217920" y="1737360"/>
-            <a:ext cx="5212080" cy="4572000"/>
-          </a:xfrm>
-          <a:prstGeom prst="roundRect">
+            <a:off x="6217920" y="1554480"/>
+            <a:ext cx="5212080" cy="4389120"/>
+          </a:xfrm>
+          <a:prstGeom prst="rect">
             <a:avLst/>
           </a:prstGeom>
           <a:solidFill>
-            <a:srgbClr val="F0FDF4"/>
+            <a:srgbClr val="F7FAFC"/>
           </a:solidFill>
           <a:ln w="12700">
             <a:solidFill>
-              <a:srgbClr val="BBF7D0"/>
+              <a:srgbClr val="E2E8F0"/>
             </a:solidFill>
           </a:ln>
         </p:spPr>
@@ -4177,14 +4356,14 @@
       </p:sp>
       <p:sp>
         <p:nvSpPr>
-          <p:cNvPr id="8" name="TextBox 7"/>
+          <p:cNvPr id="11" name="TextBox 10"/>
           <p:cNvSpPr txBox="1"/>
           <p:nvPr/>
         </p:nvSpPr>
         <p:spPr>
           <a:xfrm>
-            <a:off x="6492240" y="1920240"/>
-            <a:ext cx="4663440" cy="4206240"/>
+            <a:off x="6400800" y="1737360"/>
+            <a:ext cx="4846320" cy="4023360"/>
           </a:xfrm>
           <a:prstGeom prst="rect">
             <a:avLst/>
@@ -4198,74 +4377,79 @@
           <a:lstStyle/>
           <a:p>
             <a:pPr>
-              <a:defRPr sz="1600" b="1">
-                <a:solidFill>
-                  <a:srgbClr val="059669"/>
-                </a:solidFill>
-              </a:defRPr>
-            </a:pPr>
-            <a:r>
-              <a:t>The LeaveFlow Solution: Automated Cloud System</a:t>
+              <a:defRPr sz="1500" b="1">
+                <a:solidFill>
+                  <a:srgbClr val="2B6CB0"/>
+                </a:solidFill>
+                <a:latin typeface="Arial"/>
+              </a:defRPr>
+            </a:pPr>
+            <a:r>
+              <a:t>The Proposed Web Solution</a:t>
             </a:r>
           </a:p>
           <a:p>
             <a:pPr>
               <a:spcBef>
-                <a:spcPts val="1200"/>
+                <a:spcPts val="1000"/>
               </a:spcBef>
               <a:defRPr sz="1200">
                 <a:solidFill>
-                  <a:srgbClr val="0F172A"/>
-                </a:solidFill>
-              </a:defRPr>
-            </a:pPr>
-            <a:r>
-              <a:t>✔  Smart Calendar Engine: Dynamic arithmetic excluding Saturdays, Sundays, and gazetted company holidays automatically.</a:t>
+                  <a:srgbClr val="2D3748"/>
+                </a:solidFill>
+                <a:latin typeface="Arial"/>
+              </a:defRPr>
+            </a:pPr>
+            <a:r>
+              <a:t>•  Centralized Web Portal: A single responsive portal accessible by employees and managers from any modern browser.</a:t>
             </a:r>
           </a:p>
           <a:p>
             <a:pPr>
               <a:spcBef>
-                <a:spcPts val="1200"/>
+                <a:spcPts val="1000"/>
               </a:spcBef>
               <a:defRPr sz="1200">
                 <a:solidFill>
-                  <a:srgbClr val="0F172A"/>
-                </a:solidFill>
-              </a:defRPr>
-            </a:pPr>
-            <a:r>
-              <a:t>✔  Instant Self-Service: Real-time balance computation, half-day leaves, and immediate cancellation with quota refund.</a:t>
+                  <a:srgbClr val="2D3748"/>
+                </a:solidFill>
+                <a:latin typeface="Arial"/>
+              </a:defRPr>
+            </a:pPr>
+            <a:r>
+              <a:t>•  Automatic Calendar Engine: Working days are calculated automatically by excluding Saturdays, Sundays, and gazetted holidays in real-time.</a:t>
             </a:r>
           </a:p>
           <a:p>
             <a:pPr>
               <a:spcBef>
-                <a:spcPts val="1200"/>
+                <a:spcPts val="1000"/>
               </a:spcBef>
               <a:defRPr sz="1200">
                 <a:solidFill>
-                  <a:srgbClr val="0F172A"/>
-                </a:solidFill>
-              </a:defRPr>
-            </a:pPr>
-            <a:r>
-              <a:t>✔  HR Approvals Queue: One-click manager review modal with custom feedback notes and live attendance tracking.</a:t>
+                  <a:srgbClr val="2D3748"/>
+                </a:solidFill>
+                <a:latin typeface="Arial"/>
+              </a:defRPr>
+            </a:pPr>
+            <a:r>
+              <a:t>•  Role-Based Dashboards: Dedicated interfaces for employees to track balances and for HR administrators to manage approvals.</a:t>
             </a:r>
           </a:p>
           <a:p>
             <a:pPr>
               <a:spcBef>
-                <a:spcPts val="1200"/>
+                <a:spcPts val="1000"/>
               </a:spcBef>
               <a:defRPr sz="1200">
                 <a:solidFill>
-                  <a:srgbClr val="0F172A"/>
-                </a:solidFill>
-              </a:defRPr>
-            </a:pPr>
-            <a:r>
-              <a:t>✔  Compliance &amp; Analytics: Interactive Chart.js visualizations, automated audit trails, and multi-filter CSV streaming.</a:t>
+                  <a:srgbClr val="2D3748"/>
+                </a:solidFill>
+                <a:latin typeface="Arial"/>
+              </a:defRPr>
+            </a:pPr>
+            <a:r>
+              <a:t>•  Complete History &amp; Export: Instant self-service cancellation, audit logging, and one-click export of leave records to CSV format.</a:t>
             </a:r>
           </a:p>
         </p:txBody>
@@ -4290,25 +4474,95 @@
       <p:grpSpPr/>
       <p:sp>
         <p:nvSpPr>
-          <p:cNvPr id="2" name="Rounded Rectangle 1"/>
+          <p:cNvPr id="2" name="TextBox 1"/>
+          <p:cNvSpPr txBox="1"/>
+          <p:nvPr/>
+        </p:nvSpPr>
+        <p:spPr>
+          <a:xfrm>
+            <a:off x="731520" y="411480"/>
+            <a:ext cx="10698480" cy="274320"/>
+          </a:xfrm>
+          <a:prstGeom prst="rect">
+            <a:avLst/>
+          </a:prstGeom>
+          <a:noFill/>
+        </p:spPr>
+        <p:txBody>
+          <a:bodyPr wrap="none" lIns="0" tIns="0" rIns="0" bIns="0">
+            <a:spAutoFit/>
+          </a:bodyPr>
+          <a:lstStyle/>
+          <a:p>
+            <a:pPr>
+              <a:defRPr sz="1000" b="1">
+                <a:solidFill>
+                  <a:srgbClr val="2B6CB0"/>
+                </a:solidFill>
+                <a:latin typeface="Arial"/>
+              </a:defRPr>
+            </a:pPr>
+            <a:r>
+              <a:t>PROJECT GOALS</a:t>
+            </a:r>
+          </a:p>
+        </p:txBody>
+      </p:sp>
+      <p:sp>
+        <p:nvSpPr>
+          <p:cNvPr id="3" name="TextBox 2"/>
+          <p:cNvSpPr txBox="1"/>
+          <p:nvPr/>
+        </p:nvSpPr>
+        <p:spPr>
+          <a:xfrm>
+            <a:off x="731520" y="685800"/>
+            <a:ext cx="10698480" cy="548640"/>
+          </a:xfrm>
+          <a:prstGeom prst="rect">
+            <a:avLst/>
+          </a:prstGeom>
+          <a:noFill/>
+        </p:spPr>
+        <p:txBody>
+          <a:bodyPr wrap="none" lIns="0" tIns="0" rIns="0" bIns="0">
+            <a:spAutoFit/>
+          </a:bodyPr>
+          <a:lstStyle/>
+          <a:p>
+            <a:pPr>
+              <a:defRPr sz="2200" b="1">
+                <a:solidFill>
+                  <a:srgbClr val="1A365D"/>
+                </a:solidFill>
+                <a:latin typeface="Arial"/>
+              </a:defRPr>
+            </a:pPr>
+            <a:r>
+              <a:t>Objectives of the Project</a:t>
+            </a:r>
+          </a:p>
+        </p:txBody>
+      </p:sp>
+      <p:sp>
+        <p:nvSpPr>
+          <p:cNvPr id="4" name="Rectangle 3"/>
           <p:cNvSpPr/>
           <p:nvPr/>
         </p:nvSpPr>
         <p:spPr>
           <a:xfrm>
-            <a:off x="731520" y="365760"/>
-            <a:ext cx="2560320" cy="320040"/>
-          </a:xfrm>
-          <a:prstGeom prst="roundRect">
+            <a:off x="731520" y="1325880"/>
+            <a:ext cx="10728655" cy="18288"/>
+          </a:xfrm>
+          <a:prstGeom prst="rect">
             <a:avLst/>
           </a:prstGeom>
           <a:solidFill>
-            <a:srgbClr val="EEF2FF"/>
+            <a:srgbClr val="2B6CB0"/>
           </a:solidFill>
-          <a:ln w="12700">
-            <a:solidFill>
-              <a:srgbClr val="C7D2FE"/>
-            </a:solidFill>
+          <a:ln>
+            <a:noFill/>
           </a:ln>
         </p:spPr>
         <p:style>
@@ -4326,67 +4580,23 @@
           </a:fontRef>
         </p:style>
         <p:txBody>
-          <a:bodyPr rtlCol="0" anchor="ctr" wrap="square" lIns="0" tIns="0" rIns="0" bIns="0"/>
-          <a:lstStyle/>
-          <a:p>
-            <a:pPr algn="ctr">
-              <a:defRPr sz="1000" b="1">
-                <a:solidFill>
-                  <a:srgbClr val="4F46E5"/>
-                </a:solidFill>
-              </a:defRPr>
-            </a:pPr>
-            <a:r>
-              <a:t>●  CORE GOALS &amp; SCOPE</a:t>
-            </a:r>
-          </a:p>
-        </p:txBody>
-      </p:sp>
-      <p:sp>
-        <p:nvSpPr>
-          <p:cNvPr id="3" name="TextBox 2"/>
-          <p:cNvSpPr txBox="1"/>
-          <p:nvPr/>
-        </p:nvSpPr>
-        <p:spPr>
-          <a:xfrm>
-            <a:off x="731520" y="777240"/>
-            <a:ext cx="10698480" cy="640080"/>
-          </a:xfrm>
-          <a:prstGeom prst="rect">
-            <a:avLst/>
-          </a:prstGeom>
-          <a:noFill/>
-        </p:spPr>
-        <p:txBody>
-          <a:bodyPr wrap="square" lIns="0" tIns="0" rIns="0" bIns="0">
-            <a:spAutoFit/>
-          </a:bodyPr>
-          <a:lstStyle/>
-          <a:p>
-            <a:pPr>
-              <a:defRPr sz="2600" b="1">
-                <a:solidFill>
-                  <a:srgbClr val="0F172A"/>
-                </a:solidFill>
-              </a:defRPr>
-            </a:pPr>
-            <a:r>
-              <a:t>Project Strategic Objectives</a:t>
-            </a:r>
-          </a:p>
-        </p:txBody>
-      </p:sp>
-      <p:sp>
-        <p:nvSpPr>
-          <p:cNvPr id="4" name="Rectangle 3"/>
+          <a:bodyPr rtlCol="0" anchor="ctr"/>
+          <a:lstStyle/>
+          <a:p>
+            <a:pPr algn="ctr"/>
+          </a:p>
+        </p:txBody>
+      </p:sp>
+      <p:sp>
+        <p:nvSpPr>
+          <p:cNvPr id="5" name="Rectangle 4"/>
           <p:cNvSpPr/>
           <p:nvPr/>
         </p:nvSpPr>
         <p:spPr>
           <a:xfrm>
-            <a:off x="731520" y="1463040"/>
-            <a:ext cx="10728655" cy="18288"/>
+            <a:off x="731520" y="6217920"/>
+            <a:ext cx="10728655" cy="13716"/>
           </a:xfrm>
           <a:prstGeom prst="rect">
             <a:avLst/>
@@ -4422,20 +4632,92 @@
       </p:sp>
       <p:sp>
         <p:nvSpPr>
-          <p:cNvPr id="5" name="Rounded Rectangle 4"/>
+          <p:cNvPr id="6" name="TextBox 5"/>
+          <p:cNvSpPr txBox="1"/>
+          <p:nvPr/>
+        </p:nvSpPr>
+        <p:spPr>
+          <a:xfrm>
+            <a:off x="731520" y="6263640"/>
+            <a:ext cx="7315200" cy="365760"/>
+          </a:xfrm>
+          <a:prstGeom prst="rect">
+            <a:avLst/>
+          </a:prstGeom>
+          <a:noFill/>
+        </p:spPr>
+        <p:txBody>
+          <a:bodyPr wrap="none" lIns="0" tIns="0" rIns="0" bIns="0">
+            <a:spAutoFit/>
+          </a:bodyPr>
+          <a:lstStyle/>
+          <a:p>
+            <a:pPr>
+              <a:defRPr sz="950">
+                <a:solidFill>
+                  <a:srgbClr val="718096"/>
+                </a:solidFill>
+                <a:latin typeface="Arial"/>
+              </a:defRPr>
+            </a:pPr>
+            <a:r>
+              <a:t>Employee Leave Management System | Project Presentation</a:t>
+            </a:r>
+          </a:p>
+        </p:txBody>
+      </p:sp>
+      <p:sp>
+        <p:nvSpPr>
+          <p:cNvPr id="7" name="TextBox 6"/>
+          <p:cNvSpPr txBox="1"/>
+          <p:nvPr/>
+        </p:nvSpPr>
+        <p:spPr>
+          <a:xfrm>
+            <a:off x="9601200" y="6263640"/>
+            <a:ext cx="1828800" cy="365760"/>
+          </a:xfrm>
+          <a:prstGeom prst="rect">
+            <a:avLst/>
+          </a:prstGeom>
+          <a:noFill/>
+        </p:spPr>
+        <p:txBody>
+          <a:bodyPr wrap="none" lIns="0" tIns="0" rIns="0" bIns="0">
+            <a:spAutoFit/>
+          </a:bodyPr>
+          <a:lstStyle/>
+          <a:p>
+            <a:pPr algn="r">
+              <a:defRPr sz="950">
+                <a:solidFill>
+                  <a:srgbClr val="718096"/>
+                </a:solidFill>
+                <a:latin typeface="Arial"/>
+              </a:defRPr>
+            </a:pPr>
+            <a:r>
+              <a:t>Slide 3 of 10</a:t>
+            </a:r>
+          </a:p>
+        </p:txBody>
+      </p:sp>
+      <p:sp>
+        <p:nvSpPr>
+          <p:cNvPr id="8" name="Rectangle 7"/>
           <p:cNvSpPr/>
           <p:nvPr/>
         </p:nvSpPr>
         <p:spPr>
           <a:xfrm>
-            <a:off x="731520" y="1737360"/>
-            <a:ext cx="5212080" cy="2011680"/>
-          </a:xfrm>
-          <a:prstGeom prst="roundRect">
+            <a:off x="731520" y="1554480"/>
+            <a:ext cx="10728655" cy="786384"/>
+          </a:xfrm>
+          <a:prstGeom prst="rect">
             <a:avLst/>
           </a:prstGeom>
           <a:solidFill>
-            <a:srgbClr val="F8FAFC"/>
+            <a:srgbClr val="FFFFFF"/>
           </a:solidFill>
           <a:ln w="12700">
             <a:solidFill>
@@ -4467,20 +4749,20 @@
       </p:sp>
       <p:sp>
         <p:nvSpPr>
-          <p:cNvPr id="6" name="Rounded Rectangle 5"/>
+          <p:cNvPr id="9" name="Rectangle 8"/>
           <p:cNvSpPr/>
           <p:nvPr/>
         </p:nvSpPr>
         <p:spPr>
           <a:xfrm>
-            <a:off x="731520" y="1737360"/>
-            <a:ext cx="164592" cy="2011680"/>
-          </a:xfrm>
-          <a:prstGeom prst="roundRect">
+            <a:off x="731520" y="1554480"/>
+            <a:ext cx="109728" cy="786384"/>
+          </a:xfrm>
+          <a:prstGeom prst="rect">
             <a:avLst/>
           </a:prstGeom>
           <a:solidFill>
-            <a:srgbClr val="4F46E5"/>
+            <a:srgbClr val="2B6CB0"/>
           </a:solidFill>
           <a:ln>
             <a:noFill/>
@@ -4510,14 +4792,14 @@
       </p:sp>
       <p:sp>
         <p:nvSpPr>
-          <p:cNvPr id="7" name="TextBox 6"/>
+          <p:cNvPr id="10" name="TextBox 9"/>
           <p:cNvSpPr txBox="1"/>
           <p:nvPr/>
         </p:nvSpPr>
         <p:spPr>
           <a:xfrm>
-            <a:off x="1097280" y="1965960"/>
-            <a:ext cx="4572000" cy="1554480"/>
+            <a:off x="1005840" y="1627632"/>
+            <a:ext cx="10241280" cy="640080"/>
           </a:xfrm>
           <a:prstGeom prst="rect">
             <a:avLst/>
@@ -4531,49 +4813,51 @@
           <a:lstStyle/>
           <a:p>
             <a:pPr>
-              <a:defRPr sz="1500" b="1">
-                <a:solidFill>
-                  <a:srgbClr val="0F172A"/>
-                </a:solidFill>
-              </a:defRPr>
-            </a:pPr>
-            <a:r>
-              <a:t>1. End-to-End Lifecycle Automation</a:t>
+              <a:defRPr sz="1300" b="1">
+                <a:solidFill>
+                  <a:srgbClr val="1A365D"/>
+                </a:solidFill>
+                <a:latin typeface="Arial"/>
+              </a:defRPr>
+            </a:pPr>
+            <a:r>
+              <a:t>1. End-to-End Workflow Automation</a:t>
             </a:r>
           </a:p>
           <a:p>
             <a:pPr>
               <a:spcBef>
-                <a:spcPts val="800"/>
+                <a:spcPts val="200"/>
               </a:spcBef>
-              <a:defRPr sz="1200">
-                <a:solidFill>
-                  <a:srgbClr val="64748B"/>
-                </a:solidFill>
-              </a:defRPr>
-            </a:pPr>
-            <a:r>
-              <a:t>Transform employee time-off requests into a paperless digital workflow from submission through approval, quota deduction, and historical archiving.</a:t>
-            </a:r>
-          </a:p>
-        </p:txBody>
-      </p:sp>
-      <p:sp>
-        <p:nvSpPr>
-          <p:cNvPr id="8" name="Rounded Rectangle 7"/>
+              <a:defRPr sz="1100">
+                <a:solidFill>
+                  <a:srgbClr val="2D3748"/>
+                </a:solidFill>
+                <a:latin typeface="Arial"/>
+              </a:defRPr>
+            </a:pPr>
+            <a:r>
+              <a:t>Eliminate paper forms by providing a digital lifecycle: submission, balance verification, manager review, quota deduction, and historical archiving.</a:t>
+            </a:r>
+          </a:p>
+        </p:txBody>
+      </p:sp>
+      <p:sp>
+        <p:nvSpPr>
+          <p:cNvPr id="11" name="Rectangle 10"/>
           <p:cNvSpPr/>
           <p:nvPr/>
         </p:nvSpPr>
         <p:spPr>
           <a:xfrm>
-            <a:off x="6126480" y="1737360"/>
-            <a:ext cx="5212080" cy="2011680"/>
-          </a:xfrm>
-          <a:prstGeom prst="roundRect">
+            <a:off x="731520" y="2450591"/>
+            <a:ext cx="10728655" cy="786384"/>
+          </a:xfrm>
+          <a:prstGeom prst="rect">
             <a:avLst/>
           </a:prstGeom>
           <a:solidFill>
-            <a:srgbClr val="F8FAFC"/>
+            <a:srgbClr val="FFFFFF"/>
           </a:solidFill>
           <a:ln w="12700">
             <a:solidFill>
@@ -4605,20 +4889,20 @@
       </p:sp>
       <p:sp>
         <p:nvSpPr>
-          <p:cNvPr id="9" name="Rounded Rectangle 8"/>
+          <p:cNvPr id="12" name="Rectangle 11"/>
           <p:cNvSpPr/>
           <p:nvPr/>
         </p:nvSpPr>
         <p:spPr>
           <a:xfrm>
-            <a:off x="6126480" y="1737360"/>
-            <a:ext cx="164592" cy="2011680"/>
-          </a:xfrm>
-          <a:prstGeom prst="roundRect">
+            <a:off x="731520" y="2450591"/>
+            <a:ext cx="109728" cy="786384"/>
+          </a:xfrm>
+          <a:prstGeom prst="rect">
             <a:avLst/>
           </a:prstGeom>
           <a:solidFill>
-            <a:srgbClr val="059669"/>
+            <a:srgbClr val="2B6CB0"/>
           </a:solidFill>
           <a:ln>
             <a:noFill/>
@@ -4648,14 +4932,14 @@
       </p:sp>
       <p:sp>
         <p:nvSpPr>
-          <p:cNvPr id="10" name="TextBox 9"/>
+          <p:cNvPr id="13" name="TextBox 12"/>
           <p:cNvSpPr txBox="1"/>
           <p:nvPr/>
         </p:nvSpPr>
         <p:spPr>
           <a:xfrm>
-            <a:off x="6492240" y="1965960"/>
-            <a:ext cx="4572000" cy="1554480"/>
+            <a:off x="1005840" y="2523743"/>
+            <a:ext cx="10241280" cy="640080"/>
           </a:xfrm>
           <a:prstGeom prst="rect">
             <a:avLst/>
@@ -4669,49 +4953,51 @@
           <a:lstStyle/>
           <a:p>
             <a:pPr>
-              <a:defRPr sz="1500" b="1">
-                <a:solidFill>
-                  <a:srgbClr val="0F172A"/>
-                </a:solidFill>
-              </a:defRPr>
-            </a:pPr>
-            <a:r>
-              <a:t>2. Intelligent Working-Days Engine</a:t>
+              <a:defRPr sz="1300" b="1">
+                <a:solidFill>
+                  <a:srgbClr val="1A365D"/>
+                </a:solidFill>
+                <a:latin typeface="Arial"/>
+              </a:defRPr>
+            </a:pPr>
+            <a:r>
+              <a:t>2. Accurate Working-Days Calculation</a:t>
             </a:r>
           </a:p>
           <a:p>
             <a:pPr>
               <a:spcBef>
-                <a:spcPts val="800"/>
+                <a:spcPts val="200"/>
               </a:spcBef>
-              <a:defRPr sz="1200">
-                <a:solidFill>
-                  <a:srgbClr val="64748B"/>
-                </a:solidFill>
-              </a:defRPr>
-            </a:pPr>
-            <a:r>
-              <a:t>Eliminate human error by automatically filtering company-observed holidays and weekends from leave calculations in real-time.</a:t>
-            </a:r>
-          </a:p>
-        </p:txBody>
-      </p:sp>
-      <p:sp>
-        <p:nvSpPr>
-          <p:cNvPr id="11" name="Rounded Rectangle 10"/>
+              <a:defRPr sz="1100">
+                <a:solidFill>
+                  <a:srgbClr val="2D3748"/>
+                </a:solidFill>
+                <a:latin typeface="Arial"/>
+              </a:defRPr>
+            </a:pPr>
+            <a:r>
+              <a:t>Develop an intelligent calendar calculation algorithm that accurately skips weekends (Saturdays and Sundays) and gazetted corporate holidays.</a:t>
+            </a:r>
+          </a:p>
+        </p:txBody>
+      </p:sp>
+      <p:sp>
+        <p:nvSpPr>
+          <p:cNvPr id="14" name="Rectangle 13"/>
           <p:cNvSpPr/>
           <p:nvPr/>
         </p:nvSpPr>
         <p:spPr>
           <a:xfrm>
-            <a:off x="731520" y="4023360"/>
-            <a:ext cx="5212080" cy="2011680"/>
-          </a:xfrm>
-          <a:prstGeom prst="roundRect">
+            <a:off x="731520" y="3346704"/>
+            <a:ext cx="10728655" cy="786384"/>
+          </a:xfrm>
+          <a:prstGeom prst="rect">
             <a:avLst/>
           </a:prstGeom>
           <a:solidFill>
-            <a:srgbClr val="F8FAFC"/>
+            <a:srgbClr val="FFFFFF"/>
           </a:solidFill>
           <a:ln w="12700">
             <a:solidFill>
@@ -4743,20 +5029,20 @@
       </p:sp>
       <p:sp>
         <p:nvSpPr>
-          <p:cNvPr id="12" name="Rounded Rectangle 11"/>
+          <p:cNvPr id="15" name="Rectangle 14"/>
           <p:cNvSpPr/>
           <p:nvPr/>
         </p:nvSpPr>
         <p:spPr>
           <a:xfrm>
-            <a:off x="731520" y="4023360"/>
-            <a:ext cx="164592" cy="2011680"/>
-          </a:xfrm>
-          <a:prstGeom prst="roundRect">
+            <a:off x="731520" y="3346704"/>
+            <a:ext cx="109728" cy="786384"/>
+          </a:xfrm>
+          <a:prstGeom prst="rect">
             <a:avLst/>
           </a:prstGeom>
           <a:solidFill>
-            <a:srgbClr val="7C3AED"/>
+            <a:srgbClr val="2B6CB0"/>
           </a:solidFill>
           <a:ln>
             <a:noFill/>
@@ -4786,14 +5072,14 @@
       </p:sp>
       <p:sp>
         <p:nvSpPr>
-          <p:cNvPr id="13" name="TextBox 12"/>
+          <p:cNvPr id="16" name="TextBox 15"/>
           <p:cNvSpPr txBox="1"/>
           <p:nvPr/>
         </p:nvSpPr>
         <p:spPr>
           <a:xfrm>
-            <a:off x="1097280" y="4251960"/>
-            <a:ext cx="4572000" cy="1554480"/>
+            <a:off x="1005840" y="3419856"/>
+            <a:ext cx="10241280" cy="640080"/>
           </a:xfrm>
           <a:prstGeom prst="rect">
             <a:avLst/>
@@ -4807,10 +5093,11 @@
           <a:lstStyle/>
           <a:p>
             <a:pPr>
-              <a:defRPr sz="1500" b="1">
-                <a:solidFill>
-                  <a:srgbClr val="0F172A"/>
-                </a:solidFill>
+              <a:defRPr sz="1300" b="1">
+                <a:solidFill>
+                  <a:srgbClr val="1A365D"/>
+                </a:solidFill>
+                <a:latin typeface="Arial"/>
               </a:defRPr>
             </a:pPr>
             <a:r>
@@ -4820,36 +5107,37 @@
           <a:p>
             <a:pPr>
               <a:spcBef>
-                <a:spcPts val="800"/>
+                <a:spcPts val="200"/>
               </a:spcBef>
-              <a:defRPr sz="1200">
-                <a:solidFill>
-                  <a:srgbClr val="64748B"/>
-                </a:solidFill>
-              </a:defRPr>
-            </a:pPr>
-            <a:r>
-              <a:t>Isolate employee self-service actions from administrative privileges, ensuring role-based privacy and secure session management.</a:t>
-            </a:r>
-          </a:p>
-        </p:txBody>
-      </p:sp>
-      <p:sp>
-        <p:nvSpPr>
-          <p:cNvPr id="14" name="Rounded Rectangle 13"/>
+              <a:defRPr sz="1100">
+                <a:solidFill>
+                  <a:srgbClr val="2D3748"/>
+                </a:solidFill>
+                <a:latin typeface="Arial"/>
+              </a:defRPr>
+            </a:pPr>
+            <a:r>
+              <a:t>Implement secure authentication separating standard employee actions (apply, view, cancel) from HR administrator rights (approve, reject, add staff, calibrate quotas).</a:t>
+            </a:r>
+          </a:p>
+        </p:txBody>
+      </p:sp>
+      <p:sp>
+        <p:nvSpPr>
+          <p:cNvPr id="17" name="Rectangle 16"/>
           <p:cNvSpPr/>
           <p:nvPr/>
         </p:nvSpPr>
         <p:spPr>
           <a:xfrm>
-            <a:off x="6126480" y="4023360"/>
-            <a:ext cx="5212080" cy="2011680"/>
-          </a:xfrm>
-          <a:prstGeom prst="roundRect">
+            <a:off x="731520" y="4242816"/>
+            <a:ext cx="10728655" cy="786384"/>
+          </a:xfrm>
+          <a:prstGeom prst="rect">
             <a:avLst/>
           </a:prstGeom>
           <a:solidFill>
-            <a:srgbClr val="F8FAFC"/>
+            <a:srgbClr val="FFFFFF"/>
           </a:solidFill>
           <a:ln w="12700">
             <a:solidFill>
@@ -4881,20 +5169,20 @@
       </p:sp>
       <p:sp>
         <p:nvSpPr>
-          <p:cNvPr id="15" name="Rounded Rectangle 14"/>
+          <p:cNvPr id="18" name="Rectangle 17"/>
           <p:cNvSpPr/>
           <p:nvPr/>
         </p:nvSpPr>
         <p:spPr>
           <a:xfrm>
-            <a:off x="6126480" y="4023360"/>
-            <a:ext cx="164592" cy="2011680"/>
-          </a:xfrm>
-          <a:prstGeom prst="roundRect">
+            <a:off x="731520" y="4242816"/>
+            <a:ext cx="109728" cy="786384"/>
+          </a:xfrm>
+          <a:prstGeom prst="rect">
             <a:avLst/>
           </a:prstGeom>
           <a:solidFill>
-            <a:srgbClr val="D97706"/>
+            <a:srgbClr val="2B6CB0"/>
           </a:solidFill>
           <a:ln>
             <a:noFill/>
@@ -4924,14 +5212,14 @@
       </p:sp>
       <p:sp>
         <p:nvSpPr>
-          <p:cNvPr id="16" name="TextBox 15"/>
+          <p:cNvPr id="19" name="TextBox 18"/>
           <p:cNvSpPr txBox="1"/>
           <p:nvPr/>
         </p:nvSpPr>
         <p:spPr>
           <a:xfrm>
-            <a:off x="6492240" y="4251960"/>
-            <a:ext cx="4572000" cy="1554480"/>
+            <a:off x="1005840" y="4315968"/>
+            <a:ext cx="10241280" cy="640080"/>
           </a:xfrm>
           <a:prstGeom prst="rect">
             <a:avLst/>
@@ -4945,29 +5233,171 @@
           <a:lstStyle/>
           <a:p>
             <a:pPr>
-              <a:defRPr sz="1500" b="1">
-                <a:solidFill>
-                  <a:srgbClr val="0F172A"/>
-                </a:solidFill>
-              </a:defRPr>
-            </a:pPr>
-            <a:r>
-              <a:t>4. Real-Time Analytics &amp; Audit Compliance</a:t>
+              <a:defRPr sz="1300" b="1">
+                <a:solidFill>
+                  <a:srgbClr val="1A365D"/>
+                </a:solidFill>
+                <a:latin typeface="Arial"/>
+              </a:defRPr>
+            </a:pPr>
+            <a:r>
+              <a:t>4. Real-Time Quota &amp; Attendance Tracking</a:t>
             </a:r>
           </a:p>
           <a:p>
             <a:pPr>
               <a:spcBef>
-                <a:spcPts val="800"/>
+                <a:spcPts val="200"/>
               </a:spcBef>
-              <a:defRPr sz="1200">
-                <a:solidFill>
-                  <a:srgbClr val="64748B"/>
-                </a:solidFill>
-              </a:defRPr>
-            </a:pPr>
-            <a:r>
-              <a:t>Empower HR leaders with dynamic Chart.js utilization trends, employee distribution metrics, and audit-ready CSV exports.</a:t>
+              <a:defRPr sz="1100">
+                <a:solidFill>
+                  <a:srgbClr val="2D3748"/>
+                </a:solidFill>
+                <a:latin typeface="Arial"/>
+              </a:defRPr>
+            </a:pPr>
+            <a:r>
+              <a:t>Display live leave balance cards with dynamic progress meters, preventing duplicate applications or requests exceeding available balances.</a:t>
+            </a:r>
+          </a:p>
+        </p:txBody>
+      </p:sp>
+      <p:sp>
+        <p:nvSpPr>
+          <p:cNvPr id="20" name="Rectangle 19"/>
+          <p:cNvSpPr/>
+          <p:nvPr/>
+        </p:nvSpPr>
+        <p:spPr>
+          <a:xfrm>
+            <a:off x="731520" y="5138928"/>
+            <a:ext cx="10728655" cy="786384"/>
+          </a:xfrm>
+          <a:prstGeom prst="rect">
+            <a:avLst/>
+          </a:prstGeom>
+          <a:solidFill>
+            <a:srgbClr val="FFFFFF"/>
+          </a:solidFill>
+          <a:ln w="12700">
+            <a:solidFill>
+              <a:srgbClr val="E2E8F0"/>
+            </a:solidFill>
+          </a:ln>
+        </p:spPr>
+        <p:style>
+          <a:lnRef idx="1">
+            <a:schemeClr val="accent1"/>
+          </a:lnRef>
+          <a:fillRef idx="3">
+            <a:schemeClr val="accent1"/>
+          </a:fillRef>
+          <a:effectRef idx="2">
+            <a:schemeClr val="accent1"/>
+          </a:effectRef>
+          <a:fontRef idx="minor">
+            <a:schemeClr val="lt1"/>
+          </a:fontRef>
+        </p:style>
+        <p:txBody>
+          <a:bodyPr rtlCol="0" anchor="ctr"/>
+          <a:lstStyle/>
+          <a:p>
+            <a:pPr algn="ctr"/>
+          </a:p>
+        </p:txBody>
+      </p:sp>
+      <p:sp>
+        <p:nvSpPr>
+          <p:cNvPr id="21" name="Rectangle 20"/>
+          <p:cNvSpPr/>
+          <p:nvPr/>
+        </p:nvSpPr>
+        <p:spPr>
+          <a:xfrm>
+            <a:off x="731520" y="5138928"/>
+            <a:ext cx="109728" cy="786384"/>
+          </a:xfrm>
+          <a:prstGeom prst="rect">
+            <a:avLst/>
+          </a:prstGeom>
+          <a:solidFill>
+            <a:srgbClr val="2B6CB0"/>
+          </a:solidFill>
+          <a:ln>
+            <a:noFill/>
+          </a:ln>
+        </p:spPr>
+        <p:style>
+          <a:lnRef idx="1">
+            <a:schemeClr val="accent1"/>
+          </a:lnRef>
+          <a:fillRef idx="3">
+            <a:schemeClr val="accent1"/>
+          </a:fillRef>
+          <a:effectRef idx="2">
+            <a:schemeClr val="accent1"/>
+          </a:effectRef>
+          <a:fontRef idx="minor">
+            <a:schemeClr val="lt1"/>
+          </a:fontRef>
+        </p:style>
+        <p:txBody>
+          <a:bodyPr rtlCol="0" anchor="ctr"/>
+          <a:lstStyle/>
+          <a:p>
+            <a:pPr algn="ctr"/>
+          </a:p>
+        </p:txBody>
+      </p:sp>
+      <p:sp>
+        <p:nvSpPr>
+          <p:cNvPr id="22" name="TextBox 21"/>
+          <p:cNvSpPr txBox="1"/>
+          <p:nvPr/>
+        </p:nvSpPr>
+        <p:spPr>
+          <a:xfrm>
+            <a:off x="1005840" y="5212080"/>
+            <a:ext cx="10241280" cy="640080"/>
+          </a:xfrm>
+          <a:prstGeom prst="rect">
+            <a:avLst/>
+          </a:prstGeom>
+          <a:noFill/>
+        </p:spPr>
+        <p:txBody>
+          <a:bodyPr wrap="square">
+            <a:spAutoFit/>
+          </a:bodyPr>
+          <a:lstStyle/>
+          <a:p>
+            <a:pPr>
+              <a:defRPr sz="1300" b="1">
+                <a:solidFill>
+                  <a:srgbClr val="1A365D"/>
+                </a:solidFill>
+                <a:latin typeface="Arial"/>
+              </a:defRPr>
+            </a:pPr>
+            <a:r>
+              <a:t>5. Compliance Reporting and Analytics</a:t>
+            </a:r>
+          </a:p>
+          <a:p>
+            <a:pPr>
+              <a:spcBef>
+                <a:spcPts val="200"/>
+              </a:spcBef>
+              <a:defRPr sz="1100">
+                <a:solidFill>
+                  <a:srgbClr val="2D3748"/>
+                </a:solidFill>
+                <a:latin typeface="Arial"/>
+              </a:defRPr>
+            </a:pPr>
+            <a:r>
+              <a:t>Provide management analytics on leave utilization trends and enable one-click export of full audit records to CSV files for HR compliance.</a:t>
             </a:r>
           </a:p>
         </p:txBody>
@@ -4992,25 +5422,95 @@
       <p:grpSpPr/>
       <p:sp>
         <p:nvSpPr>
-          <p:cNvPr id="2" name="Rounded Rectangle 1"/>
+          <p:cNvPr id="2" name="TextBox 1"/>
+          <p:cNvSpPr txBox="1"/>
+          <p:nvPr/>
+        </p:nvSpPr>
+        <p:spPr>
+          <a:xfrm>
+            <a:off x="731520" y="411480"/>
+            <a:ext cx="10698480" cy="274320"/>
+          </a:xfrm>
+          <a:prstGeom prst="rect">
+            <a:avLst/>
+          </a:prstGeom>
+          <a:noFill/>
+        </p:spPr>
+        <p:txBody>
+          <a:bodyPr wrap="none" lIns="0" tIns="0" rIns="0" bIns="0">
+            <a:spAutoFit/>
+          </a:bodyPr>
+          <a:lstStyle/>
+          <a:p>
+            <a:pPr>
+              <a:defRPr sz="1000" b="1">
+                <a:solidFill>
+                  <a:srgbClr val="2B6CB0"/>
+                </a:solidFill>
+                <a:latin typeface="Arial"/>
+              </a:defRPr>
+            </a:pPr>
+            <a:r>
+              <a:t>SYSTEM DESIGN</a:t>
+            </a:r>
+          </a:p>
+        </p:txBody>
+      </p:sp>
+      <p:sp>
+        <p:nvSpPr>
+          <p:cNvPr id="3" name="TextBox 2"/>
+          <p:cNvSpPr txBox="1"/>
+          <p:nvPr/>
+        </p:nvSpPr>
+        <p:spPr>
+          <a:xfrm>
+            <a:off x="731520" y="685800"/>
+            <a:ext cx="10698480" cy="548640"/>
+          </a:xfrm>
+          <a:prstGeom prst="rect">
+            <a:avLst/>
+          </a:prstGeom>
+          <a:noFill/>
+        </p:spPr>
+        <p:txBody>
+          <a:bodyPr wrap="none" lIns="0" tIns="0" rIns="0" bIns="0">
+            <a:spAutoFit/>
+          </a:bodyPr>
+          <a:lstStyle/>
+          <a:p>
+            <a:pPr>
+              <a:defRPr sz="2200" b="1">
+                <a:solidFill>
+                  <a:srgbClr val="1A365D"/>
+                </a:solidFill>
+                <a:latin typeface="Arial"/>
+              </a:defRPr>
+            </a:pPr>
+            <a:r>
+              <a:t>System Architecture &amp; Data Flow</a:t>
+            </a:r>
+          </a:p>
+        </p:txBody>
+      </p:sp>
+      <p:sp>
+        <p:nvSpPr>
+          <p:cNvPr id="4" name="Rectangle 3"/>
           <p:cNvSpPr/>
           <p:nvPr/>
         </p:nvSpPr>
         <p:spPr>
           <a:xfrm>
-            <a:off x="731520" y="365760"/>
-            <a:ext cx="2560320" cy="320040"/>
-          </a:xfrm>
-          <a:prstGeom prst="roundRect">
+            <a:off x="731520" y="1325880"/>
+            <a:ext cx="10728655" cy="18288"/>
+          </a:xfrm>
+          <a:prstGeom prst="rect">
             <a:avLst/>
           </a:prstGeom>
           <a:solidFill>
-            <a:srgbClr val="EEF2FF"/>
+            <a:srgbClr val="2B6CB0"/>
           </a:solidFill>
-          <a:ln w="12700">
-            <a:solidFill>
-              <a:srgbClr val="C7D2FE"/>
-            </a:solidFill>
+          <a:ln>
+            <a:noFill/>
           </a:ln>
         </p:spPr>
         <p:style>
@@ -5028,67 +5528,23 @@
           </a:fontRef>
         </p:style>
         <p:txBody>
-          <a:bodyPr rtlCol="0" anchor="ctr" wrap="square" lIns="0" tIns="0" rIns="0" bIns="0"/>
-          <a:lstStyle/>
-          <a:p>
-            <a:pPr algn="ctr">
-              <a:defRPr sz="1000" b="1">
-                <a:solidFill>
-                  <a:srgbClr val="4F46E5"/>
-                </a:solidFill>
-              </a:defRPr>
-            </a:pPr>
-            <a:r>
-              <a:t>●  ARCHITECTURE &amp; TOOLS</a:t>
-            </a:r>
-          </a:p>
-        </p:txBody>
-      </p:sp>
-      <p:sp>
-        <p:nvSpPr>
-          <p:cNvPr id="3" name="TextBox 2"/>
-          <p:cNvSpPr txBox="1"/>
-          <p:nvPr/>
-        </p:nvSpPr>
-        <p:spPr>
-          <a:xfrm>
-            <a:off x="731520" y="777240"/>
-            <a:ext cx="10698480" cy="640080"/>
-          </a:xfrm>
-          <a:prstGeom prst="rect">
-            <a:avLst/>
-          </a:prstGeom>
-          <a:noFill/>
-        </p:spPr>
-        <p:txBody>
-          <a:bodyPr wrap="square" lIns="0" tIns="0" rIns="0" bIns="0">
-            <a:spAutoFit/>
-          </a:bodyPr>
-          <a:lstStyle/>
-          <a:p>
-            <a:pPr>
-              <a:defRPr sz="2600" b="1">
-                <a:solidFill>
-                  <a:srgbClr val="0F172A"/>
-                </a:solidFill>
-              </a:defRPr>
-            </a:pPr>
-            <a:r>
-              <a:t>Enterprise Technology Stack</a:t>
-            </a:r>
-          </a:p>
-        </p:txBody>
-      </p:sp>
-      <p:sp>
-        <p:nvSpPr>
-          <p:cNvPr id="4" name="Rectangle 3"/>
+          <a:bodyPr rtlCol="0" anchor="ctr"/>
+          <a:lstStyle/>
+          <a:p>
+            <a:pPr algn="ctr"/>
+          </a:p>
+        </p:txBody>
+      </p:sp>
+      <p:sp>
+        <p:nvSpPr>
+          <p:cNvPr id="5" name="Rectangle 4"/>
           <p:cNvSpPr/>
           <p:nvPr/>
         </p:nvSpPr>
         <p:spPr>
           <a:xfrm>
-            <a:off x="731520" y="1463040"/>
-            <a:ext cx="10728655" cy="18288"/>
+            <a:off x="731520" y="6217920"/>
+            <a:ext cx="10728655" cy="13716"/>
           </a:xfrm>
           <a:prstGeom prst="rect">
             <a:avLst/>
@@ -5124,20 +5580,92 @@
       </p:sp>
       <p:sp>
         <p:nvSpPr>
-          <p:cNvPr id="5" name="Rounded Rectangle 4"/>
+          <p:cNvPr id="6" name="TextBox 5"/>
+          <p:cNvSpPr txBox="1"/>
+          <p:nvPr/>
+        </p:nvSpPr>
+        <p:spPr>
+          <a:xfrm>
+            <a:off x="731520" y="6263640"/>
+            <a:ext cx="7315200" cy="365760"/>
+          </a:xfrm>
+          <a:prstGeom prst="rect">
+            <a:avLst/>
+          </a:prstGeom>
+          <a:noFill/>
+        </p:spPr>
+        <p:txBody>
+          <a:bodyPr wrap="none" lIns="0" tIns="0" rIns="0" bIns="0">
+            <a:spAutoFit/>
+          </a:bodyPr>
+          <a:lstStyle/>
+          <a:p>
+            <a:pPr>
+              <a:defRPr sz="950">
+                <a:solidFill>
+                  <a:srgbClr val="718096"/>
+                </a:solidFill>
+                <a:latin typeface="Arial"/>
+              </a:defRPr>
+            </a:pPr>
+            <a:r>
+              <a:t>Employee Leave Management System | Project Presentation</a:t>
+            </a:r>
+          </a:p>
+        </p:txBody>
+      </p:sp>
+      <p:sp>
+        <p:nvSpPr>
+          <p:cNvPr id="7" name="TextBox 6"/>
+          <p:cNvSpPr txBox="1"/>
+          <p:nvPr/>
+        </p:nvSpPr>
+        <p:spPr>
+          <a:xfrm>
+            <a:off x="9601200" y="6263640"/>
+            <a:ext cx="1828800" cy="365760"/>
+          </a:xfrm>
+          <a:prstGeom prst="rect">
+            <a:avLst/>
+          </a:prstGeom>
+          <a:noFill/>
+        </p:spPr>
+        <p:txBody>
+          <a:bodyPr wrap="none" lIns="0" tIns="0" rIns="0" bIns="0">
+            <a:spAutoFit/>
+          </a:bodyPr>
+          <a:lstStyle/>
+          <a:p>
+            <a:pPr algn="r">
+              <a:defRPr sz="950">
+                <a:solidFill>
+                  <a:srgbClr val="718096"/>
+                </a:solidFill>
+                <a:latin typeface="Arial"/>
+              </a:defRPr>
+            </a:pPr>
+            <a:r>
+              <a:t>Slide 4 of 10</a:t>
+            </a:r>
+          </a:p>
+        </p:txBody>
+      </p:sp>
+      <p:sp>
+        <p:nvSpPr>
+          <p:cNvPr id="8" name="Rectangle 7"/>
           <p:cNvSpPr/>
           <p:nvPr/>
         </p:nvSpPr>
         <p:spPr>
           <a:xfrm>
-            <a:off x="731520" y="1737360"/>
-            <a:ext cx="3474720" cy="4572000"/>
-          </a:xfrm>
-          <a:prstGeom prst="roundRect">
+            <a:off x="731520" y="1554480"/>
+            <a:ext cx="3474720" cy="4389120"/>
+          </a:xfrm>
+          <a:prstGeom prst="rect">
             <a:avLst/>
           </a:prstGeom>
           <a:solidFill>
-            <a:srgbClr val="F8FAFC"/>
+            <a:srgbClr val="FFFFFF"/>
           </a:solidFill>
           <a:ln w="12700">
             <a:solidFill>
@@ -5169,20 +5697,20 @@
       </p:sp>
       <p:sp>
         <p:nvSpPr>
-          <p:cNvPr id="6" name="Rectangle 5"/>
+          <p:cNvPr id="9" name="Rectangle 8"/>
           <p:cNvSpPr/>
           <p:nvPr/>
         </p:nvSpPr>
         <p:spPr>
           <a:xfrm>
-            <a:off x="731520" y="1737360"/>
-            <a:ext cx="3474720" cy="640080"/>
+            <a:off x="731520" y="1554480"/>
+            <a:ext cx="3474720" cy="548640"/>
           </a:xfrm>
           <a:prstGeom prst="rect">
             <a:avLst/>
           </a:prstGeom>
           <a:solidFill>
-            <a:srgbClr val="4F46E5"/>
+            <a:srgbClr val="1A365D"/>
           </a:solidFill>
           <a:ln>
             <a:noFill/>
@@ -5206,29 +5734,56 @@
           <a:bodyPr rtlCol="0" anchor="ctr"/>
           <a:lstStyle/>
           <a:p>
+            <a:pPr algn="ctr"/>
+          </a:p>
+        </p:txBody>
+      </p:sp>
+      <p:sp>
+        <p:nvSpPr>
+          <p:cNvPr id="10" name="TextBox 9"/>
+          <p:cNvSpPr txBox="1"/>
+          <p:nvPr/>
+        </p:nvSpPr>
+        <p:spPr>
+          <a:xfrm>
+            <a:off x="731520" y="1600200"/>
+            <a:ext cx="3474720" cy="457200"/>
+          </a:xfrm>
+          <a:prstGeom prst="rect">
+            <a:avLst/>
+          </a:prstGeom>
+          <a:noFill/>
+        </p:spPr>
+        <p:txBody>
+          <a:bodyPr wrap="none">
+            <a:spAutoFit/>
+          </a:bodyPr>
+          <a:lstStyle/>
+          <a:p>
             <a:pPr algn="ctr">
-              <a:defRPr sz="1400" b="1">
+              <a:defRPr sz="1300" b="1">
                 <a:solidFill>
                   <a:srgbClr val="FFFFFF"/>
                 </a:solidFill>
-              </a:defRPr>
-            </a:pPr>
-            <a:r>
-              <a:t>Backend Services</a:t>
-            </a:r>
-          </a:p>
-        </p:txBody>
-      </p:sp>
-      <p:sp>
-        <p:nvSpPr>
-          <p:cNvPr id="7" name="TextBox 6"/>
+                <a:latin typeface="Arial"/>
+              </a:defRPr>
+            </a:pPr>
+            <a:r>
+              <a:t>Presentation Layer (Client)</a:t>
+            </a:r>
+          </a:p>
+        </p:txBody>
+      </p:sp>
+      <p:sp>
+        <p:nvSpPr>
+          <p:cNvPr id="11" name="TextBox 10"/>
           <p:cNvSpPr txBox="1"/>
           <p:nvPr/>
         </p:nvSpPr>
         <p:spPr>
           <a:xfrm>
-            <a:off x="914400" y="2514600"/>
-            <a:ext cx="3108960" cy="3657600"/>
+            <a:off x="914400" y="2240280"/>
+            <a:ext cx="3108960" cy="3566160"/>
           </a:xfrm>
           <a:prstGeom prst="rect">
             <a:avLst/>
@@ -5245,29 +5800,15 @@
               <a:spcBef>
                 <a:spcPts val="0"/>
               </a:spcBef>
-              <a:defRPr sz="1300" b="1">
-                <a:solidFill>
-                  <a:srgbClr val="0F172A"/>
-                </a:solidFill>
-              </a:defRPr>
-            </a:pPr>
-            <a:r>
-              <a:t>•  Python 3.12+</a:t>
-            </a:r>
-          </a:p>
-          <a:p>
-            <a:pPr>
-              <a:spcBef>
-                <a:spcPts val="200"/>
-              </a:spcBef>
-              <a:defRPr sz="1050">
-                <a:solidFill>
-                  <a:srgbClr val="64748B"/>
-                </a:solidFill>
-              </a:defRPr>
-            </a:pPr>
-            <a:r>
-              <a:t>High-performance programming language powering business computation</a:t>
+              <a:defRPr sz="1100">
+                <a:solidFill>
+                  <a:srgbClr val="2D3748"/>
+                </a:solidFill>
+                <a:latin typeface="Arial"/>
+              </a:defRPr>
+            </a:pPr>
+            <a:r>
+              <a:t>•  HTML5 &amp; Tailwind CSS for modern responsive interface</a:t>
             </a:r>
           </a:p>
           <a:p>
@@ -5275,29 +5816,15 @@
               <a:spcBef>
                 <a:spcPts val="800"/>
               </a:spcBef>
-              <a:defRPr sz="1300" b="1">
-                <a:solidFill>
-                  <a:srgbClr val="0F172A"/>
-                </a:solidFill>
-              </a:defRPr>
-            </a:pPr>
-            <a:r>
-              <a:t>•  Flask 3.0</a:t>
-            </a:r>
-          </a:p>
-          <a:p>
-            <a:pPr>
-              <a:spcBef>
-                <a:spcPts val="200"/>
-              </a:spcBef>
-              <a:defRPr sz="1050">
-                <a:solidFill>
-                  <a:srgbClr val="64748B"/>
-                </a:solidFill>
-              </a:defRPr>
-            </a:pPr>
-            <a:r>
-              <a:t>Micro-web framework providing WSGI routing, templating, and REST APIs</a:t>
+              <a:defRPr sz="1100">
+                <a:solidFill>
+                  <a:srgbClr val="2D3748"/>
+                </a:solidFill>
+                <a:latin typeface="Arial"/>
+              </a:defRPr>
+            </a:pPr>
+            <a:r>
+              <a:t>•  Jinja2 Template Engine rendering dynamic views</a:t>
             </a:r>
           </a:p>
           <a:p>
@@ -5305,29 +5832,15 @@
               <a:spcBef>
                 <a:spcPts val="800"/>
               </a:spcBef>
-              <a:defRPr sz="1300" b="1">
-                <a:solidFill>
-                  <a:srgbClr val="0F172A"/>
-                </a:solidFill>
-              </a:defRPr>
-            </a:pPr>
-            <a:r>
-              <a:t>•  Werkzeug Security</a:t>
-            </a:r>
-          </a:p>
-          <a:p>
-            <a:pPr>
-              <a:spcBef>
-                <a:spcPts val="200"/>
-              </a:spcBef>
-              <a:defRPr sz="1050">
-                <a:solidFill>
-                  <a:srgbClr val="64748B"/>
-                </a:solidFill>
-              </a:defRPr>
-            </a:pPr>
-            <a:r>
-              <a:t>PBKDF2 SHA-256 cryptographic password hashing</a:t>
+              <a:defRPr sz="1100">
+                <a:solidFill>
+                  <a:srgbClr val="2D3748"/>
+                </a:solidFill>
+                <a:latin typeface="Arial"/>
+              </a:defRPr>
+            </a:pPr>
+            <a:r>
+              <a:t>•  Client-side JavaScript for live duration calculation</a:t>
             </a:r>
           </a:p>
           <a:p>
@@ -5335,49 +5848,51 @@
               <a:spcBef>
                 <a:spcPts val="800"/>
               </a:spcBef>
-              <a:defRPr sz="1300" b="1">
-                <a:solidFill>
-                  <a:srgbClr val="0F172A"/>
-                </a:solidFill>
-              </a:defRPr>
-            </a:pPr>
-            <a:r>
-              <a:t>•  Gunicorn WSGI</a:t>
+              <a:defRPr sz="1100">
+                <a:solidFill>
+                  <a:srgbClr val="2D3748"/>
+                </a:solidFill>
+                <a:latin typeface="Arial"/>
+              </a:defRPr>
+            </a:pPr>
+            <a:r>
+              <a:t>•  Chart.js for interactive analytics graphs</a:t>
             </a:r>
           </a:p>
           <a:p>
             <a:pPr>
               <a:spcBef>
-                <a:spcPts val="200"/>
+                <a:spcPts val="800"/>
               </a:spcBef>
-              <a:defRPr sz="1050">
-                <a:solidFill>
-                  <a:srgbClr val="64748B"/>
-                </a:solidFill>
-              </a:defRPr>
-            </a:pPr>
-            <a:r>
-              <a:t>Production-grade UNIX WSGI HTTP server for scalable cloud serving</a:t>
-            </a:r>
-          </a:p>
-        </p:txBody>
-      </p:sp>
-      <p:sp>
-        <p:nvSpPr>
-          <p:cNvPr id="8" name="Rounded Rectangle 7"/>
+              <a:defRPr sz="1100">
+                <a:solidFill>
+                  <a:srgbClr val="2D3748"/>
+                </a:solidFill>
+                <a:latin typeface="Arial"/>
+              </a:defRPr>
+            </a:pPr>
+            <a:r>
+              <a:t>•  Compatible with desktop and mobile web browsers</a:t>
+            </a:r>
+          </a:p>
+        </p:txBody>
+      </p:sp>
+      <p:sp>
+        <p:nvSpPr>
+          <p:cNvPr id="12" name="Rectangle 11"/>
           <p:cNvSpPr/>
           <p:nvPr/>
         </p:nvSpPr>
         <p:spPr>
           <a:xfrm>
-            <a:off x="4343400" y="1737360"/>
-            <a:ext cx="3474720" cy="4572000"/>
-          </a:xfrm>
-          <a:prstGeom prst="roundRect">
+            <a:off x="4389120" y="1554480"/>
+            <a:ext cx="3474720" cy="4389120"/>
+          </a:xfrm>
+          <a:prstGeom prst="rect">
             <a:avLst/>
           </a:prstGeom>
           <a:solidFill>
-            <a:srgbClr val="F8FAFC"/>
+            <a:srgbClr val="FFFFFF"/>
           </a:solidFill>
           <a:ln w="12700">
             <a:solidFill>
@@ -5409,20 +5924,20 @@
       </p:sp>
       <p:sp>
         <p:nvSpPr>
-          <p:cNvPr id="9" name="Rectangle 8"/>
+          <p:cNvPr id="13" name="Rectangle 12"/>
           <p:cNvSpPr/>
           <p:nvPr/>
         </p:nvSpPr>
         <p:spPr>
           <a:xfrm>
-            <a:off x="4343400" y="1737360"/>
-            <a:ext cx="3474720" cy="640080"/>
+            <a:off x="4389120" y="1554480"/>
+            <a:ext cx="3474720" cy="548640"/>
           </a:xfrm>
           <a:prstGeom prst="rect">
             <a:avLst/>
           </a:prstGeom>
           <a:solidFill>
-            <a:srgbClr val="7C3AED"/>
+            <a:srgbClr val="1A365D"/>
           </a:solidFill>
           <a:ln>
             <a:noFill/>
@@ -5446,29 +5961,56 @@
           <a:bodyPr rtlCol="0" anchor="ctr"/>
           <a:lstStyle/>
           <a:p>
+            <a:pPr algn="ctr"/>
+          </a:p>
+        </p:txBody>
+      </p:sp>
+      <p:sp>
+        <p:nvSpPr>
+          <p:cNvPr id="14" name="TextBox 13"/>
+          <p:cNvSpPr txBox="1"/>
+          <p:nvPr/>
+        </p:nvSpPr>
+        <p:spPr>
+          <a:xfrm>
+            <a:off x="4389120" y="1600200"/>
+            <a:ext cx="3474720" cy="457200"/>
+          </a:xfrm>
+          <a:prstGeom prst="rect">
+            <a:avLst/>
+          </a:prstGeom>
+          <a:noFill/>
+        </p:spPr>
+        <p:txBody>
+          <a:bodyPr wrap="none">
+            <a:spAutoFit/>
+          </a:bodyPr>
+          <a:lstStyle/>
+          <a:p>
             <a:pPr algn="ctr">
-              <a:defRPr sz="1400" b="1">
+              <a:defRPr sz="1300" b="1">
                 <a:solidFill>
                   <a:srgbClr val="FFFFFF"/>
                 </a:solidFill>
-              </a:defRPr>
-            </a:pPr>
-            <a:r>
-              <a:t>Frontend &amp; UI/UX</a:t>
-            </a:r>
-          </a:p>
-        </p:txBody>
-      </p:sp>
-      <p:sp>
-        <p:nvSpPr>
-          <p:cNvPr id="10" name="TextBox 9"/>
+                <a:latin typeface="Arial"/>
+              </a:defRPr>
+            </a:pPr>
+            <a:r>
+              <a:t>Application Layer (Flask Web Server)</a:t>
+            </a:r>
+          </a:p>
+        </p:txBody>
+      </p:sp>
+      <p:sp>
+        <p:nvSpPr>
+          <p:cNvPr id="15" name="TextBox 14"/>
           <p:cNvSpPr txBox="1"/>
           <p:nvPr/>
         </p:nvSpPr>
         <p:spPr>
           <a:xfrm>
-            <a:off x="4526280" y="2514600"/>
-            <a:ext cx="3108960" cy="3657600"/>
+            <a:off x="4572000" y="2240280"/>
+            <a:ext cx="3108960" cy="3566160"/>
           </a:xfrm>
           <a:prstGeom prst="rect">
             <a:avLst/>
@@ -5485,29 +6027,15 @@
               <a:spcBef>
                 <a:spcPts val="0"/>
               </a:spcBef>
-              <a:defRPr sz="1300" b="1">
-                <a:solidFill>
-                  <a:srgbClr val="0F172A"/>
-                </a:solidFill>
-              </a:defRPr>
-            </a:pPr>
-            <a:r>
-              <a:t>•  Tailwind CSS</a:t>
-            </a:r>
-          </a:p>
-          <a:p>
-            <a:pPr>
-              <a:spcBef>
-                <a:spcPts val="200"/>
-              </a:spcBef>
-              <a:defRPr sz="1050">
-                <a:solidFill>
-                  <a:srgbClr val="64748B"/>
-                </a:solidFill>
-              </a:defRPr>
-            </a:pPr>
-            <a:r>
-              <a:t>Modern utility-first CSS framework for clean, responsive UI layouts</a:t>
+              <a:defRPr sz="1100">
+                <a:solidFill>
+                  <a:srgbClr val="2D3748"/>
+                </a:solidFill>
+                <a:latin typeface="Arial"/>
+              </a:defRPr>
+            </a:pPr>
+            <a:r>
+              <a:t>•  Python 3.12 running Flask micro-framework</a:t>
             </a:r>
           </a:p>
           <a:p>
@@ -5515,29 +6043,15 @@
               <a:spcBef>
                 <a:spcPts val="800"/>
               </a:spcBef>
-              <a:defRPr sz="1300" b="1">
-                <a:solidFill>
-                  <a:srgbClr val="0F172A"/>
-                </a:solidFill>
-              </a:defRPr>
-            </a:pPr>
-            <a:r>
-              <a:t>•  Vanilla JS (ES6+)</a:t>
-            </a:r>
-          </a:p>
-          <a:p>
-            <a:pPr>
-              <a:spcBef>
-                <a:spcPts val="200"/>
-              </a:spcBef>
-              <a:defRPr sz="1050">
-                <a:solidFill>
-                  <a:srgbClr val="64748B"/>
-                </a:solidFill>
-              </a:defRPr>
-            </a:pPr>
-            <a:r>
-              <a:t>Client-side interactive calculator, live duration badge, modal controls</a:t>
+              <a:defRPr sz="1100">
+                <a:solidFill>
+                  <a:srgbClr val="2D3748"/>
+                </a:solidFill>
+                <a:latin typeface="Arial"/>
+              </a:defRPr>
+            </a:pPr>
+            <a:r>
+              <a:t>•  Authentication &amp; Session Management module</a:t>
             </a:r>
           </a:p>
           <a:p>
@@ -5545,29 +6059,15 @@
               <a:spcBef>
                 <a:spcPts val="800"/>
               </a:spcBef>
-              <a:defRPr sz="1300" b="1">
-                <a:solidFill>
-                  <a:srgbClr val="0F172A"/>
-                </a:solidFill>
-              </a:defRPr>
-            </a:pPr>
-            <a:r>
-              <a:t>•  Chart.js</a:t>
-            </a:r>
-          </a:p>
-          <a:p>
-            <a:pPr>
-              <a:spcBef>
-                <a:spcPts val="200"/>
-              </a:spcBef>
-              <a:defRPr sz="1050">
-                <a:solidFill>
-                  <a:srgbClr val="64748B"/>
-                </a:solidFill>
-              </a:defRPr>
-            </a:pPr>
-            <a:r>
-              <a:t>Hardware-accelerated HTML5 canvas charts for management analytics</a:t>
+              <a:defRPr sz="1100">
+                <a:solidFill>
+                  <a:srgbClr val="2D3748"/>
+                </a:solidFill>
+                <a:latin typeface="Arial"/>
+              </a:defRPr>
+            </a:pPr>
+            <a:r>
+              <a:t>•  Working days business logic engine (excluding holidays)</a:t>
             </a:r>
           </a:p>
           <a:p>
@@ -5575,49 +6075,51 @@
               <a:spcBef>
                 <a:spcPts val="800"/>
               </a:spcBef>
-              <a:defRPr sz="1300" b="1">
-                <a:solidFill>
-                  <a:srgbClr val="0F172A"/>
-                </a:solidFill>
-              </a:defRPr>
-            </a:pPr>
-            <a:r>
-              <a:t>•  FontAwesome 6</a:t>
+              <a:defRPr sz="1100">
+                <a:solidFill>
+                  <a:srgbClr val="2D3748"/>
+                </a:solidFill>
+                <a:latin typeface="Arial"/>
+              </a:defRPr>
+            </a:pPr>
+            <a:r>
+              <a:t>•  Leave application validation &amp; quota checks</a:t>
             </a:r>
           </a:p>
           <a:p>
             <a:pPr>
               <a:spcBef>
-                <a:spcPts val="200"/>
+                <a:spcPts val="800"/>
               </a:spcBef>
-              <a:defRPr sz="1050">
-                <a:solidFill>
-                  <a:srgbClr val="64748B"/>
-                </a:solidFill>
-              </a:defRPr>
-            </a:pPr>
-            <a:r>
-              <a:t>Vector iconography for intuitive visual cues and status tags</a:t>
-            </a:r>
-          </a:p>
-        </p:txBody>
-      </p:sp>
-      <p:sp>
-        <p:nvSpPr>
-          <p:cNvPr id="11" name="Rounded Rectangle 10"/>
+              <a:defRPr sz="1100">
+                <a:solidFill>
+                  <a:srgbClr val="2D3748"/>
+                </a:solidFill>
+                <a:latin typeface="Arial"/>
+              </a:defRPr>
+            </a:pPr>
+            <a:r>
+              <a:t>•  REST API endpoints (/api/calculate-days, /api/chart-data)</a:t>
+            </a:r>
+          </a:p>
+        </p:txBody>
+      </p:sp>
+      <p:sp>
+        <p:nvSpPr>
+          <p:cNvPr id="16" name="Rectangle 15"/>
           <p:cNvSpPr/>
           <p:nvPr/>
         </p:nvSpPr>
         <p:spPr>
           <a:xfrm>
-            <a:off x="7955280" y="1737360"/>
-            <a:ext cx="3474720" cy="4572000"/>
-          </a:xfrm>
-          <a:prstGeom prst="roundRect">
+            <a:off x="8046720" y="1554480"/>
+            <a:ext cx="3474720" cy="4389120"/>
+          </a:xfrm>
+          <a:prstGeom prst="rect">
             <a:avLst/>
           </a:prstGeom>
           <a:solidFill>
-            <a:srgbClr val="F8FAFC"/>
+            <a:srgbClr val="FFFFFF"/>
           </a:solidFill>
           <a:ln w="12700">
             <a:solidFill>
@@ -5649,20 +6151,20 @@
       </p:sp>
       <p:sp>
         <p:nvSpPr>
-          <p:cNvPr id="12" name="Rectangle 11"/>
+          <p:cNvPr id="17" name="Rectangle 16"/>
           <p:cNvSpPr/>
           <p:nvPr/>
         </p:nvSpPr>
         <p:spPr>
           <a:xfrm>
-            <a:off x="7955280" y="1737360"/>
-            <a:ext cx="3474720" cy="640080"/>
+            <a:off x="8046720" y="1554480"/>
+            <a:ext cx="3474720" cy="548640"/>
           </a:xfrm>
           <a:prstGeom prst="rect">
             <a:avLst/>
           </a:prstGeom>
           <a:solidFill>
-            <a:srgbClr val="059669"/>
+            <a:srgbClr val="1A365D"/>
           </a:solidFill>
           <a:ln>
             <a:noFill/>
@@ -5686,29 +6188,56 @@
           <a:bodyPr rtlCol="0" anchor="ctr"/>
           <a:lstStyle/>
           <a:p>
+            <a:pPr algn="ctr"/>
+          </a:p>
+        </p:txBody>
+      </p:sp>
+      <p:sp>
+        <p:nvSpPr>
+          <p:cNvPr id="18" name="TextBox 17"/>
+          <p:cNvSpPr txBox="1"/>
+          <p:nvPr/>
+        </p:nvSpPr>
+        <p:spPr>
+          <a:xfrm>
+            <a:off x="8046720" y="1600200"/>
+            <a:ext cx="3474720" cy="457200"/>
+          </a:xfrm>
+          <a:prstGeom prst="rect">
+            <a:avLst/>
+          </a:prstGeom>
+          <a:noFill/>
+        </p:spPr>
+        <p:txBody>
+          <a:bodyPr wrap="none">
+            <a:spAutoFit/>
+          </a:bodyPr>
+          <a:lstStyle/>
+          <a:p>
             <a:pPr algn="ctr">
-              <a:defRPr sz="1400" b="1">
+              <a:defRPr sz="1300" b="1">
                 <a:solidFill>
                   <a:srgbClr val="FFFFFF"/>
                 </a:solidFill>
-              </a:defRPr>
-            </a:pPr>
-            <a:r>
-              <a:t>Database &amp; DevOps</a:t>
-            </a:r>
-          </a:p>
-        </p:txBody>
-      </p:sp>
-      <p:sp>
-        <p:nvSpPr>
-          <p:cNvPr id="13" name="TextBox 12"/>
+                <a:latin typeface="Arial"/>
+              </a:defRPr>
+            </a:pPr>
+            <a:r>
+              <a:t>Database Layer (Persistence)</a:t>
+            </a:r>
+          </a:p>
+        </p:txBody>
+      </p:sp>
+      <p:sp>
+        <p:nvSpPr>
+          <p:cNvPr id="19" name="TextBox 18"/>
           <p:cNvSpPr txBox="1"/>
           <p:nvPr/>
         </p:nvSpPr>
         <p:spPr>
           <a:xfrm>
-            <a:off x="8138160" y="2514600"/>
-            <a:ext cx="3108960" cy="3657600"/>
+            <a:off x="8229600" y="2240280"/>
+            <a:ext cx="3108960" cy="3566160"/>
           </a:xfrm>
           <a:prstGeom prst="rect">
             <a:avLst/>
@@ -5725,29 +6254,15 @@
               <a:spcBef>
                 <a:spcPts val="0"/>
               </a:spcBef>
-              <a:defRPr sz="1300" b="1">
-                <a:solidFill>
-                  <a:srgbClr val="0F172A"/>
-                </a:solidFill>
-              </a:defRPr>
-            </a:pPr>
-            <a:r>
-              <a:t>•  SQLite 3 Engine</a:t>
-            </a:r>
-          </a:p>
-          <a:p>
-            <a:pPr>
-              <a:spcBef>
-                <a:spcPts val="200"/>
-              </a:spcBef>
-              <a:defRPr sz="1050">
-                <a:solidFill>
-                  <a:srgbClr val="64748B"/>
-                </a:solidFill>
-              </a:defRPr>
-            </a:pPr>
-            <a:r>
-              <a:t>Zero-configuration ACID transactional database with PRAGMA FK checks</a:t>
+              <a:defRPr sz="1100">
+                <a:solidFill>
+                  <a:srgbClr val="2D3748"/>
+                </a:solidFill>
+                <a:latin typeface="Arial"/>
+              </a:defRPr>
+            </a:pPr>
+            <a:r>
+              <a:t>•  SQLite3 relational database engine</a:t>
             </a:r>
           </a:p>
           <a:p>
@@ -5755,29 +6270,15 @@
               <a:spcBef>
                 <a:spcPts val="800"/>
               </a:spcBef>
-              <a:defRPr sz="1300" b="1">
-                <a:solidFill>
-                  <a:srgbClr val="0F172A"/>
-                </a:solidFill>
-              </a:defRPr>
-            </a:pPr>
-            <a:r>
-              <a:t>•  Python unittest</a:t>
-            </a:r>
-          </a:p>
-          <a:p>
-            <a:pPr>
-              <a:spcBef>
-                <a:spcPts val="200"/>
-              </a:spcBef>
-              <a:defRPr sz="1050">
-                <a:solidFill>
-                  <a:srgbClr val="64748B"/>
-                </a:solidFill>
-              </a:defRPr>
-            </a:pPr>
-            <a:r>
-              <a:t>Comprehensive 17-test automated verification test harness</a:t>
+              <a:defRPr sz="1100">
+                <a:solidFill>
+                  <a:srgbClr val="2D3748"/>
+                </a:solidFill>
+                <a:latin typeface="Arial"/>
+              </a:defRPr>
+            </a:pPr>
+            <a:r>
+              <a:t>•  Referential integrity enforced with Foreign Key PRAGMA</a:t>
             </a:r>
           </a:p>
           <a:p>
@@ -5785,29 +6286,15 @@
               <a:spcBef>
                 <a:spcPts val="800"/>
               </a:spcBef>
-              <a:defRPr sz="1300" b="1">
-                <a:solidFill>
-                  <a:srgbClr val="0F172A"/>
-                </a:solidFill>
-              </a:defRPr>
-            </a:pPr>
-            <a:r>
-              <a:t>•  Git &amp; GitHub</a:t>
-            </a:r>
-          </a:p>
-          <a:p>
-            <a:pPr>
-              <a:spcBef>
-                <a:spcPts val="200"/>
-              </a:spcBef>
-              <a:defRPr sz="1050">
-                <a:solidFill>
-                  <a:srgbClr val="64748B"/>
-                </a:solidFill>
-              </a:defRPr>
-            </a:pPr>
-            <a:r>
-              <a:t>Version control, tracking, and continuous deployment synchronization</a:t>
+              <a:defRPr sz="1100">
+                <a:solidFill>
+                  <a:srgbClr val="2D3748"/>
+                </a:solidFill>
+                <a:latin typeface="Arial"/>
+              </a:defRPr>
+            </a:pPr>
+            <a:r>
+              <a:t>•  Transactional safety (commit / rollback)</a:t>
             </a:r>
           </a:p>
           <a:p>
@@ -5815,29 +6302,31 @@
               <a:spcBef>
                 <a:spcPts val="800"/>
               </a:spcBef>
-              <a:defRPr sz="1300" b="1">
-                <a:solidFill>
-                  <a:srgbClr val="0F172A"/>
-                </a:solidFill>
-              </a:defRPr>
-            </a:pPr>
-            <a:r>
-              <a:t>•  Render Cloud Platform</a:t>
+              <a:defRPr sz="1100">
+                <a:solidFill>
+                  <a:srgbClr val="2D3748"/>
+                </a:solidFill>
+                <a:latin typeface="Arial"/>
+              </a:defRPr>
+            </a:pPr>
+            <a:r>
+              <a:t>•  Encrypted password storage using PBKDF2 SHA-256</a:t>
             </a:r>
           </a:p>
           <a:p>
             <a:pPr>
               <a:spcBef>
-                <a:spcPts val="200"/>
+                <a:spcPts val="800"/>
               </a:spcBef>
-              <a:defRPr sz="1050">
-                <a:solidFill>
-                  <a:srgbClr val="64748B"/>
-                </a:solidFill>
-              </a:defRPr>
-            </a:pPr>
-            <a:r>
-              <a:t>Containerized cloud deployment with automated SSL/HTTPS hosting</a:t>
+              <a:defRPr sz="1100">
+                <a:solidFill>
+                  <a:srgbClr val="2D3748"/>
+                </a:solidFill>
+                <a:latin typeface="Arial"/>
+              </a:defRPr>
+            </a:pPr>
+            <a:r>
+              <a:t>•  Automated database seeding on initial launch</a:t>
             </a:r>
           </a:p>
         </p:txBody>
@@ -5862,25 +6351,95 @@
       <p:grpSpPr/>
       <p:sp>
         <p:nvSpPr>
-          <p:cNvPr id="2" name="Rounded Rectangle 1"/>
+          <p:cNvPr id="2" name="TextBox 1"/>
+          <p:cNvSpPr txBox="1"/>
+          <p:nvPr/>
+        </p:nvSpPr>
+        <p:spPr>
+          <a:xfrm>
+            <a:off x="731520" y="411480"/>
+            <a:ext cx="10698480" cy="274320"/>
+          </a:xfrm>
+          <a:prstGeom prst="rect">
+            <a:avLst/>
+          </a:prstGeom>
+          <a:noFill/>
+        </p:spPr>
+        <p:txBody>
+          <a:bodyPr wrap="none" lIns="0" tIns="0" rIns="0" bIns="0">
+            <a:spAutoFit/>
+          </a:bodyPr>
+          <a:lstStyle/>
+          <a:p>
+            <a:pPr>
+              <a:defRPr sz="1000" b="1">
+                <a:solidFill>
+                  <a:srgbClr val="2B6CB0"/>
+                </a:solidFill>
+                <a:latin typeface="Arial"/>
+              </a:defRPr>
+            </a:pPr>
+            <a:r>
+              <a:t>TECHNICAL SPECIFICATIONS</a:t>
+            </a:r>
+          </a:p>
+        </p:txBody>
+      </p:sp>
+      <p:sp>
+        <p:nvSpPr>
+          <p:cNvPr id="3" name="TextBox 2"/>
+          <p:cNvSpPr txBox="1"/>
+          <p:nvPr/>
+        </p:nvSpPr>
+        <p:spPr>
+          <a:xfrm>
+            <a:off x="731520" y="685800"/>
+            <a:ext cx="10698480" cy="548640"/>
+          </a:xfrm>
+          <a:prstGeom prst="rect">
+            <a:avLst/>
+          </a:prstGeom>
+          <a:noFill/>
+        </p:spPr>
+        <p:txBody>
+          <a:bodyPr wrap="none" lIns="0" tIns="0" rIns="0" bIns="0">
+            <a:spAutoFit/>
+          </a:bodyPr>
+          <a:lstStyle/>
+          <a:p>
+            <a:pPr>
+              <a:defRPr sz="2200" b="1">
+                <a:solidFill>
+                  <a:srgbClr val="1A365D"/>
+                </a:solidFill>
+                <a:latin typeface="Arial"/>
+              </a:defRPr>
+            </a:pPr>
+            <a:r>
+              <a:t>Technology Stack &amp; Tools Used</a:t>
+            </a:r>
+          </a:p>
+        </p:txBody>
+      </p:sp>
+      <p:sp>
+        <p:nvSpPr>
+          <p:cNvPr id="4" name="Rectangle 3"/>
           <p:cNvSpPr/>
           <p:nvPr/>
         </p:nvSpPr>
         <p:spPr>
           <a:xfrm>
-            <a:off x="731520" y="365760"/>
-            <a:ext cx="2560320" cy="320040"/>
-          </a:xfrm>
-          <a:prstGeom prst="roundRect">
+            <a:off x="731520" y="1325880"/>
+            <a:ext cx="10728655" cy="18288"/>
+          </a:xfrm>
+          <a:prstGeom prst="rect">
             <a:avLst/>
           </a:prstGeom>
           <a:solidFill>
-            <a:srgbClr val="EEF2FF"/>
+            <a:srgbClr val="2B6CB0"/>
           </a:solidFill>
-          <a:ln w="12700">
-            <a:solidFill>
-              <a:srgbClr val="C7D2FE"/>
-            </a:solidFill>
+          <a:ln>
+            <a:noFill/>
           </a:ln>
         </p:spPr>
         <p:style>
@@ -5898,67 +6457,23 @@
           </a:fontRef>
         </p:style>
         <p:txBody>
-          <a:bodyPr rtlCol="0" anchor="ctr" wrap="square" lIns="0" tIns="0" rIns="0" bIns="0"/>
-          <a:lstStyle/>
-          <a:p>
-            <a:pPr algn="ctr">
-              <a:defRPr sz="1000" b="1">
-                <a:solidFill>
-                  <a:srgbClr val="4F46E5"/>
-                </a:solidFill>
-              </a:defRPr>
-            </a:pPr>
-            <a:r>
-              <a:t>●  STRUCTURAL DESIGN</a:t>
-            </a:r>
-          </a:p>
-        </p:txBody>
-      </p:sp>
-      <p:sp>
-        <p:nvSpPr>
-          <p:cNvPr id="3" name="TextBox 2"/>
-          <p:cNvSpPr txBox="1"/>
-          <p:nvPr/>
-        </p:nvSpPr>
-        <p:spPr>
-          <a:xfrm>
-            <a:off x="731520" y="777240"/>
-            <a:ext cx="10698480" cy="640080"/>
-          </a:xfrm>
-          <a:prstGeom prst="rect">
-            <a:avLst/>
-          </a:prstGeom>
-          <a:noFill/>
-        </p:spPr>
-        <p:txBody>
-          <a:bodyPr wrap="square" lIns="0" tIns="0" rIns="0" bIns="0">
-            <a:spAutoFit/>
-          </a:bodyPr>
-          <a:lstStyle/>
-          <a:p>
-            <a:pPr>
-              <a:defRPr sz="2600" b="1">
-                <a:solidFill>
-                  <a:srgbClr val="0F172A"/>
-                </a:solidFill>
-              </a:defRPr>
-            </a:pPr>
-            <a:r>
-              <a:t>System Architecture &amp; Database Schema</a:t>
-            </a:r>
-          </a:p>
-        </p:txBody>
-      </p:sp>
-      <p:sp>
-        <p:nvSpPr>
-          <p:cNvPr id="4" name="Rectangle 3"/>
+          <a:bodyPr rtlCol="0" anchor="ctr"/>
+          <a:lstStyle/>
+          <a:p>
+            <a:pPr algn="ctr"/>
+          </a:p>
+        </p:txBody>
+      </p:sp>
+      <p:sp>
+        <p:nvSpPr>
+          <p:cNvPr id="5" name="Rectangle 4"/>
           <p:cNvSpPr/>
           <p:nvPr/>
         </p:nvSpPr>
         <p:spPr>
           <a:xfrm>
-            <a:off x="731520" y="1463040"/>
-            <a:ext cx="10728655" cy="18288"/>
+            <a:off x="731520" y="6217920"/>
+            <a:ext cx="10728655" cy="13716"/>
           </a:xfrm>
           <a:prstGeom prst="rect">
             <a:avLst/>
@@ -5994,20 +6509,92 @@
       </p:sp>
       <p:sp>
         <p:nvSpPr>
-          <p:cNvPr id="5" name="Rounded Rectangle 4"/>
+          <p:cNvPr id="6" name="TextBox 5"/>
+          <p:cNvSpPr txBox="1"/>
+          <p:nvPr/>
+        </p:nvSpPr>
+        <p:spPr>
+          <a:xfrm>
+            <a:off x="731520" y="6263640"/>
+            <a:ext cx="7315200" cy="365760"/>
+          </a:xfrm>
+          <a:prstGeom prst="rect">
+            <a:avLst/>
+          </a:prstGeom>
+          <a:noFill/>
+        </p:spPr>
+        <p:txBody>
+          <a:bodyPr wrap="none" lIns="0" tIns="0" rIns="0" bIns="0">
+            <a:spAutoFit/>
+          </a:bodyPr>
+          <a:lstStyle/>
+          <a:p>
+            <a:pPr>
+              <a:defRPr sz="950">
+                <a:solidFill>
+                  <a:srgbClr val="718096"/>
+                </a:solidFill>
+                <a:latin typeface="Arial"/>
+              </a:defRPr>
+            </a:pPr>
+            <a:r>
+              <a:t>Employee Leave Management System | Project Presentation</a:t>
+            </a:r>
+          </a:p>
+        </p:txBody>
+      </p:sp>
+      <p:sp>
+        <p:nvSpPr>
+          <p:cNvPr id="7" name="TextBox 6"/>
+          <p:cNvSpPr txBox="1"/>
+          <p:nvPr/>
+        </p:nvSpPr>
+        <p:spPr>
+          <a:xfrm>
+            <a:off x="9601200" y="6263640"/>
+            <a:ext cx="1828800" cy="365760"/>
+          </a:xfrm>
+          <a:prstGeom prst="rect">
+            <a:avLst/>
+          </a:prstGeom>
+          <a:noFill/>
+        </p:spPr>
+        <p:txBody>
+          <a:bodyPr wrap="none" lIns="0" tIns="0" rIns="0" bIns="0">
+            <a:spAutoFit/>
+          </a:bodyPr>
+          <a:lstStyle/>
+          <a:p>
+            <a:pPr algn="r">
+              <a:defRPr sz="950">
+                <a:solidFill>
+                  <a:srgbClr val="718096"/>
+                </a:solidFill>
+                <a:latin typeface="Arial"/>
+              </a:defRPr>
+            </a:pPr>
+            <a:r>
+              <a:t>Slide 5 of 10</a:t>
+            </a:r>
+          </a:p>
+        </p:txBody>
+      </p:sp>
+      <p:sp>
+        <p:nvSpPr>
+          <p:cNvPr id="8" name="Rectangle 7"/>
           <p:cNvSpPr/>
           <p:nvPr/>
         </p:nvSpPr>
         <p:spPr>
           <a:xfrm>
-            <a:off x="731520" y="1737360"/>
-            <a:ext cx="5486400" cy="4572000"/>
-          </a:xfrm>
-          <a:prstGeom prst="roundRect">
+            <a:off x="731520" y="1554480"/>
+            <a:ext cx="3474720" cy="4389120"/>
+          </a:xfrm>
+          <a:prstGeom prst="rect">
             <a:avLst/>
           </a:prstGeom>
           <a:solidFill>
-            <a:srgbClr val="F8FAFC"/>
+            <a:srgbClr val="FFFFFF"/>
           </a:solidFill>
           <a:ln w="12700">
             <a:solidFill>
@@ -6039,14 +6626,93 @@
       </p:sp>
       <p:sp>
         <p:nvSpPr>
-          <p:cNvPr id="6" name="TextBox 5"/>
+          <p:cNvPr id="9" name="Rectangle 8"/>
+          <p:cNvSpPr/>
+          <p:nvPr/>
+        </p:nvSpPr>
+        <p:spPr>
+          <a:xfrm>
+            <a:off x="731520" y="1554480"/>
+            <a:ext cx="3474720" cy="502920"/>
+          </a:xfrm>
+          <a:prstGeom prst="rect">
+            <a:avLst/>
+          </a:prstGeom>
+          <a:solidFill>
+            <a:srgbClr val="2B6CB0"/>
+          </a:solidFill>
+          <a:ln>
+            <a:noFill/>
+          </a:ln>
+        </p:spPr>
+        <p:style>
+          <a:lnRef idx="1">
+            <a:schemeClr val="accent1"/>
+          </a:lnRef>
+          <a:fillRef idx="3">
+            <a:schemeClr val="accent1"/>
+          </a:fillRef>
+          <a:effectRef idx="2">
+            <a:schemeClr val="accent1"/>
+          </a:effectRef>
+          <a:fontRef idx="minor">
+            <a:schemeClr val="lt1"/>
+          </a:fontRef>
+        </p:style>
+        <p:txBody>
+          <a:bodyPr rtlCol="0" anchor="ctr"/>
+          <a:lstStyle/>
+          <a:p>
+            <a:pPr algn="ctr"/>
+          </a:p>
+        </p:txBody>
+      </p:sp>
+      <p:sp>
+        <p:nvSpPr>
+          <p:cNvPr id="10" name="TextBox 9"/>
           <p:cNvSpPr txBox="1"/>
           <p:nvPr/>
         </p:nvSpPr>
         <p:spPr>
           <a:xfrm>
-            <a:off x="914400" y="1920240"/>
-            <a:ext cx="5120640" cy="4206240"/>
+            <a:off x="731520" y="1600200"/>
+            <a:ext cx="3474720" cy="411480"/>
+          </a:xfrm>
+          <a:prstGeom prst="rect">
+            <a:avLst/>
+          </a:prstGeom>
+          <a:noFill/>
+        </p:spPr>
+        <p:txBody>
+          <a:bodyPr wrap="none">
+            <a:spAutoFit/>
+          </a:bodyPr>
+          <a:lstStyle/>
+          <a:p>
+            <a:pPr algn="ctr">
+              <a:defRPr sz="1300" b="1">
+                <a:solidFill>
+                  <a:srgbClr val="FFFFFF"/>
+                </a:solidFill>
+                <a:latin typeface="Arial"/>
+              </a:defRPr>
+            </a:pPr>
+            <a:r>
+              <a:t>Backend Technologies</a:t>
+            </a:r>
+          </a:p>
+        </p:txBody>
+      </p:sp>
+      <p:sp>
+        <p:nvSpPr>
+          <p:cNvPr id="11" name="TextBox 10"/>
+          <p:cNvSpPr txBox="1"/>
+          <p:nvPr/>
+        </p:nvSpPr>
+        <p:spPr>
+          <a:xfrm>
+            <a:off x="914400" y="2194560"/>
+            <a:ext cx="3108960" cy="3657600"/>
           </a:xfrm>
           <a:prstGeom prst="rect">
             <a:avLst/>
@@ -6060,29 +6726,18 @@
           <a:lstStyle/>
           <a:p>
             <a:pPr>
-              <a:defRPr sz="1600" b="1">
-                <a:solidFill>
-                  <a:srgbClr val="4F46E5"/>
-                </a:solidFill>
-              </a:defRPr>
-            </a:pPr>
-            <a:r>
-              <a:t>Multi-Tier Software Architecture</a:t>
-            </a:r>
-          </a:p>
-          <a:p>
-            <a:pPr>
               <a:spcBef>
-                <a:spcPts val="1000"/>
+                <a:spcPts val="0"/>
               </a:spcBef>
-              <a:defRPr sz="1300" b="1">
-                <a:solidFill>
-                  <a:srgbClr val="0F172A"/>
-                </a:solidFill>
-              </a:defRPr>
-            </a:pPr>
-            <a:r>
-              <a:t>🏛️  Presentation Tier (Client):</a:t>
+              <a:defRPr sz="1200" b="1">
+                <a:solidFill>
+                  <a:srgbClr val="1A365D"/>
+                </a:solidFill>
+                <a:latin typeface="Arial"/>
+              </a:defRPr>
+            </a:pPr>
+            <a:r>
+              <a:t>Python 3.12</a:t>
             </a:r>
           </a:p>
           <a:p>
@@ -6090,29 +6745,31 @@
               <a:spcBef>
                 <a:spcPts val="200"/>
               </a:spcBef>
-              <a:defRPr sz="1100">
-                <a:solidFill>
-                  <a:srgbClr val="64748B"/>
-                </a:solidFill>
-              </a:defRPr>
-            </a:pPr>
-            <a:r>
-              <a:t>Responsive Web Browser, Tailwind CSS, FontAwesome, Chart.js, asynchronous JSON REST calls (`/api/calculate-days`).</a:t>
+              <a:defRPr sz="1050">
+                <a:solidFill>
+                  <a:srgbClr val="2D3748"/>
+                </a:solidFill>
+                <a:latin typeface="Arial"/>
+              </a:defRPr>
+            </a:pPr>
+            <a:r>
+              <a:t>Core server programming language chosen for stability and extensive libraries.</a:t>
             </a:r>
           </a:p>
           <a:p>
             <a:pPr>
               <a:spcBef>
-                <a:spcPts val="1000"/>
+                <a:spcPts val="800"/>
               </a:spcBef>
-              <a:defRPr sz="1300" b="1">
-                <a:solidFill>
-                  <a:srgbClr val="0F172A"/>
-                </a:solidFill>
-              </a:defRPr>
-            </a:pPr>
-            <a:r>
-              <a:t>🏛️  Application Tier (Flask Backend):</a:t>
+              <a:defRPr sz="1200" b="1">
+                <a:solidFill>
+                  <a:srgbClr val="1A365D"/>
+                </a:solidFill>
+                <a:latin typeface="Arial"/>
+              </a:defRPr>
+            </a:pPr>
+            <a:r>
+              <a:t>Flask 3.0</a:t>
             </a:r>
           </a:p>
           <a:p>
@@ -6120,29 +6777,31 @@
               <a:spcBef>
                 <a:spcPts val="200"/>
               </a:spcBef>
-              <a:defRPr sz="1100">
-                <a:solidFill>
-                  <a:srgbClr val="64748B"/>
-                </a:solidFill>
-              </a:defRPr>
-            </a:pPr>
-            <a:r>
-              <a:t>Authentication controller, RBAC gatekeepers, Business Calendar Day Engine, and CSV streaming pipeline.</a:t>
+              <a:defRPr sz="1050">
+                <a:solidFill>
+                  <a:srgbClr val="2D3748"/>
+                </a:solidFill>
+                <a:latin typeface="Arial"/>
+              </a:defRPr>
+            </a:pPr>
+            <a:r>
+              <a:t>WSGI web application framework handling routes, sessions, and request dispatching.</a:t>
             </a:r>
           </a:p>
           <a:p>
             <a:pPr>
               <a:spcBef>
-                <a:spcPts val="1000"/>
+                <a:spcPts val="800"/>
               </a:spcBef>
-              <a:defRPr sz="1300" b="1">
-                <a:solidFill>
-                  <a:srgbClr val="0F172A"/>
-                </a:solidFill>
-              </a:defRPr>
-            </a:pPr>
-            <a:r>
-              <a:t>🏛️  Persistence Tier (SQLite3 DB):</a:t>
+              <a:defRPr sz="1200" b="1">
+                <a:solidFill>
+                  <a:srgbClr val="1A365D"/>
+                </a:solidFill>
+                <a:latin typeface="Arial"/>
+              </a:defRPr>
+            </a:pPr>
+            <a:r>
+              <a:t>Werkzeug Security</a:t>
             </a:r>
           </a:p>
           <a:p>
@@ -6150,34 +6809,67 @@
               <a:spcBef>
                 <a:spcPts val="200"/>
               </a:spcBef>
-              <a:defRPr sz="1100">
-                <a:solidFill>
-                  <a:srgbClr val="64748B"/>
-                </a:solidFill>
-              </a:defRPr>
-            </a:pPr>
-            <a:r>
-              <a:t>Relational database enforcing referential foreign key constraints and ACID transactional updates.</a:t>
-            </a:r>
-          </a:p>
-        </p:txBody>
-      </p:sp>
-      <p:sp>
-        <p:nvSpPr>
-          <p:cNvPr id="7" name="Rounded Rectangle 6"/>
+              <a:defRPr sz="1050">
+                <a:solidFill>
+                  <a:srgbClr val="2D3748"/>
+                </a:solidFill>
+                <a:latin typeface="Arial"/>
+              </a:defRPr>
+            </a:pPr>
+            <a:r>
+              <a:t>Provides cryptographic password hashing using PBKDF2 SHA-256 algorithm.</a:t>
+            </a:r>
+          </a:p>
+          <a:p>
+            <a:pPr>
+              <a:spcBef>
+                <a:spcPts val="800"/>
+              </a:spcBef>
+              <a:defRPr sz="1200" b="1">
+                <a:solidFill>
+                  <a:srgbClr val="1A365D"/>
+                </a:solidFill>
+                <a:latin typeface="Arial"/>
+              </a:defRPr>
+            </a:pPr>
+            <a:r>
+              <a:t>Gunicorn</a:t>
+            </a:r>
+          </a:p>
+          <a:p>
+            <a:pPr>
+              <a:spcBef>
+                <a:spcPts val="200"/>
+              </a:spcBef>
+              <a:defRPr sz="1050">
+                <a:solidFill>
+                  <a:srgbClr val="2D3748"/>
+                </a:solidFill>
+                <a:latin typeface="Arial"/>
+              </a:defRPr>
+            </a:pPr>
+            <a:r>
+              <a:t>Production-grade UNIX WSGI HTTP server used for cloud deployment on Render.</a:t>
+            </a:r>
+          </a:p>
+        </p:txBody>
+      </p:sp>
+      <p:sp>
+        <p:nvSpPr>
+          <p:cNvPr id="12" name="Rectangle 11"/>
           <p:cNvSpPr/>
           <p:nvPr/>
         </p:nvSpPr>
         <p:spPr>
           <a:xfrm>
-            <a:off x="6492240" y="1737360"/>
-            <a:ext cx="4937760" cy="4572000"/>
-          </a:xfrm>
-          <a:prstGeom prst="roundRect">
+            <a:off x="4389120" y="1554480"/>
+            <a:ext cx="3474720" cy="4389120"/>
+          </a:xfrm>
+          <a:prstGeom prst="rect">
             <a:avLst/>
           </a:prstGeom>
           <a:solidFill>
-            <a:srgbClr val="F8FAFC"/>
+            <a:srgbClr val="FFFFFF"/>
           </a:solidFill>
           <a:ln w="12700">
             <a:solidFill>
@@ -6209,14 +6901,93 @@
       </p:sp>
       <p:sp>
         <p:nvSpPr>
-          <p:cNvPr id="8" name="TextBox 7"/>
+          <p:cNvPr id="13" name="Rectangle 12"/>
+          <p:cNvSpPr/>
+          <p:nvPr/>
+        </p:nvSpPr>
+        <p:spPr>
+          <a:xfrm>
+            <a:off x="4389120" y="1554480"/>
+            <a:ext cx="3474720" cy="502920"/>
+          </a:xfrm>
+          <a:prstGeom prst="rect">
+            <a:avLst/>
+          </a:prstGeom>
+          <a:solidFill>
+            <a:srgbClr val="2B6CB0"/>
+          </a:solidFill>
+          <a:ln>
+            <a:noFill/>
+          </a:ln>
+        </p:spPr>
+        <p:style>
+          <a:lnRef idx="1">
+            <a:schemeClr val="accent1"/>
+          </a:lnRef>
+          <a:fillRef idx="3">
+            <a:schemeClr val="accent1"/>
+          </a:fillRef>
+          <a:effectRef idx="2">
+            <a:schemeClr val="accent1"/>
+          </a:effectRef>
+          <a:fontRef idx="minor">
+            <a:schemeClr val="lt1"/>
+          </a:fontRef>
+        </p:style>
+        <p:txBody>
+          <a:bodyPr rtlCol="0" anchor="ctr"/>
+          <a:lstStyle/>
+          <a:p>
+            <a:pPr algn="ctr"/>
+          </a:p>
+        </p:txBody>
+      </p:sp>
+      <p:sp>
+        <p:nvSpPr>
+          <p:cNvPr id="14" name="TextBox 13"/>
           <p:cNvSpPr txBox="1"/>
           <p:nvPr/>
         </p:nvSpPr>
         <p:spPr>
           <a:xfrm>
-            <a:off x="6675120" y="1920240"/>
-            <a:ext cx="4572000" cy="4206240"/>
+            <a:off x="4389120" y="1600200"/>
+            <a:ext cx="3474720" cy="411480"/>
+          </a:xfrm>
+          <a:prstGeom prst="rect">
+            <a:avLst/>
+          </a:prstGeom>
+          <a:noFill/>
+        </p:spPr>
+        <p:txBody>
+          <a:bodyPr wrap="none">
+            <a:spAutoFit/>
+          </a:bodyPr>
+          <a:lstStyle/>
+          <a:p>
+            <a:pPr algn="ctr">
+              <a:defRPr sz="1300" b="1">
+                <a:solidFill>
+                  <a:srgbClr val="FFFFFF"/>
+                </a:solidFill>
+                <a:latin typeface="Arial"/>
+              </a:defRPr>
+            </a:pPr>
+            <a:r>
+              <a:t>Frontend &amp; User Interface</a:t>
+            </a:r>
+          </a:p>
+        </p:txBody>
+      </p:sp>
+      <p:sp>
+        <p:nvSpPr>
+          <p:cNvPr id="15" name="TextBox 14"/>
+          <p:cNvSpPr txBox="1"/>
+          <p:nvPr/>
+        </p:nvSpPr>
+        <p:spPr>
+          <a:xfrm>
+            <a:off x="4572000" y="2194560"/>
+            <a:ext cx="3108960" cy="3657600"/>
           </a:xfrm>
           <a:prstGeom prst="rect">
             <a:avLst/>
@@ -6230,14 +7001,34 @@
           <a:lstStyle/>
           <a:p>
             <a:pPr>
-              <a:defRPr sz="1600" b="1">
-                <a:solidFill>
-                  <a:srgbClr val="059669"/>
-                </a:solidFill>
-              </a:defRPr>
-            </a:pPr>
-            <a:r>
-              <a:t>Relational Database Schema (5 Tables)</a:t>
+              <a:spcBef>
+                <a:spcPts val="0"/>
+              </a:spcBef>
+              <a:defRPr sz="1200" b="1">
+                <a:solidFill>
+                  <a:srgbClr val="1A365D"/>
+                </a:solidFill>
+                <a:latin typeface="Arial"/>
+              </a:defRPr>
+            </a:pPr>
+            <a:r>
+              <a:t>HTML5 &amp; Jinja2</a:t>
+            </a:r>
+          </a:p>
+          <a:p>
+            <a:pPr>
+              <a:spcBef>
+                <a:spcPts val="200"/>
+              </a:spcBef>
+              <a:defRPr sz="1050">
+                <a:solidFill>
+                  <a:srgbClr val="2D3748"/>
+                </a:solidFill>
+                <a:latin typeface="Arial"/>
+              </a:defRPr>
+            </a:pPr>
+            <a:r>
+              <a:t>Semantic markup and dynamic server-side template rendering.</a:t>
             </a:r>
           </a:p>
           <a:p>
@@ -6245,29 +7036,31 @@
               <a:spcBef>
                 <a:spcPts val="800"/>
               </a:spcBef>
-              <a:defRPr sz="1250" b="1">
-                <a:solidFill>
-                  <a:srgbClr val="0F172A"/>
-                </a:solidFill>
-              </a:defRPr>
-            </a:pPr>
-            <a:r>
-              <a:t>📋  users</a:t>
+              <a:defRPr sz="1200" b="1">
+                <a:solidFill>
+                  <a:srgbClr val="1A365D"/>
+                </a:solidFill>
+                <a:latin typeface="Arial"/>
+              </a:defRPr>
+            </a:pPr>
+            <a:r>
+              <a:t>Tailwind CSS</a:t>
             </a:r>
           </a:p>
           <a:p>
             <a:pPr>
               <a:spcBef>
-                <a:spcPts val="100"/>
+                <a:spcPts val="200"/>
               </a:spcBef>
               <a:defRPr sz="1050">
                 <a:solidFill>
-                  <a:srgbClr val="64748B"/>
-                </a:solidFill>
-              </a:defRPr>
-            </a:pPr>
-            <a:r>
-              <a:t>Employee records, hashed passwords, department, role (admin / employee)</a:t>
+                  <a:srgbClr val="2D3748"/>
+                </a:solidFill>
+                <a:latin typeface="Arial"/>
+              </a:defRPr>
+            </a:pPr>
+            <a:r>
+              <a:t>Utility-first CSS framework ensuring responsive, clean, and modern layout.</a:t>
             </a:r>
           </a:p>
           <a:p>
@@ -6275,29 +7068,31 @@
               <a:spcBef>
                 <a:spcPts val="800"/>
               </a:spcBef>
-              <a:defRPr sz="1250" b="1">
-                <a:solidFill>
-                  <a:srgbClr val="0F172A"/>
-                </a:solidFill>
-              </a:defRPr>
-            </a:pPr>
-            <a:r>
-              <a:t>📋  leave_types</a:t>
+              <a:defRPr sz="1200" b="1">
+                <a:solidFill>
+                  <a:srgbClr val="1A365D"/>
+                </a:solidFill>
+                <a:latin typeface="Arial"/>
+              </a:defRPr>
+            </a:pPr>
+            <a:r>
+              <a:t>JavaScript (ES6)</a:t>
             </a:r>
           </a:p>
           <a:p>
             <a:pPr>
               <a:spcBef>
-                <a:spcPts val="100"/>
+                <a:spcPts val="200"/>
               </a:spcBef>
               <a:defRPr sz="1050">
                 <a:solidFill>
-                  <a:srgbClr val="64748B"/>
-                </a:solidFill>
-              </a:defRPr>
-            </a:pPr>
-            <a:r>
-              <a:t>Annual, Sick, Casual, Maternity, Paternity, Unpaid categories</a:t>
+                  <a:srgbClr val="2D3748"/>
+                </a:solidFill>
+                <a:latin typeface="Arial"/>
+              </a:defRPr>
+            </a:pPr>
+            <a:r>
+              <a:t>Asynchronous DOM manipulation, live calculation calls, and modal interactions.</a:t>
             </a:r>
           </a:p>
           <a:p>
@@ -6305,29 +7100,210 @@
               <a:spcBef>
                 <a:spcPts val="800"/>
               </a:spcBef>
-              <a:defRPr sz="1250" b="1">
-                <a:solidFill>
-                  <a:srgbClr val="0F172A"/>
-                </a:solidFill>
-              </a:defRPr>
-            </a:pPr>
-            <a:r>
-              <a:t>📋  leave_balances</a:t>
+              <a:defRPr sz="1200" b="1">
+                <a:solidFill>
+                  <a:srgbClr val="1A365D"/>
+                </a:solidFill>
+                <a:latin typeface="Arial"/>
+              </a:defRPr>
+            </a:pPr>
+            <a:r>
+              <a:t>Chart.js</a:t>
             </a:r>
           </a:p>
           <a:p>
             <a:pPr>
               <a:spcBef>
-                <a:spcPts val="100"/>
+                <a:spcPts val="200"/>
               </a:spcBef>
               <a:defRPr sz="1050">
                 <a:solidFill>
-                  <a:srgbClr val="64748B"/>
-                </a:solidFill>
-              </a:defRPr>
-            </a:pPr>
-            <a:r>
-              <a:t>Yearly allocated, used, and pending days per user &amp; category</a:t>
+                  <a:srgbClr val="2D3748"/>
+                </a:solidFill>
+                <a:latin typeface="Arial"/>
+              </a:defRPr>
+            </a:pPr>
+            <a:r>
+              <a:t>Canvas-based charting library for visualizing leave trends and category usage.</a:t>
+            </a:r>
+          </a:p>
+        </p:txBody>
+      </p:sp>
+      <p:sp>
+        <p:nvSpPr>
+          <p:cNvPr id="16" name="Rectangle 15"/>
+          <p:cNvSpPr/>
+          <p:nvPr/>
+        </p:nvSpPr>
+        <p:spPr>
+          <a:xfrm>
+            <a:off x="8046720" y="1554480"/>
+            <a:ext cx="3474720" cy="4389120"/>
+          </a:xfrm>
+          <a:prstGeom prst="rect">
+            <a:avLst/>
+          </a:prstGeom>
+          <a:solidFill>
+            <a:srgbClr val="FFFFFF"/>
+          </a:solidFill>
+          <a:ln w="12700">
+            <a:solidFill>
+              <a:srgbClr val="E2E8F0"/>
+            </a:solidFill>
+          </a:ln>
+        </p:spPr>
+        <p:style>
+          <a:lnRef idx="1">
+            <a:schemeClr val="accent1"/>
+          </a:lnRef>
+          <a:fillRef idx="3">
+            <a:schemeClr val="accent1"/>
+          </a:fillRef>
+          <a:effectRef idx="2">
+            <a:schemeClr val="accent1"/>
+          </a:effectRef>
+          <a:fontRef idx="minor">
+            <a:schemeClr val="lt1"/>
+          </a:fontRef>
+        </p:style>
+        <p:txBody>
+          <a:bodyPr rtlCol="0" anchor="ctr"/>
+          <a:lstStyle/>
+          <a:p>
+            <a:pPr algn="ctr"/>
+          </a:p>
+        </p:txBody>
+      </p:sp>
+      <p:sp>
+        <p:nvSpPr>
+          <p:cNvPr id="17" name="Rectangle 16"/>
+          <p:cNvSpPr/>
+          <p:nvPr/>
+        </p:nvSpPr>
+        <p:spPr>
+          <a:xfrm>
+            <a:off x="8046720" y="1554480"/>
+            <a:ext cx="3474720" cy="502920"/>
+          </a:xfrm>
+          <a:prstGeom prst="rect">
+            <a:avLst/>
+          </a:prstGeom>
+          <a:solidFill>
+            <a:srgbClr val="2B6CB0"/>
+          </a:solidFill>
+          <a:ln>
+            <a:noFill/>
+          </a:ln>
+        </p:spPr>
+        <p:style>
+          <a:lnRef idx="1">
+            <a:schemeClr val="accent1"/>
+          </a:lnRef>
+          <a:fillRef idx="3">
+            <a:schemeClr val="accent1"/>
+          </a:fillRef>
+          <a:effectRef idx="2">
+            <a:schemeClr val="accent1"/>
+          </a:effectRef>
+          <a:fontRef idx="minor">
+            <a:schemeClr val="lt1"/>
+          </a:fontRef>
+        </p:style>
+        <p:txBody>
+          <a:bodyPr rtlCol="0" anchor="ctr"/>
+          <a:lstStyle/>
+          <a:p>
+            <a:pPr algn="ctr"/>
+          </a:p>
+        </p:txBody>
+      </p:sp>
+      <p:sp>
+        <p:nvSpPr>
+          <p:cNvPr id="18" name="TextBox 17"/>
+          <p:cNvSpPr txBox="1"/>
+          <p:nvPr/>
+        </p:nvSpPr>
+        <p:spPr>
+          <a:xfrm>
+            <a:off x="8046720" y="1600200"/>
+            <a:ext cx="3474720" cy="411480"/>
+          </a:xfrm>
+          <a:prstGeom prst="rect">
+            <a:avLst/>
+          </a:prstGeom>
+          <a:noFill/>
+        </p:spPr>
+        <p:txBody>
+          <a:bodyPr wrap="none">
+            <a:spAutoFit/>
+          </a:bodyPr>
+          <a:lstStyle/>
+          <a:p>
+            <a:pPr algn="ctr">
+              <a:defRPr sz="1300" b="1">
+                <a:solidFill>
+                  <a:srgbClr val="FFFFFF"/>
+                </a:solidFill>
+                <a:latin typeface="Arial"/>
+              </a:defRPr>
+            </a:pPr>
+            <a:r>
+              <a:t>Database &amp; DevOps</a:t>
+            </a:r>
+          </a:p>
+        </p:txBody>
+      </p:sp>
+      <p:sp>
+        <p:nvSpPr>
+          <p:cNvPr id="19" name="TextBox 18"/>
+          <p:cNvSpPr txBox="1"/>
+          <p:nvPr/>
+        </p:nvSpPr>
+        <p:spPr>
+          <a:xfrm>
+            <a:off x="8229600" y="2194560"/>
+            <a:ext cx="3108960" cy="3657600"/>
+          </a:xfrm>
+          <a:prstGeom prst="rect">
+            <a:avLst/>
+          </a:prstGeom>
+          <a:noFill/>
+        </p:spPr>
+        <p:txBody>
+          <a:bodyPr wrap="square">
+            <a:spAutoFit/>
+          </a:bodyPr>
+          <a:lstStyle/>
+          <a:p>
+            <a:pPr>
+              <a:spcBef>
+                <a:spcPts val="0"/>
+              </a:spcBef>
+              <a:defRPr sz="1200" b="1">
+                <a:solidFill>
+                  <a:srgbClr val="1A365D"/>
+                </a:solidFill>
+                <a:latin typeface="Arial"/>
+              </a:defRPr>
+            </a:pPr>
+            <a:r>
+              <a:t>SQLite3 Engine</a:t>
+            </a:r>
+          </a:p>
+          <a:p>
+            <a:pPr>
+              <a:spcBef>
+                <a:spcPts val="200"/>
+              </a:spcBef>
+              <a:defRPr sz="1050">
+                <a:solidFill>
+                  <a:srgbClr val="2D3748"/>
+                </a:solidFill>
+                <a:latin typeface="Arial"/>
+              </a:defRPr>
+            </a:pPr>
+            <a:r>
+              <a:t>Lightweight, zero-configuration relational database with full ACID compliance.</a:t>
             </a:r>
           </a:p>
           <a:p>
@@ -6335,29 +7311,31 @@
               <a:spcBef>
                 <a:spcPts val="800"/>
               </a:spcBef>
-              <a:defRPr sz="1250" b="1">
-                <a:solidFill>
-                  <a:srgbClr val="0F172A"/>
-                </a:solidFill>
-              </a:defRPr>
-            </a:pPr>
-            <a:r>
-              <a:t>📋  leave_applications</a:t>
+              <a:defRPr sz="1200" b="1">
+                <a:solidFill>
+                  <a:srgbClr val="1A365D"/>
+                </a:solidFill>
+                <a:latin typeface="Arial"/>
+              </a:defRPr>
+            </a:pPr>
+            <a:r>
+              <a:t>Python unittest</a:t>
             </a:r>
           </a:p>
           <a:p>
             <a:pPr>
               <a:spcBef>
-                <a:spcPts val="100"/>
+                <a:spcPts val="200"/>
               </a:spcBef>
               <a:defRPr sz="1050">
                 <a:solidFill>
-                  <a:srgbClr val="64748B"/>
-                </a:solidFill>
-              </a:defRPr>
-            </a:pPr>
-            <a:r>
-              <a:t>Start/end dates, total_days, half_day flag, remarks, review state</a:t>
+                  <a:srgbClr val="2D3748"/>
+                </a:solidFill>
+                <a:latin typeface="Arial"/>
+              </a:defRPr>
+            </a:pPr>
+            <a:r>
+              <a:t>Automated unit test framework used for comprehensive quality assurance.</a:t>
             </a:r>
           </a:p>
           <a:p>
@@ -6365,29 +7343,63 @@
               <a:spcBef>
                 <a:spcPts val="800"/>
               </a:spcBef>
-              <a:defRPr sz="1250" b="1">
-                <a:solidFill>
-                  <a:srgbClr val="0F172A"/>
-                </a:solidFill>
-              </a:defRPr>
-            </a:pPr>
-            <a:r>
-              <a:t>📋  audit_logs</a:t>
+              <a:defRPr sz="1200" b="1">
+                <a:solidFill>
+                  <a:srgbClr val="1A365D"/>
+                </a:solidFill>
+                <a:latin typeface="Arial"/>
+              </a:defRPr>
+            </a:pPr>
+            <a:r>
+              <a:t>Git &amp; GitHub</a:t>
             </a:r>
           </a:p>
           <a:p>
             <a:pPr>
               <a:spcBef>
-                <a:spcPts val="100"/>
+                <a:spcPts val="200"/>
               </a:spcBef>
               <a:defRPr sz="1050">
                 <a:solidFill>
-                  <a:srgbClr val="64748B"/>
-                </a:solidFill>
-              </a:defRPr>
-            </a:pPr>
-            <a:r>
-              <a:t>Immutable audit trail of all logins, submissions, and approvals</a:t>
+                  <a:srgbClr val="2D3748"/>
+                </a:solidFill>
+                <a:latin typeface="Arial"/>
+              </a:defRPr>
+            </a:pPr>
+            <a:r>
+              <a:t>Distributed version control system for tracking changes and repository hosting.</a:t>
+            </a:r>
+          </a:p>
+          <a:p>
+            <a:pPr>
+              <a:spcBef>
+                <a:spcPts val="800"/>
+              </a:spcBef>
+              <a:defRPr sz="1200" b="1">
+                <a:solidFill>
+                  <a:srgbClr val="1A365D"/>
+                </a:solidFill>
+                <a:latin typeface="Arial"/>
+              </a:defRPr>
+            </a:pPr>
+            <a:r>
+              <a:t>Render Cloud</a:t>
+            </a:r>
+          </a:p>
+          <a:p>
+            <a:pPr>
+              <a:spcBef>
+                <a:spcPts val="200"/>
+              </a:spcBef>
+              <a:defRPr sz="1050">
+                <a:solidFill>
+                  <a:srgbClr val="2D3748"/>
+                </a:solidFill>
+                <a:latin typeface="Arial"/>
+              </a:defRPr>
+            </a:pPr>
+            <a:r>
+              <a:t>Cloud hosting platform providing continuous deployment directly from GitHub.</a:t>
             </a:r>
           </a:p>
         </p:txBody>
@@ -6412,25 +7424,95 @@
       <p:grpSpPr/>
       <p:sp>
         <p:nvSpPr>
-          <p:cNvPr id="2" name="Rounded Rectangle 1"/>
+          <p:cNvPr id="2" name="TextBox 1"/>
+          <p:cNvSpPr txBox="1"/>
+          <p:nvPr/>
+        </p:nvSpPr>
+        <p:spPr>
+          <a:xfrm>
+            <a:off x="731520" y="411480"/>
+            <a:ext cx="10698480" cy="274320"/>
+          </a:xfrm>
+          <a:prstGeom prst="rect">
+            <a:avLst/>
+          </a:prstGeom>
+          <a:noFill/>
+        </p:spPr>
+        <p:txBody>
+          <a:bodyPr wrap="none" lIns="0" tIns="0" rIns="0" bIns="0">
+            <a:spAutoFit/>
+          </a:bodyPr>
+          <a:lstStyle/>
+          <a:p>
+            <a:pPr>
+              <a:defRPr sz="1000" b="1">
+                <a:solidFill>
+                  <a:srgbClr val="2B6CB0"/>
+                </a:solidFill>
+                <a:latin typeface="Arial"/>
+              </a:defRPr>
+            </a:pPr>
+            <a:r>
+              <a:t>DATA ARCHITECTURE</a:t>
+            </a:r>
+          </a:p>
+        </p:txBody>
+      </p:sp>
+      <p:sp>
+        <p:nvSpPr>
+          <p:cNvPr id="3" name="TextBox 2"/>
+          <p:cNvSpPr txBox="1"/>
+          <p:nvPr/>
+        </p:nvSpPr>
+        <p:spPr>
+          <a:xfrm>
+            <a:off x="731520" y="685800"/>
+            <a:ext cx="10698480" cy="548640"/>
+          </a:xfrm>
+          <a:prstGeom prst="rect">
+            <a:avLst/>
+          </a:prstGeom>
+          <a:noFill/>
+        </p:spPr>
+        <p:txBody>
+          <a:bodyPr wrap="none" lIns="0" tIns="0" rIns="0" bIns="0">
+            <a:spAutoFit/>
+          </a:bodyPr>
+          <a:lstStyle/>
+          <a:p>
+            <a:pPr>
+              <a:defRPr sz="2200" b="1">
+                <a:solidFill>
+                  <a:srgbClr val="1A365D"/>
+                </a:solidFill>
+                <a:latin typeface="Arial"/>
+              </a:defRPr>
+            </a:pPr>
+            <a:r>
+              <a:t>Database Schema &amp; Entity Relationships</a:t>
+            </a:r>
+          </a:p>
+        </p:txBody>
+      </p:sp>
+      <p:sp>
+        <p:nvSpPr>
+          <p:cNvPr id="4" name="Rectangle 3"/>
           <p:cNvSpPr/>
           <p:nvPr/>
         </p:nvSpPr>
         <p:spPr>
           <a:xfrm>
-            <a:off x="731520" y="365760"/>
-            <a:ext cx="2560320" cy="320040"/>
-          </a:xfrm>
-          <a:prstGeom prst="roundRect">
+            <a:off x="731520" y="1325880"/>
+            <a:ext cx="10728655" cy="18288"/>
+          </a:xfrm>
+          <a:prstGeom prst="rect">
             <a:avLst/>
           </a:prstGeom>
           <a:solidFill>
-            <a:srgbClr val="EEF2FF"/>
+            <a:srgbClr val="2B6CB0"/>
           </a:solidFill>
-          <a:ln w="12700">
-            <a:solidFill>
-              <a:srgbClr val="C7D2FE"/>
-            </a:solidFill>
+          <a:ln>
+            <a:noFill/>
           </a:ln>
         </p:spPr>
         <p:style>
@@ -6448,67 +7530,23 @@
           </a:fontRef>
         </p:style>
         <p:txBody>
-          <a:bodyPr rtlCol="0" anchor="ctr" wrap="square" lIns="0" tIns="0" rIns="0" bIns="0"/>
-          <a:lstStyle/>
-          <a:p>
-            <a:pPr algn="ctr">
-              <a:defRPr sz="1000" b="1">
-                <a:solidFill>
-                  <a:srgbClr val="4F46E5"/>
-                </a:solidFill>
-              </a:defRPr>
-            </a:pPr>
-            <a:r>
-              <a:t>●  FEATURE WALKTHROUGH</a:t>
-            </a:r>
-          </a:p>
-        </p:txBody>
-      </p:sp>
-      <p:sp>
-        <p:nvSpPr>
-          <p:cNvPr id="3" name="TextBox 2"/>
-          <p:cNvSpPr txBox="1"/>
-          <p:nvPr/>
-        </p:nvSpPr>
-        <p:spPr>
-          <a:xfrm>
-            <a:off x="731520" y="777240"/>
-            <a:ext cx="10698480" cy="640080"/>
-          </a:xfrm>
-          <a:prstGeom prst="rect">
-            <a:avLst/>
-          </a:prstGeom>
-          <a:noFill/>
-        </p:spPr>
-        <p:txBody>
-          <a:bodyPr wrap="square" lIns="0" tIns="0" rIns="0" bIns="0">
-            <a:spAutoFit/>
-          </a:bodyPr>
-          <a:lstStyle/>
-          <a:p>
-            <a:pPr>
-              <a:defRPr sz="2600" b="1">
-                <a:solidFill>
-                  <a:srgbClr val="0F172A"/>
-                </a:solidFill>
-              </a:defRPr>
-            </a:pPr>
-            <a:r>
-              <a:t>Employee Self-Service Experience</a:t>
-            </a:r>
-          </a:p>
-        </p:txBody>
-      </p:sp>
-      <p:sp>
-        <p:nvSpPr>
-          <p:cNvPr id="4" name="Rectangle 3"/>
+          <a:bodyPr rtlCol="0" anchor="ctr"/>
+          <a:lstStyle/>
+          <a:p>
+            <a:pPr algn="ctr"/>
+          </a:p>
+        </p:txBody>
+      </p:sp>
+      <p:sp>
+        <p:nvSpPr>
+          <p:cNvPr id="5" name="Rectangle 4"/>
           <p:cNvSpPr/>
           <p:nvPr/>
         </p:nvSpPr>
         <p:spPr>
           <a:xfrm>
-            <a:off x="731520" y="1463040"/>
-            <a:ext cx="10728655" cy="18288"/>
+            <a:off x="731520" y="6217920"/>
+            <a:ext cx="10728655" cy="13716"/>
           </a:xfrm>
           <a:prstGeom prst="rect">
             <a:avLst/>
@@ -6544,20 +7582,92 @@
       </p:sp>
       <p:sp>
         <p:nvSpPr>
-          <p:cNvPr id="5" name="Rounded Rectangle 4"/>
+          <p:cNvPr id="6" name="TextBox 5"/>
+          <p:cNvSpPr txBox="1"/>
+          <p:nvPr/>
+        </p:nvSpPr>
+        <p:spPr>
+          <a:xfrm>
+            <a:off x="731520" y="6263640"/>
+            <a:ext cx="7315200" cy="365760"/>
+          </a:xfrm>
+          <a:prstGeom prst="rect">
+            <a:avLst/>
+          </a:prstGeom>
+          <a:noFill/>
+        </p:spPr>
+        <p:txBody>
+          <a:bodyPr wrap="none" lIns="0" tIns="0" rIns="0" bIns="0">
+            <a:spAutoFit/>
+          </a:bodyPr>
+          <a:lstStyle/>
+          <a:p>
+            <a:pPr>
+              <a:defRPr sz="950">
+                <a:solidFill>
+                  <a:srgbClr val="718096"/>
+                </a:solidFill>
+                <a:latin typeface="Arial"/>
+              </a:defRPr>
+            </a:pPr>
+            <a:r>
+              <a:t>Employee Leave Management System | Project Presentation</a:t>
+            </a:r>
+          </a:p>
+        </p:txBody>
+      </p:sp>
+      <p:sp>
+        <p:nvSpPr>
+          <p:cNvPr id="7" name="TextBox 6"/>
+          <p:cNvSpPr txBox="1"/>
+          <p:nvPr/>
+        </p:nvSpPr>
+        <p:spPr>
+          <a:xfrm>
+            <a:off x="9601200" y="6263640"/>
+            <a:ext cx="1828800" cy="365760"/>
+          </a:xfrm>
+          <a:prstGeom prst="rect">
+            <a:avLst/>
+          </a:prstGeom>
+          <a:noFill/>
+        </p:spPr>
+        <p:txBody>
+          <a:bodyPr wrap="none" lIns="0" tIns="0" rIns="0" bIns="0">
+            <a:spAutoFit/>
+          </a:bodyPr>
+          <a:lstStyle/>
+          <a:p>
+            <a:pPr algn="r">
+              <a:defRPr sz="950">
+                <a:solidFill>
+                  <a:srgbClr val="718096"/>
+                </a:solidFill>
+                <a:latin typeface="Arial"/>
+              </a:defRPr>
+            </a:pPr>
+            <a:r>
+              <a:t>Slide 6 of 10</a:t>
+            </a:r>
+          </a:p>
+        </p:txBody>
+      </p:sp>
+      <p:sp>
+        <p:nvSpPr>
+          <p:cNvPr id="8" name="Rectangle 7"/>
           <p:cNvSpPr/>
           <p:nvPr/>
         </p:nvSpPr>
         <p:spPr>
           <a:xfrm>
-            <a:off x="731520" y="1737360"/>
-            <a:ext cx="5212080" cy="2011680"/>
-          </a:xfrm>
-          <a:prstGeom prst="roundRect">
+            <a:off x="731520" y="1554480"/>
+            <a:ext cx="10728655" cy="804672"/>
+          </a:xfrm>
+          <a:prstGeom prst="rect">
             <a:avLst/>
           </a:prstGeom>
           <a:solidFill>
-            <a:srgbClr val="F8FAFC"/>
+            <a:srgbClr val="FFFFFF"/>
           </a:solidFill>
           <a:ln w="12700">
             <a:solidFill>
@@ -6589,23 +7699,25 @@
       </p:sp>
       <p:sp>
         <p:nvSpPr>
-          <p:cNvPr id="6" name="Oval 5"/>
+          <p:cNvPr id="9" name="Rectangle 8"/>
           <p:cNvSpPr/>
           <p:nvPr/>
         </p:nvSpPr>
         <p:spPr>
           <a:xfrm>
-            <a:off x="1005840" y="2057400"/>
-            <a:ext cx="365760" cy="365760"/>
-          </a:xfrm>
-          <a:prstGeom prst="ellipse">
+            <a:off x="822960" y="1664208"/>
+            <a:ext cx="2011680" cy="566928"/>
+          </a:xfrm>
+          <a:prstGeom prst="rect">
             <a:avLst/>
           </a:prstGeom>
           <a:solidFill>
-            <a:srgbClr val="4F46E5"/>
+            <a:srgbClr val="EDF2F7"/>
           </a:solidFill>
           <a:ln>
-            <a:noFill/>
+            <a:solidFill>
+              <a:srgbClr val="CBD5E1"/>
+            </a:solidFill>
           </a:ln>
         </p:spPr>
         <p:style>
@@ -6626,20 +7738,30 @@
           <a:bodyPr rtlCol="0" anchor="ctr"/>
           <a:lstStyle/>
           <a:p>
-            <a:pPr algn="ctr"/>
-          </a:p>
-        </p:txBody>
-      </p:sp>
-      <p:sp>
-        <p:nvSpPr>
-          <p:cNvPr id="7" name="TextBox 6"/>
+            <a:pPr algn="ctr">
+              <a:defRPr sz="1200" b="1">
+                <a:solidFill>
+                  <a:srgbClr val="1A365D"/>
+                </a:solidFill>
+                <a:latin typeface="Arial"/>
+              </a:defRPr>
+            </a:pPr>
+            <a:r>
+              <a:t>users</a:t>
+            </a:r>
+          </a:p>
+        </p:txBody>
+      </p:sp>
+      <p:sp>
+        <p:nvSpPr>
+          <p:cNvPr id="10" name="TextBox 9"/>
           <p:cNvSpPr txBox="1"/>
           <p:nvPr/>
         </p:nvSpPr>
         <p:spPr>
           <a:xfrm>
-            <a:off x="1554480" y="1965960"/>
-            <a:ext cx="4114800" cy="1554480"/>
+            <a:off x="3017520" y="1627632"/>
+            <a:ext cx="8229600" cy="685800"/>
           </a:xfrm>
           <a:prstGeom prst="rect">
             <a:avLst/>
@@ -6653,49 +7775,83 @@
           <a:lstStyle/>
           <a:p>
             <a:pPr>
-              <a:defRPr sz="1500" b="1">
-                <a:solidFill>
-                  <a:srgbClr val="0F172A"/>
-                </a:solidFill>
-              </a:defRPr>
-            </a:pPr>
-            <a:r>
-              <a:t>Smart Duration Calculator</a:t>
+              <a:defRPr sz="1150" b="1">
+                <a:solidFill>
+                  <a:srgbClr val="2B6CB0"/>
+                </a:solidFill>
+                <a:latin typeface="Arial"/>
+              </a:defRPr>
+            </a:pPr>
+            <a:r>
+              <a:t>Purpose: Stores staff information</a:t>
             </a:r>
           </a:p>
           <a:p>
             <a:pPr>
               <a:spcBef>
-                <a:spcPts val="600"/>
+                <a:spcPts val="200"/>
               </a:spcBef>
-              <a:defRPr sz="1150">
-                <a:solidFill>
-                  <a:srgbClr val="64748B"/>
-                </a:solidFill>
-              </a:defRPr>
-            </a:pPr>
-            <a:r>
-              <a:t>Live calculation badge instantly computes working business days as the user selects dates. Saturdays, Sundays, and official public holidays are automatically subtracted.</a:t>
-            </a:r>
-          </a:p>
-        </p:txBody>
-      </p:sp>
-      <p:sp>
-        <p:nvSpPr>
-          <p:cNvPr id="8" name="Rounded Rectangle 7"/>
+              <a:defRPr sz="1050">
+                <a:solidFill>
+                  <a:srgbClr val="2D3748"/>
+                </a:solidFill>
+                <a:latin typeface="Arial"/>
+              </a:defRPr>
+            </a:pPr>
+            <a:r>
+              <a:t>Fields: id (INTEGER PK), emp_code (UNIQUE), full_name, email (UNIQUE)</a:t>
+            </a:r>
+          </a:p>
+          <a:p>
+            <a:pPr>
+              <a:spcBef>
+                <a:spcPts val="200"/>
+              </a:spcBef>
+              <a:defRPr sz="1050">
+                <a:solidFill>
+                  <a:srgbClr val="2D3748"/>
+                </a:solidFill>
+                <a:latin typeface="Arial"/>
+              </a:defRPr>
+            </a:pPr>
+            <a:r>
+              <a:t>Fields: password_hash (PBKDF2), role ('admin' / 'employee')</a:t>
+            </a:r>
+          </a:p>
+          <a:p>
+            <a:pPr>
+              <a:spcBef>
+                <a:spcPts val="200"/>
+              </a:spcBef>
+              <a:defRPr sz="1050">
+                <a:solidFill>
+                  <a:srgbClr val="2D3748"/>
+                </a:solidFill>
+                <a:latin typeface="Arial"/>
+              </a:defRPr>
+            </a:pPr>
+            <a:r>
+              <a:t>Fields: department, designation, join_date, is_active</a:t>
+            </a:r>
+          </a:p>
+        </p:txBody>
+      </p:sp>
+      <p:sp>
+        <p:nvSpPr>
+          <p:cNvPr id="11" name="Rectangle 10"/>
           <p:cNvSpPr/>
           <p:nvPr/>
         </p:nvSpPr>
         <p:spPr>
           <a:xfrm>
-            <a:off x="6126480" y="1737360"/>
-            <a:ext cx="5212080" cy="2011680"/>
-          </a:xfrm>
-          <a:prstGeom prst="roundRect">
+            <a:off x="731520" y="2450591"/>
+            <a:ext cx="10728655" cy="804672"/>
+          </a:xfrm>
+          <a:prstGeom prst="rect">
             <a:avLst/>
           </a:prstGeom>
           <a:solidFill>
-            <a:srgbClr val="F8FAFC"/>
+            <a:srgbClr val="FFFFFF"/>
           </a:solidFill>
           <a:ln w="12700">
             <a:solidFill>
@@ -6727,23 +7883,25 @@
       </p:sp>
       <p:sp>
         <p:nvSpPr>
-          <p:cNvPr id="9" name="Oval 8"/>
+          <p:cNvPr id="12" name="Rectangle 11"/>
           <p:cNvSpPr/>
           <p:nvPr/>
         </p:nvSpPr>
         <p:spPr>
           <a:xfrm>
-            <a:off x="6400800" y="2057400"/>
-            <a:ext cx="365760" cy="365760"/>
-          </a:xfrm>
-          <a:prstGeom prst="ellipse">
+            <a:off x="822960" y="2560319"/>
+            <a:ext cx="2011680" cy="566928"/>
+          </a:xfrm>
+          <a:prstGeom prst="rect">
             <a:avLst/>
           </a:prstGeom>
           <a:solidFill>
-            <a:srgbClr val="059669"/>
+            <a:srgbClr val="EDF2F7"/>
           </a:solidFill>
           <a:ln>
-            <a:noFill/>
+            <a:solidFill>
+              <a:srgbClr val="CBD5E1"/>
+            </a:solidFill>
           </a:ln>
         </p:spPr>
         <p:style>
@@ -6764,20 +7922,30 @@
           <a:bodyPr rtlCol="0" anchor="ctr"/>
           <a:lstStyle/>
           <a:p>
-            <a:pPr algn="ctr"/>
-          </a:p>
-        </p:txBody>
-      </p:sp>
-      <p:sp>
-        <p:nvSpPr>
-          <p:cNvPr id="10" name="TextBox 9"/>
+            <a:pPr algn="ctr">
+              <a:defRPr sz="1200" b="1">
+                <a:solidFill>
+                  <a:srgbClr val="1A365D"/>
+                </a:solidFill>
+                <a:latin typeface="Arial"/>
+              </a:defRPr>
+            </a:pPr>
+            <a:r>
+              <a:t>leave_types</a:t>
+            </a:r>
+          </a:p>
+        </p:txBody>
+      </p:sp>
+      <p:sp>
+        <p:nvSpPr>
+          <p:cNvPr id="13" name="TextBox 12"/>
           <p:cNvSpPr txBox="1"/>
           <p:nvPr/>
         </p:nvSpPr>
         <p:spPr>
           <a:xfrm>
-            <a:off x="6949440" y="1965960"/>
-            <a:ext cx="4114800" cy="1554480"/>
+            <a:off x="3017520" y="2523743"/>
+            <a:ext cx="8229600" cy="685800"/>
           </a:xfrm>
           <a:prstGeom prst="rect">
             <a:avLst/>
@@ -6791,49 +7959,67 @@
           <a:lstStyle/>
           <a:p>
             <a:pPr>
-              <a:defRPr sz="1500" b="1">
-                <a:solidFill>
-                  <a:srgbClr val="0F172A"/>
-                </a:solidFill>
-              </a:defRPr>
-            </a:pPr>
-            <a:r>
-              <a:t>Single-Day Half-Day Support</a:t>
+              <a:defRPr sz="1150" b="1">
+                <a:solidFill>
+                  <a:srgbClr val="2B6CB0"/>
+                </a:solidFill>
+                <a:latin typeface="Arial"/>
+              </a:defRPr>
+            </a:pPr>
+            <a:r>
+              <a:t>Purpose: Defines leave categories</a:t>
             </a:r>
           </a:p>
           <a:p>
             <a:pPr>
               <a:spcBef>
-                <a:spcPts val="600"/>
+                <a:spcPts val="200"/>
               </a:spcBef>
-              <a:defRPr sz="1150">
-                <a:solidFill>
-                  <a:srgbClr val="64748B"/>
-                </a:solidFill>
-              </a:defRPr>
-            </a:pPr>
-            <a:r>
-              <a:t>Toggling 'Half-Day' automatically synchronizes end date to start date, recording exactly 0.5 days without manual overrides.</a:t>
-            </a:r>
-          </a:p>
-        </p:txBody>
-      </p:sp>
-      <p:sp>
-        <p:nvSpPr>
-          <p:cNvPr id="11" name="Rounded Rectangle 10"/>
+              <a:defRPr sz="1050">
+                <a:solidFill>
+                  <a:srgbClr val="2D3748"/>
+                </a:solidFill>
+                <a:latin typeface="Arial"/>
+              </a:defRPr>
+            </a:pPr>
+            <a:r>
+              <a:t>Fields: id (INTEGER PK), name (Annual, Sick, Casual, etc.)</a:t>
+            </a:r>
+          </a:p>
+          <a:p>
+            <a:pPr>
+              <a:spcBef>
+                <a:spcPts val="200"/>
+              </a:spcBef>
+              <a:defRPr sz="1050">
+                <a:solidFill>
+                  <a:srgbClr val="2D3748"/>
+                </a:solidFill>
+                <a:latin typeface="Arial"/>
+              </a:defRPr>
+            </a:pPr>
+            <a:r>
+              <a:t>Fields: code (AL, SL, CL, ML, PL, UL), default_days, color_code</a:t>
+            </a:r>
+          </a:p>
+        </p:txBody>
+      </p:sp>
+      <p:sp>
+        <p:nvSpPr>
+          <p:cNvPr id="14" name="Rectangle 13"/>
           <p:cNvSpPr/>
           <p:nvPr/>
         </p:nvSpPr>
         <p:spPr>
           <a:xfrm>
-            <a:off x="731520" y="4023360"/>
-            <a:ext cx="5212080" cy="2011680"/>
-          </a:xfrm>
-          <a:prstGeom prst="roundRect">
+            <a:off x="731520" y="3346704"/>
+            <a:ext cx="10728655" cy="804672"/>
+          </a:xfrm>
+          <a:prstGeom prst="rect">
             <a:avLst/>
           </a:prstGeom>
           <a:solidFill>
-            <a:srgbClr val="F8FAFC"/>
+            <a:srgbClr val="FFFFFF"/>
           </a:solidFill>
           <a:ln w="12700">
             <a:solidFill>
@@ -6865,23 +8051,25 @@
       </p:sp>
       <p:sp>
         <p:nvSpPr>
-          <p:cNvPr id="12" name="Oval 11"/>
+          <p:cNvPr id="15" name="Rectangle 14"/>
           <p:cNvSpPr/>
           <p:nvPr/>
         </p:nvSpPr>
         <p:spPr>
           <a:xfrm>
-            <a:off x="1005840" y="4343400"/>
-            <a:ext cx="365760" cy="365760"/>
-          </a:xfrm>
-          <a:prstGeom prst="ellipse">
+            <a:off x="822960" y="3456432"/>
+            <a:ext cx="2011680" cy="566928"/>
+          </a:xfrm>
+          <a:prstGeom prst="rect">
             <a:avLst/>
           </a:prstGeom>
           <a:solidFill>
-            <a:srgbClr val="7C3AED"/>
+            <a:srgbClr val="EDF2F7"/>
           </a:solidFill>
           <a:ln>
-            <a:noFill/>
+            <a:solidFill>
+              <a:srgbClr val="CBD5E1"/>
+            </a:solidFill>
           </a:ln>
         </p:spPr>
         <p:style>
@@ -6902,20 +8090,30 @@
           <a:bodyPr rtlCol="0" anchor="ctr"/>
           <a:lstStyle/>
           <a:p>
-            <a:pPr algn="ctr"/>
-          </a:p>
-        </p:txBody>
-      </p:sp>
-      <p:sp>
-        <p:nvSpPr>
-          <p:cNvPr id="13" name="TextBox 12"/>
+            <a:pPr algn="ctr">
+              <a:defRPr sz="1200" b="1">
+                <a:solidFill>
+                  <a:srgbClr val="1A365D"/>
+                </a:solidFill>
+                <a:latin typeface="Arial"/>
+              </a:defRPr>
+            </a:pPr>
+            <a:r>
+              <a:t>leave_balances</a:t>
+            </a:r>
+          </a:p>
+        </p:txBody>
+      </p:sp>
+      <p:sp>
+        <p:nvSpPr>
+          <p:cNvPr id="16" name="TextBox 15"/>
           <p:cNvSpPr txBox="1"/>
           <p:nvPr/>
         </p:nvSpPr>
         <p:spPr>
           <a:xfrm>
-            <a:off x="1554480" y="4251960"/>
-            <a:ext cx="4114800" cy="1554480"/>
+            <a:off x="3017520" y="3419856"/>
+            <a:ext cx="8229600" cy="685800"/>
           </a:xfrm>
           <a:prstGeom prst="rect">
             <a:avLst/>
@@ -6929,49 +8127,67 @@
           <a:lstStyle/>
           <a:p>
             <a:pPr>
-              <a:defRPr sz="1500" b="1">
-                <a:solidFill>
-                  <a:srgbClr val="0F172A"/>
-                </a:solidFill>
-              </a:defRPr>
-            </a:pPr>
-            <a:r>
-              <a:t>Real-Time Quota Snapshot</a:t>
+              <a:defRPr sz="1150" b="1">
+                <a:solidFill>
+                  <a:srgbClr val="2B6CB0"/>
+                </a:solidFill>
+                <a:latin typeface="Arial"/>
+              </a:defRPr>
+            </a:pPr>
+            <a:r>
+              <a:t>Purpose: Tracks annual allowances per employee</a:t>
             </a:r>
           </a:p>
           <a:p>
             <a:pPr>
               <a:spcBef>
-                <a:spcPts val="600"/>
+                <a:spcPts val="200"/>
               </a:spcBef>
-              <a:defRPr sz="1150">
-                <a:solidFill>
-                  <a:srgbClr val="64748B"/>
-                </a:solidFill>
-              </a:defRPr>
-            </a:pPr>
-            <a:r>
-              <a:t>Color-coded progress gauges display total allocated, used, under review, and remaining balance for each leave category.</a:t>
-            </a:r>
-          </a:p>
-        </p:txBody>
-      </p:sp>
-      <p:sp>
-        <p:nvSpPr>
-          <p:cNvPr id="14" name="Rounded Rectangle 13"/>
+              <a:defRPr sz="1050">
+                <a:solidFill>
+                  <a:srgbClr val="2D3748"/>
+                </a:solidFill>
+                <a:latin typeface="Arial"/>
+              </a:defRPr>
+            </a:pPr>
+            <a:r>
+              <a:t>Fields: id (INTEGER PK), user_id (FK -&gt; users), leave_type_id (FK -&gt; leave_types)</a:t>
+            </a:r>
+          </a:p>
+          <a:p>
+            <a:pPr>
+              <a:spcBef>
+                <a:spcPts val="200"/>
+              </a:spcBef>
+              <a:defRPr sz="1050">
+                <a:solidFill>
+                  <a:srgbClr val="2D3748"/>
+                </a:solidFill>
+                <a:latin typeface="Arial"/>
+              </a:defRPr>
+            </a:pPr>
+            <a:r>
+              <a:t>Fields: year (INTEGER), total_allocated, used_days, pending_days</a:t>
+            </a:r>
+          </a:p>
+        </p:txBody>
+      </p:sp>
+      <p:sp>
+        <p:nvSpPr>
+          <p:cNvPr id="17" name="Rectangle 16"/>
           <p:cNvSpPr/>
           <p:nvPr/>
         </p:nvSpPr>
         <p:spPr>
           <a:xfrm>
-            <a:off x="6126480" y="4023360"/>
-            <a:ext cx="5212080" cy="2011680"/>
-          </a:xfrm>
-          <a:prstGeom prst="roundRect">
+            <a:off x="731520" y="4242816"/>
+            <a:ext cx="10728655" cy="804672"/>
+          </a:xfrm>
+          <a:prstGeom prst="rect">
             <a:avLst/>
           </a:prstGeom>
           <a:solidFill>
-            <a:srgbClr val="F8FAFC"/>
+            <a:srgbClr val="FFFFFF"/>
           </a:solidFill>
           <a:ln w="12700">
             <a:solidFill>
@@ -7003,23 +8219,25 @@
       </p:sp>
       <p:sp>
         <p:nvSpPr>
-          <p:cNvPr id="15" name="Oval 14"/>
+          <p:cNvPr id="18" name="Rectangle 17"/>
           <p:cNvSpPr/>
           <p:nvPr/>
         </p:nvSpPr>
         <p:spPr>
           <a:xfrm>
-            <a:off x="6400800" y="4343400"/>
-            <a:ext cx="365760" cy="365760"/>
-          </a:xfrm>
-          <a:prstGeom prst="ellipse">
+            <a:off x="822960" y="4352544"/>
+            <a:ext cx="2011680" cy="566928"/>
+          </a:xfrm>
+          <a:prstGeom prst="rect">
             <a:avLst/>
           </a:prstGeom>
           <a:solidFill>
-            <a:srgbClr val="D97706"/>
+            <a:srgbClr val="EDF2F7"/>
           </a:solidFill>
           <a:ln>
-            <a:noFill/>
+            <a:solidFill>
+              <a:srgbClr val="CBD5E1"/>
+            </a:solidFill>
           </a:ln>
         </p:spPr>
         <p:style>
@@ -7040,20 +8258,30 @@
           <a:bodyPr rtlCol="0" anchor="ctr"/>
           <a:lstStyle/>
           <a:p>
-            <a:pPr algn="ctr"/>
-          </a:p>
-        </p:txBody>
-      </p:sp>
-      <p:sp>
-        <p:nvSpPr>
-          <p:cNvPr id="16" name="TextBox 15"/>
+            <a:pPr algn="ctr">
+              <a:defRPr sz="1200" b="1">
+                <a:solidFill>
+                  <a:srgbClr val="1A365D"/>
+                </a:solidFill>
+                <a:latin typeface="Arial"/>
+              </a:defRPr>
+            </a:pPr>
+            <a:r>
+              <a:t>leave_applications</a:t>
+            </a:r>
+          </a:p>
+        </p:txBody>
+      </p:sp>
+      <p:sp>
+        <p:nvSpPr>
+          <p:cNvPr id="19" name="TextBox 18"/>
           <p:cNvSpPr txBox="1"/>
           <p:nvPr/>
         </p:nvSpPr>
         <p:spPr>
           <a:xfrm>
-            <a:off x="6949440" y="4251960"/>
-            <a:ext cx="4114800" cy="1554480"/>
+            <a:off x="3017520" y="4315968"/>
+            <a:ext cx="8229600" cy="685800"/>
           </a:xfrm>
           <a:prstGeom prst="rect">
             <a:avLst/>
@@ -7067,29 +8295,215 @@
           <a:lstStyle/>
           <a:p>
             <a:pPr>
-              <a:defRPr sz="1500" b="1">
-                <a:solidFill>
-                  <a:srgbClr val="0F172A"/>
-                </a:solidFill>
-              </a:defRPr>
-            </a:pPr>
-            <a:r>
-              <a:t>Instant Self-Service Cancellation</a:t>
+              <a:defRPr sz="1150" b="1">
+                <a:solidFill>
+                  <a:srgbClr val="2B6CB0"/>
+                </a:solidFill>
+                <a:latin typeface="Arial"/>
+              </a:defRPr>
+            </a:pPr>
+            <a:r>
+              <a:t>Purpose: Stores submitted leave requests</a:t>
             </a:r>
           </a:p>
           <a:p>
             <a:pPr>
               <a:spcBef>
-                <a:spcPts val="600"/>
+                <a:spcPts val="200"/>
               </a:spcBef>
-              <a:defRPr sz="1150">
-                <a:solidFill>
-                  <a:srgbClr val="64748B"/>
-                </a:solidFill>
-              </a:defRPr>
-            </a:pPr>
-            <a:r>
-              <a:t>Employees can cancel pending leave requests with one click, automatically releasing the pending hold back to available balance.</a:t>
+              <a:defRPr sz="1050">
+                <a:solidFill>
+                  <a:srgbClr val="2D3748"/>
+                </a:solidFill>
+                <a:latin typeface="Arial"/>
+              </a:defRPr>
+            </a:pPr>
+            <a:r>
+              <a:t>Fields: id (INTEGER PK), user_id (FK), leave_type_id (FK), start_date, end_date</a:t>
+            </a:r>
+          </a:p>
+          <a:p>
+            <a:pPr>
+              <a:spcBef>
+                <a:spcPts val="200"/>
+              </a:spcBef>
+              <a:defRPr sz="1050">
+                <a:solidFill>
+                  <a:srgbClr val="2D3748"/>
+                </a:solidFill>
+                <a:latin typeface="Arial"/>
+              </a:defRPr>
+            </a:pPr>
+            <a:r>
+              <a:t>Fields: total_days, is_half_day, reason, status ('pending', 'approved', 'rejected', 'cancelled')</a:t>
+            </a:r>
+          </a:p>
+          <a:p>
+            <a:pPr>
+              <a:spcBef>
+                <a:spcPts val="200"/>
+              </a:spcBef>
+              <a:defRPr sz="1050">
+                <a:solidFill>
+                  <a:srgbClr val="2D3748"/>
+                </a:solidFill>
+                <a:latin typeface="Arial"/>
+              </a:defRPr>
+            </a:pPr>
+            <a:r>
+              <a:t>Fields: reviewed_by (FK), reviewed_at, manager_remarks</a:t>
+            </a:r>
+          </a:p>
+        </p:txBody>
+      </p:sp>
+      <p:sp>
+        <p:nvSpPr>
+          <p:cNvPr id="20" name="Rectangle 19"/>
+          <p:cNvSpPr/>
+          <p:nvPr/>
+        </p:nvSpPr>
+        <p:spPr>
+          <a:xfrm>
+            <a:off x="731520" y="5138928"/>
+            <a:ext cx="10728655" cy="804672"/>
+          </a:xfrm>
+          <a:prstGeom prst="rect">
+            <a:avLst/>
+          </a:prstGeom>
+          <a:solidFill>
+            <a:srgbClr val="FFFFFF"/>
+          </a:solidFill>
+          <a:ln w="12700">
+            <a:solidFill>
+              <a:srgbClr val="E2E8F0"/>
+            </a:solidFill>
+          </a:ln>
+        </p:spPr>
+        <p:style>
+          <a:lnRef idx="1">
+            <a:schemeClr val="accent1"/>
+          </a:lnRef>
+          <a:fillRef idx="3">
+            <a:schemeClr val="accent1"/>
+          </a:fillRef>
+          <a:effectRef idx="2">
+            <a:schemeClr val="accent1"/>
+          </a:effectRef>
+          <a:fontRef idx="minor">
+            <a:schemeClr val="lt1"/>
+          </a:fontRef>
+        </p:style>
+        <p:txBody>
+          <a:bodyPr rtlCol="0" anchor="ctr"/>
+          <a:lstStyle/>
+          <a:p>
+            <a:pPr algn="ctr"/>
+          </a:p>
+        </p:txBody>
+      </p:sp>
+      <p:sp>
+        <p:nvSpPr>
+          <p:cNvPr id="21" name="Rectangle 20"/>
+          <p:cNvSpPr/>
+          <p:nvPr/>
+        </p:nvSpPr>
+        <p:spPr>
+          <a:xfrm>
+            <a:off x="822960" y="5248656"/>
+            <a:ext cx="2011680" cy="566928"/>
+          </a:xfrm>
+          <a:prstGeom prst="rect">
+            <a:avLst/>
+          </a:prstGeom>
+          <a:solidFill>
+            <a:srgbClr val="EDF2F7"/>
+          </a:solidFill>
+          <a:ln>
+            <a:solidFill>
+              <a:srgbClr val="CBD5E1"/>
+            </a:solidFill>
+          </a:ln>
+        </p:spPr>
+        <p:style>
+          <a:lnRef idx="1">
+            <a:schemeClr val="accent1"/>
+          </a:lnRef>
+          <a:fillRef idx="3">
+            <a:schemeClr val="accent1"/>
+          </a:fillRef>
+          <a:effectRef idx="2">
+            <a:schemeClr val="accent1"/>
+          </a:effectRef>
+          <a:fontRef idx="minor">
+            <a:schemeClr val="lt1"/>
+          </a:fontRef>
+        </p:style>
+        <p:txBody>
+          <a:bodyPr rtlCol="0" anchor="ctr"/>
+          <a:lstStyle/>
+          <a:p>
+            <a:pPr algn="ctr">
+              <a:defRPr sz="1200" b="1">
+                <a:solidFill>
+                  <a:srgbClr val="1A365D"/>
+                </a:solidFill>
+                <a:latin typeface="Arial"/>
+              </a:defRPr>
+            </a:pPr>
+            <a:r>
+              <a:t>holidays</a:t>
+            </a:r>
+          </a:p>
+        </p:txBody>
+      </p:sp>
+      <p:sp>
+        <p:nvSpPr>
+          <p:cNvPr id="22" name="TextBox 21"/>
+          <p:cNvSpPr txBox="1"/>
+          <p:nvPr/>
+        </p:nvSpPr>
+        <p:spPr>
+          <a:xfrm>
+            <a:off x="3017520" y="5212080"/>
+            <a:ext cx="8229600" cy="685800"/>
+          </a:xfrm>
+          <a:prstGeom prst="rect">
+            <a:avLst/>
+          </a:prstGeom>
+          <a:noFill/>
+        </p:spPr>
+        <p:txBody>
+          <a:bodyPr wrap="square">
+            <a:spAutoFit/>
+          </a:bodyPr>
+          <a:lstStyle/>
+          <a:p>
+            <a:pPr>
+              <a:defRPr sz="1150" b="1">
+                <a:solidFill>
+                  <a:srgbClr val="2B6CB0"/>
+                </a:solidFill>
+                <a:latin typeface="Arial"/>
+              </a:defRPr>
+            </a:pPr>
+            <a:r>
+              <a:t>Purpose: Official company calendar</a:t>
+            </a:r>
+          </a:p>
+          <a:p>
+            <a:pPr>
+              <a:spcBef>
+                <a:spcPts val="200"/>
+              </a:spcBef>
+              <a:defRPr sz="1050">
+                <a:solidFill>
+                  <a:srgbClr val="2D3748"/>
+                </a:solidFill>
+                <a:latin typeface="Arial"/>
+              </a:defRPr>
+            </a:pPr>
+            <a:r>
+              <a:t>Fields: id (INTEGER PK), name, holiday_date (YYYY-MM-DD), description</a:t>
             </a:r>
           </a:p>
         </p:txBody>
@@ -7114,25 +8528,95 @@
       <p:grpSpPr/>
       <p:sp>
         <p:nvSpPr>
-          <p:cNvPr id="2" name="Rounded Rectangle 1"/>
+          <p:cNvPr id="2" name="TextBox 1"/>
+          <p:cNvSpPr txBox="1"/>
+          <p:nvPr/>
+        </p:nvSpPr>
+        <p:spPr>
+          <a:xfrm>
+            <a:off x="731520" y="411480"/>
+            <a:ext cx="10698480" cy="274320"/>
+          </a:xfrm>
+          <a:prstGeom prst="rect">
+            <a:avLst/>
+          </a:prstGeom>
+          <a:noFill/>
+        </p:spPr>
+        <p:txBody>
+          <a:bodyPr wrap="none" lIns="0" tIns="0" rIns="0" bIns="0">
+            <a:spAutoFit/>
+          </a:bodyPr>
+          <a:lstStyle/>
+          <a:p>
+            <a:pPr>
+              <a:defRPr sz="1000" b="1">
+                <a:solidFill>
+                  <a:srgbClr val="2B6CB0"/>
+                </a:solidFill>
+                <a:latin typeface="Arial"/>
+              </a:defRPr>
+            </a:pPr>
+            <a:r>
+              <a:t>SYSTEM FEATURES</a:t>
+            </a:r>
+          </a:p>
+        </p:txBody>
+      </p:sp>
+      <p:sp>
+        <p:nvSpPr>
+          <p:cNvPr id="3" name="TextBox 2"/>
+          <p:cNvSpPr txBox="1"/>
+          <p:nvPr/>
+        </p:nvSpPr>
+        <p:spPr>
+          <a:xfrm>
+            <a:off x="731520" y="685800"/>
+            <a:ext cx="10698480" cy="548640"/>
+          </a:xfrm>
+          <a:prstGeom prst="rect">
+            <a:avLst/>
+          </a:prstGeom>
+          <a:noFill/>
+        </p:spPr>
+        <p:txBody>
+          <a:bodyPr wrap="none" lIns="0" tIns="0" rIns="0" bIns="0">
+            <a:spAutoFit/>
+          </a:bodyPr>
+          <a:lstStyle/>
+          <a:p>
+            <a:pPr>
+              <a:defRPr sz="2200" b="1">
+                <a:solidFill>
+                  <a:srgbClr val="1A365D"/>
+                </a:solidFill>
+                <a:latin typeface="Arial"/>
+              </a:defRPr>
+            </a:pPr>
+            <a:r>
+              <a:t>Core Modules &amp; System Functionalities</a:t>
+            </a:r>
+          </a:p>
+        </p:txBody>
+      </p:sp>
+      <p:sp>
+        <p:nvSpPr>
+          <p:cNvPr id="4" name="Rectangle 3"/>
           <p:cNvSpPr/>
           <p:nvPr/>
         </p:nvSpPr>
         <p:spPr>
           <a:xfrm>
-            <a:off x="731520" y="365760"/>
-            <a:ext cx="2560320" cy="320040"/>
-          </a:xfrm>
-          <a:prstGeom prst="roundRect">
+            <a:off x="731520" y="1325880"/>
+            <a:ext cx="10728655" cy="18288"/>
+          </a:xfrm>
+          <a:prstGeom prst="rect">
             <a:avLst/>
           </a:prstGeom>
           <a:solidFill>
-            <a:srgbClr val="EEF2FF"/>
+            <a:srgbClr val="2B6CB0"/>
           </a:solidFill>
-          <a:ln w="12700">
-            <a:solidFill>
-              <a:srgbClr val="C7D2FE"/>
-            </a:solidFill>
+          <a:ln>
+            <a:noFill/>
           </a:ln>
         </p:spPr>
         <p:style>
@@ -7150,67 +8634,23 @@
           </a:fontRef>
         </p:style>
         <p:txBody>
-          <a:bodyPr rtlCol="0" anchor="ctr" wrap="square" lIns="0" tIns="0" rIns="0" bIns="0"/>
-          <a:lstStyle/>
-          <a:p>
-            <a:pPr algn="ctr">
-              <a:defRPr sz="1000" b="1">
-                <a:solidFill>
-                  <a:srgbClr val="4F46E5"/>
-                </a:solidFill>
-              </a:defRPr>
-            </a:pPr>
-            <a:r>
-              <a:t>●  MANAGEMENT CONTROL</a:t>
-            </a:r>
-          </a:p>
-        </p:txBody>
-      </p:sp>
-      <p:sp>
-        <p:nvSpPr>
-          <p:cNvPr id="3" name="TextBox 2"/>
-          <p:cNvSpPr txBox="1"/>
-          <p:nvPr/>
-        </p:nvSpPr>
-        <p:spPr>
-          <a:xfrm>
-            <a:off x="731520" y="777240"/>
-            <a:ext cx="10698480" cy="640080"/>
-          </a:xfrm>
-          <a:prstGeom prst="rect">
-            <a:avLst/>
-          </a:prstGeom>
-          <a:noFill/>
-        </p:spPr>
-        <p:txBody>
-          <a:bodyPr wrap="square" lIns="0" tIns="0" rIns="0" bIns="0">
-            <a:spAutoFit/>
-          </a:bodyPr>
-          <a:lstStyle/>
-          <a:p>
-            <a:pPr>
-              <a:defRPr sz="2600" b="1">
-                <a:solidFill>
-                  <a:srgbClr val="0F172A"/>
-                </a:solidFill>
-              </a:defRPr>
-            </a:pPr>
-            <a:r>
-              <a:t>HR Administration &amp; Analytics Portal</a:t>
-            </a:r>
-          </a:p>
-        </p:txBody>
-      </p:sp>
-      <p:sp>
-        <p:nvSpPr>
-          <p:cNvPr id="4" name="Rectangle 3"/>
+          <a:bodyPr rtlCol="0" anchor="ctr"/>
+          <a:lstStyle/>
+          <a:p>
+            <a:pPr algn="ctr"/>
+          </a:p>
+        </p:txBody>
+      </p:sp>
+      <p:sp>
+        <p:nvSpPr>
+          <p:cNvPr id="5" name="Rectangle 4"/>
           <p:cNvSpPr/>
           <p:nvPr/>
         </p:nvSpPr>
         <p:spPr>
           <a:xfrm>
-            <a:off x="731520" y="1463040"/>
-            <a:ext cx="10728655" cy="18288"/>
+            <a:off x="731520" y="6217920"/>
+            <a:ext cx="10728655" cy="13716"/>
           </a:xfrm>
           <a:prstGeom prst="rect">
             <a:avLst/>
@@ -7246,20 +8686,92 @@
       </p:sp>
       <p:sp>
         <p:nvSpPr>
-          <p:cNvPr id="5" name="Rounded Rectangle 4"/>
+          <p:cNvPr id="6" name="TextBox 5"/>
+          <p:cNvSpPr txBox="1"/>
+          <p:nvPr/>
+        </p:nvSpPr>
+        <p:spPr>
+          <a:xfrm>
+            <a:off x="731520" y="6263640"/>
+            <a:ext cx="7315200" cy="365760"/>
+          </a:xfrm>
+          <a:prstGeom prst="rect">
+            <a:avLst/>
+          </a:prstGeom>
+          <a:noFill/>
+        </p:spPr>
+        <p:txBody>
+          <a:bodyPr wrap="none" lIns="0" tIns="0" rIns="0" bIns="0">
+            <a:spAutoFit/>
+          </a:bodyPr>
+          <a:lstStyle/>
+          <a:p>
+            <a:pPr>
+              <a:defRPr sz="950">
+                <a:solidFill>
+                  <a:srgbClr val="718096"/>
+                </a:solidFill>
+                <a:latin typeface="Arial"/>
+              </a:defRPr>
+            </a:pPr>
+            <a:r>
+              <a:t>Employee Leave Management System | Project Presentation</a:t>
+            </a:r>
+          </a:p>
+        </p:txBody>
+      </p:sp>
+      <p:sp>
+        <p:nvSpPr>
+          <p:cNvPr id="7" name="TextBox 6"/>
+          <p:cNvSpPr txBox="1"/>
+          <p:nvPr/>
+        </p:nvSpPr>
+        <p:spPr>
+          <a:xfrm>
+            <a:off x="9601200" y="6263640"/>
+            <a:ext cx="1828800" cy="365760"/>
+          </a:xfrm>
+          <a:prstGeom prst="rect">
+            <a:avLst/>
+          </a:prstGeom>
+          <a:noFill/>
+        </p:spPr>
+        <p:txBody>
+          <a:bodyPr wrap="none" lIns="0" tIns="0" rIns="0" bIns="0">
+            <a:spAutoFit/>
+          </a:bodyPr>
+          <a:lstStyle/>
+          <a:p>
+            <a:pPr algn="r">
+              <a:defRPr sz="950">
+                <a:solidFill>
+                  <a:srgbClr val="718096"/>
+                </a:solidFill>
+                <a:latin typeface="Arial"/>
+              </a:defRPr>
+            </a:pPr>
+            <a:r>
+              <a:t>Slide 7 of 10</a:t>
+            </a:r>
+          </a:p>
+        </p:txBody>
+      </p:sp>
+      <p:sp>
+        <p:nvSpPr>
+          <p:cNvPr id="8" name="Rectangle 7"/>
           <p:cNvSpPr/>
           <p:nvPr/>
         </p:nvSpPr>
         <p:spPr>
           <a:xfrm>
-            <a:off x="731520" y="1737360"/>
-            <a:ext cx="5212080" cy="2011680"/>
-          </a:xfrm>
-          <a:prstGeom prst="roundRect">
+            <a:off x="731520" y="1554480"/>
+            <a:ext cx="5120640" cy="4389120"/>
+          </a:xfrm>
+          <a:prstGeom prst="rect">
             <a:avLst/>
           </a:prstGeom>
           <a:solidFill>
-            <a:srgbClr val="F8FAFC"/>
+            <a:srgbClr val="FFFFFF"/>
           </a:solidFill>
           <a:ln w="12700">
             <a:solidFill>
@@ -7291,57 +8803,14 @@
       </p:sp>
       <p:sp>
         <p:nvSpPr>
-          <p:cNvPr id="6" name="Oval 5"/>
-          <p:cNvSpPr/>
-          <p:nvPr/>
-        </p:nvSpPr>
-        <p:spPr>
-          <a:xfrm>
-            <a:off x="1005840" y="2057400"/>
-            <a:ext cx="365760" cy="365760"/>
-          </a:xfrm>
-          <a:prstGeom prst="ellipse">
-            <a:avLst/>
-          </a:prstGeom>
-          <a:solidFill>
-            <a:srgbClr val="4F46E5"/>
-          </a:solidFill>
-          <a:ln>
-            <a:noFill/>
-          </a:ln>
-        </p:spPr>
-        <p:style>
-          <a:lnRef idx="1">
-            <a:schemeClr val="accent1"/>
-          </a:lnRef>
-          <a:fillRef idx="3">
-            <a:schemeClr val="accent1"/>
-          </a:fillRef>
-          <a:effectRef idx="2">
-            <a:schemeClr val="accent1"/>
-          </a:effectRef>
-          <a:fontRef idx="minor">
-            <a:schemeClr val="lt1"/>
-          </a:fontRef>
-        </p:style>
-        <p:txBody>
-          <a:bodyPr rtlCol="0" anchor="ctr"/>
-          <a:lstStyle/>
-          <a:p>
-            <a:pPr algn="ctr"/>
-          </a:p>
-        </p:txBody>
-      </p:sp>
-      <p:sp>
-        <p:nvSpPr>
-          <p:cNvPr id="7" name="TextBox 6"/>
+          <p:cNvPr id="9" name="TextBox 8"/>
           <p:cNvSpPr txBox="1"/>
           <p:nvPr/>
         </p:nvSpPr>
         <p:spPr>
           <a:xfrm>
-            <a:off x="1554480" y="1965960"/>
-            <a:ext cx="4114800" cy="1554480"/>
+            <a:off x="914400" y="1691640"/>
+            <a:ext cx="4754880" cy="4114800"/>
           </a:xfrm>
           <a:prstGeom prst="rect">
             <a:avLst/>
@@ -7357,12 +8826,13 @@
             <a:pPr>
               <a:defRPr sz="1500" b="1">
                 <a:solidFill>
-                  <a:srgbClr val="0F172A"/>
-                </a:solidFill>
-              </a:defRPr>
-            </a:pPr>
-            <a:r>
-              <a:t>Approvals Queue Workflow</a:t>
+                  <a:srgbClr val="1A365D"/>
+                </a:solidFill>
+                <a:latin typeface="Arial"/>
+              </a:defRPr>
+            </a:pPr>
+            <a:r>
+              <a:t>1. Employee Self-Service Module</a:t>
             </a:r>
           </a:p>
           <a:p>
@@ -7370,34 +8840,115 @@
               <a:spcBef>
                 <a:spcPts val="600"/>
               </a:spcBef>
-              <a:defRPr sz="1150">
-                <a:solidFill>
-                  <a:srgbClr val="64748B"/>
-                </a:solidFill>
-              </a:defRPr>
-            </a:pPr>
-            <a:r>
-              <a:t>Centralized queue displaying pending applications with employee details, date spans, and remaining quotas. Fast-track modal sign-off with custom manager feedback remarks.</a:t>
-            </a:r>
-          </a:p>
-        </p:txBody>
-      </p:sp>
-      <p:sp>
-        <p:nvSpPr>
-          <p:cNvPr id="8" name="Rounded Rectangle 7"/>
+              <a:defRPr sz="1100">
+                <a:solidFill>
+                  <a:srgbClr val="2D3748"/>
+                </a:solidFill>
+                <a:latin typeface="Arial"/>
+              </a:defRPr>
+            </a:pPr>
+            <a:r>
+              <a:t>•  Personal Dashboard: Overview of annual quota, total used days, pending review days, and available balance.</a:t>
+            </a:r>
+          </a:p>
+          <a:p>
+            <a:pPr>
+              <a:spcBef>
+                <a:spcPts val="600"/>
+              </a:spcBef>
+              <a:defRPr sz="1100">
+                <a:solidFill>
+                  <a:srgbClr val="2D3748"/>
+                </a:solidFill>
+                <a:latin typeface="Arial"/>
+              </a:defRPr>
+            </a:pPr>
+            <a:r>
+              <a:t>•  Leave Application Form: Interactive form with dropdown categories, date pickers, and reason text area.</a:t>
+            </a:r>
+          </a:p>
+          <a:p>
+            <a:pPr>
+              <a:spcBef>
+                <a:spcPts val="600"/>
+              </a:spcBef>
+              <a:defRPr sz="1100">
+                <a:solidFill>
+                  <a:srgbClr val="2D3748"/>
+                </a:solidFill>
+                <a:latin typeface="Arial"/>
+              </a:defRPr>
+            </a:pPr>
+            <a:r>
+              <a:t>•  Dynamic Day Calculator: Calculates working days instantly via AJAX before submission.</a:t>
+            </a:r>
+          </a:p>
+          <a:p>
+            <a:pPr>
+              <a:spcBef>
+                <a:spcPts val="600"/>
+              </a:spcBef>
+              <a:defRPr sz="1100">
+                <a:solidFill>
+                  <a:srgbClr val="2D3748"/>
+                </a:solidFill>
+                <a:latin typeface="Arial"/>
+              </a:defRPr>
+            </a:pPr>
+            <a:r>
+              <a:t>•  Half-Day Option: Checkbox sets duration to 0.5 days on start date with single date constraint.</a:t>
+            </a:r>
+          </a:p>
+          <a:p>
+            <a:pPr>
+              <a:spcBef>
+                <a:spcPts val="600"/>
+              </a:spcBef>
+              <a:defRPr sz="1100">
+                <a:solidFill>
+                  <a:srgbClr val="2D3748"/>
+                </a:solidFill>
+                <a:latin typeface="Arial"/>
+              </a:defRPr>
+            </a:pPr>
+            <a:r>
+              <a:t>•  Application History: Tabular display of all submitted requests with status badges and manager remarks.</a:t>
+            </a:r>
+          </a:p>
+          <a:p>
+            <a:pPr>
+              <a:spcBef>
+                <a:spcPts val="600"/>
+              </a:spcBef>
+              <a:defRPr sz="1100">
+                <a:solidFill>
+                  <a:srgbClr val="2D3748"/>
+                </a:solidFill>
+                <a:latin typeface="Arial"/>
+              </a:defRPr>
+            </a:pPr>
+            <a:r>
+              <a:t>•  Self-Service Cancellation: Allows withdrawing pending requests, immediately releasing the quota hold.</a:t>
+            </a:r>
+          </a:p>
+        </p:txBody>
+      </p:sp>
+      <p:sp>
+        <p:nvSpPr>
+          <p:cNvPr id="10" name="Rectangle 9"/>
           <p:cNvSpPr/>
           <p:nvPr/>
         </p:nvSpPr>
         <p:spPr>
           <a:xfrm>
-            <a:off x="6126480" y="1737360"/>
-            <a:ext cx="5212080" cy="2011680"/>
-          </a:xfrm>
-          <a:prstGeom prst="roundRect">
+            <a:off x="6217920" y="1554480"/>
+            <a:ext cx="5212080" cy="4389120"/>
+          </a:xfrm>
+          <a:prstGeom prst="rect">
             <a:avLst/>
           </a:prstGeom>
           <a:solidFill>
-            <a:srgbClr val="F8FAFC"/>
+            <a:srgbClr val="FFFFFF"/>
           </a:solidFill>
           <a:ln w="12700">
             <a:solidFill>
@@ -7429,57 +8980,14 @@
       </p:sp>
       <p:sp>
         <p:nvSpPr>
-          <p:cNvPr id="9" name="Oval 8"/>
-          <p:cNvSpPr/>
-          <p:nvPr/>
-        </p:nvSpPr>
-        <p:spPr>
-          <a:xfrm>
-            <a:off x="6400800" y="2057400"/>
-            <a:ext cx="365760" cy="365760"/>
-          </a:xfrm>
-          <a:prstGeom prst="ellipse">
-            <a:avLst/>
-          </a:prstGeom>
-          <a:solidFill>
-            <a:srgbClr val="059669"/>
-          </a:solidFill>
-          <a:ln>
-            <a:noFill/>
-          </a:ln>
-        </p:spPr>
-        <p:style>
-          <a:lnRef idx="1">
-            <a:schemeClr val="accent1"/>
-          </a:lnRef>
-          <a:fillRef idx="3">
-            <a:schemeClr val="accent1"/>
-          </a:fillRef>
-          <a:effectRef idx="2">
-            <a:schemeClr val="accent1"/>
-          </a:effectRef>
-          <a:fontRef idx="minor">
-            <a:schemeClr val="lt1"/>
-          </a:fontRef>
-        </p:style>
-        <p:txBody>
-          <a:bodyPr rtlCol="0" anchor="ctr"/>
-          <a:lstStyle/>
-          <a:p>
-            <a:pPr algn="ctr"/>
-          </a:p>
-        </p:txBody>
-      </p:sp>
-      <p:sp>
-        <p:nvSpPr>
-          <p:cNvPr id="10" name="TextBox 9"/>
+          <p:cNvPr id="11" name="TextBox 10"/>
           <p:cNvSpPr txBox="1"/>
           <p:nvPr/>
         </p:nvSpPr>
         <p:spPr>
           <a:xfrm>
-            <a:off x="6949440" y="1965960"/>
-            <a:ext cx="4114800" cy="1554480"/>
+            <a:off x="6400800" y="1691640"/>
+            <a:ext cx="4846320" cy="4114800"/>
           </a:xfrm>
           <a:prstGeom prst="rect">
             <a:avLst/>
@@ -7495,12 +9003,13 @@
             <a:pPr>
               <a:defRPr sz="1500" b="1">
                 <a:solidFill>
-                  <a:srgbClr val="0F172A"/>
-                </a:solidFill>
-              </a:defRPr>
-            </a:pPr>
-            <a:r>
-              <a:t>Staff &amp; Quota Calibration</a:t>
+                  <a:srgbClr val="2B6CB0"/>
+                </a:solidFill>
+                <a:latin typeface="Arial"/>
+              </a:defRPr>
+            </a:pPr>
+            <a:r>
+              <a:t>2. HR Administrator &amp; Manager Module</a:t>
             </a:r>
           </a:p>
           <a:p>
@@ -7508,137 +9017,15 @@
               <a:spcBef>
                 <a:spcPts val="600"/>
               </a:spcBef>
-              <a:defRPr sz="1150">
-                <a:solidFill>
-                  <a:srgbClr val="64748B"/>
-                </a:solidFill>
-              </a:defRPr>
-            </a:pPr>
-            <a:r>
-              <a:t>HR administrators can register new employees with automatic baseline quota initialization, and modify annual allowances dynamically on demand.</a:t>
-            </a:r>
-          </a:p>
-        </p:txBody>
-      </p:sp>
-      <p:sp>
-        <p:nvSpPr>
-          <p:cNvPr id="11" name="Rounded Rectangle 10"/>
-          <p:cNvSpPr/>
-          <p:nvPr/>
-        </p:nvSpPr>
-        <p:spPr>
-          <a:xfrm>
-            <a:off x="731520" y="4023360"/>
-            <a:ext cx="5212080" cy="2011680"/>
-          </a:xfrm>
-          <a:prstGeom prst="roundRect">
-            <a:avLst/>
-          </a:prstGeom>
-          <a:solidFill>
-            <a:srgbClr val="F8FAFC"/>
-          </a:solidFill>
-          <a:ln w="12700">
-            <a:solidFill>
-              <a:srgbClr val="E2E8F0"/>
-            </a:solidFill>
-          </a:ln>
-        </p:spPr>
-        <p:style>
-          <a:lnRef idx="1">
-            <a:schemeClr val="accent1"/>
-          </a:lnRef>
-          <a:fillRef idx="3">
-            <a:schemeClr val="accent1"/>
-          </a:fillRef>
-          <a:effectRef idx="2">
-            <a:schemeClr val="accent1"/>
-          </a:effectRef>
-          <a:fontRef idx="minor">
-            <a:schemeClr val="lt1"/>
-          </a:fontRef>
-        </p:style>
-        <p:txBody>
-          <a:bodyPr rtlCol="0" anchor="ctr"/>
-          <a:lstStyle/>
-          <a:p>
-            <a:pPr algn="ctr"/>
-          </a:p>
-        </p:txBody>
-      </p:sp>
-      <p:sp>
-        <p:nvSpPr>
-          <p:cNvPr id="12" name="Oval 11"/>
-          <p:cNvSpPr/>
-          <p:nvPr/>
-        </p:nvSpPr>
-        <p:spPr>
-          <a:xfrm>
-            <a:off x="1005840" y="4343400"/>
-            <a:ext cx="365760" cy="365760"/>
-          </a:xfrm>
-          <a:prstGeom prst="ellipse">
-            <a:avLst/>
-          </a:prstGeom>
-          <a:solidFill>
-            <a:srgbClr val="7C3AED"/>
-          </a:solidFill>
-          <a:ln>
-            <a:noFill/>
-          </a:ln>
-        </p:spPr>
-        <p:style>
-          <a:lnRef idx="1">
-            <a:schemeClr val="accent1"/>
-          </a:lnRef>
-          <a:fillRef idx="3">
-            <a:schemeClr val="accent1"/>
-          </a:fillRef>
-          <a:effectRef idx="2">
-            <a:schemeClr val="accent1"/>
-          </a:effectRef>
-          <a:fontRef idx="minor">
-            <a:schemeClr val="lt1"/>
-          </a:fontRef>
-        </p:style>
-        <p:txBody>
-          <a:bodyPr rtlCol="0" anchor="ctr"/>
-          <a:lstStyle/>
-          <a:p>
-            <a:pPr algn="ctr"/>
-          </a:p>
-        </p:txBody>
-      </p:sp>
-      <p:sp>
-        <p:nvSpPr>
-          <p:cNvPr id="13" name="TextBox 12"/>
-          <p:cNvSpPr txBox="1"/>
-          <p:nvPr/>
-        </p:nvSpPr>
-        <p:spPr>
-          <a:xfrm>
-            <a:off x="1554480" y="4251960"/>
-            <a:ext cx="4114800" cy="1554480"/>
-          </a:xfrm>
-          <a:prstGeom prst="rect">
-            <a:avLst/>
-          </a:prstGeom>
-          <a:noFill/>
-        </p:spPr>
-        <p:txBody>
-          <a:bodyPr wrap="square">
-            <a:spAutoFit/>
-          </a:bodyPr>
-          <a:lstStyle/>
-          <a:p>
-            <a:pPr>
-              <a:defRPr sz="1500" b="1">
-                <a:solidFill>
-                  <a:srgbClr val="0F172A"/>
-                </a:solidFill>
-              </a:defRPr>
-            </a:pPr>
-            <a:r>
-              <a:t>Executive Chart.js Analytics</a:t>
+              <a:defRPr sz="1100">
+                <a:solidFill>
+                  <a:srgbClr val="2D3748"/>
+                </a:solidFill>
+                <a:latin typeface="Arial"/>
+              </a:defRPr>
+            </a:pPr>
+            <a:r>
+              <a:t>•  Executive KPI Dashboard: Real-time indicators showing active employees, pending review count, and employees on leave today.</a:t>
             </a:r>
           </a:p>
           <a:p>
@@ -7646,137 +9033,15 @@
               <a:spcBef>
                 <a:spcPts val="600"/>
               </a:spcBef>
-              <a:defRPr sz="1150">
-                <a:solidFill>
-                  <a:srgbClr val="64748B"/>
-                </a:solidFill>
-              </a:defRPr>
-            </a:pPr>
-            <a:r>
-              <a:t>Interactive visual dashboard featuring donut distribution charts by leave category and monthly utilization bar trends across departments.</a:t>
-            </a:r>
-          </a:p>
-        </p:txBody>
-      </p:sp>
-      <p:sp>
-        <p:nvSpPr>
-          <p:cNvPr id="14" name="Rounded Rectangle 13"/>
-          <p:cNvSpPr/>
-          <p:nvPr/>
-        </p:nvSpPr>
-        <p:spPr>
-          <a:xfrm>
-            <a:off x="6126480" y="4023360"/>
-            <a:ext cx="5212080" cy="2011680"/>
-          </a:xfrm>
-          <a:prstGeom prst="roundRect">
-            <a:avLst/>
-          </a:prstGeom>
-          <a:solidFill>
-            <a:srgbClr val="F8FAFC"/>
-          </a:solidFill>
-          <a:ln w="12700">
-            <a:solidFill>
-              <a:srgbClr val="E2E8F0"/>
-            </a:solidFill>
-          </a:ln>
-        </p:spPr>
-        <p:style>
-          <a:lnRef idx="1">
-            <a:schemeClr val="accent1"/>
-          </a:lnRef>
-          <a:fillRef idx="3">
-            <a:schemeClr val="accent1"/>
-          </a:fillRef>
-          <a:effectRef idx="2">
-            <a:schemeClr val="accent1"/>
-          </a:effectRef>
-          <a:fontRef idx="minor">
-            <a:schemeClr val="lt1"/>
-          </a:fontRef>
-        </p:style>
-        <p:txBody>
-          <a:bodyPr rtlCol="0" anchor="ctr"/>
-          <a:lstStyle/>
-          <a:p>
-            <a:pPr algn="ctr"/>
-          </a:p>
-        </p:txBody>
-      </p:sp>
-      <p:sp>
-        <p:nvSpPr>
-          <p:cNvPr id="15" name="Oval 14"/>
-          <p:cNvSpPr/>
-          <p:nvPr/>
-        </p:nvSpPr>
-        <p:spPr>
-          <a:xfrm>
-            <a:off x="6400800" y="4343400"/>
-            <a:ext cx="365760" cy="365760"/>
-          </a:xfrm>
-          <a:prstGeom prst="ellipse">
-            <a:avLst/>
-          </a:prstGeom>
-          <a:solidFill>
-            <a:srgbClr val="D97706"/>
-          </a:solidFill>
-          <a:ln>
-            <a:noFill/>
-          </a:ln>
-        </p:spPr>
-        <p:style>
-          <a:lnRef idx="1">
-            <a:schemeClr val="accent1"/>
-          </a:lnRef>
-          <a:fillRef idx="3">
-            <a:schemeClr val="accent1"/>
-          </a:fillRef>
-          <a:effectRef idx="2">
-            <a:schemeClr val="accent1"/>
-          </a:effectRef>
-          <a:fontRef idx="minor">
-            <a:schemeClr val="lt1"/>
-          </a:fontRef>
-        </p:style>
-        <p:txBody>
-          <a:bodyPr rtlCol="0" anchor="ctr"/>
-          <a:lstStyle/>
-          <a:p>
-            <a:pPr algn="ctr"/>
-          </a:p>
-        </p:txBody>
-      </p:sp>
-      <p:sp>
-        <p:nvSpPr>
-          <p:cNvPr id="16" name="TextBox 15"/>
-          <p:cNvSpPr txBox="1"/>
-          <p:nvPr/>
-        </p:nvSpPr>
-        <p:spPr>
-          <a:xfrm>
-            <a:off x="6949440" y="4251960"/>
-            <a:ext cx="4114800" cy="1554480"/>
-          </a:xfrm>
-          <a:prstGeom prst="rect">
-            <a:avLst/>
-          </a:prstGeom>
-          <a:noFill/>
-        </p:spPr>
-        <p:txBody>
-          <a:bodyPr wrap="square">
-            <a:spAutoFit/>
-          </a:bodyPr>
-          <a:lstStyle/>
-          <a:p>
-            <a:pPr>
-              <a:defRPr sz="1500" b="1">
-                <a:solidFill>
-                  <a:srgbClr val="0F172A"/>
-                </a:solidFill>
-              </a:defRPr>
-            </a:pPr>
-            <a:r>
-              <a:t>Compliance Search &amp; CSV Export</a:t>
+              <a:defRPr sz="1100">
+                <a:solidFill>
+                  <a:srgbClr val="2D3748"/>
+                </a:solidFill>
+                <a:latin typeface="Arial"/>
+              </a:defRPr>
+            </a:pPr>
+            <a:r>
+              <a:t>•  Approvals Queue: List of pending applications showing applicant profile, requested dates, and current balance.</a:t>
             </a:r>
           </a:p>
           <a:p>
@@ -7784,14 +9049,63 @@
               <a:spcBef>
                 <a:spcPts val="600"/>
               </a:spcBef>
-              <a:defRPr sz="1150">
-                <a:solidFill>
-                  <a:srgbClr val="64748B"/>
-                </a:solidFill>
-              </a:defRPr>
-            </a:pPr>
-            <a:r>
-              <a:t>Multi-dimensional search filters (by department, status, and category) with one-click export to audit-ready CSV spreadsheets for legal/HR records.</a:t>
+              <a:defRPr sz="1100">
+                <a:solidFill>
+                  <a:srgbClr val="2D3748"/>
+                </a:solidFill>
+                <a:latin typeface="Arial"/>
+              </a:defRPr>
+            </a:pPr>
+            <a:r>
+              <a:t>•  Modal Decision Workflows: Approve or reject requests with mandatory manager feedback remarks.</a:t>
+            </a:r>
+          </a:p>
+          <a:p>
+            <a:pPr>
+              <a:spcBef>
+                <a:spcPts val="600"/>
+              </a:spcBef>
+              <a:defRPr sz="1100">
+                <a:solidFill>
+                  <a:srgbClr val="2D3748"/>
+                </a:solidFill>
+                <a:latin typeface="Arial"/>
+              </a:defRPr>
+            </a:pPr>
+            <a:r>
+              <a:t>•  Employee Directory: Register new employees with automated initial leave balance creation.</a:t>
+            </a:r>
+          </a:p>
+          <a:p>
+            <a:pPr>
+              <a:spcBef>
+                <a:spcPts val="600"/>
+              </a:spcBef>
+              <a:defRPr sz="1100">
+                <a:solidFill>
+                  <a:srgbClr val="2D3748"/>
+                </a:solidFill>
+                <a:latin typeface="Arial"/>
+              </a:defRPr>
+            </a:pPr>
+            <a:r>
+              <a:t>•  Quota Calibration: Adjust annual quota allocation per employee and category as needed.</a:t>
+            </a:r>
+          </a:p>
+          <a:p>
+            <a:pPr>
+              <a:spcBef>
+                <a:spcPts val="600"/>
+              </a:spcBef>
+              <a:defRPr sz="1100">
+                <a:solidFill>
+                  <a:srgbClr val="2D3748"/>
+                </a:solidFill>
+                <a:latin typeface="Arial"/>
+              </a:defRPr>
+            </a:pPr>
+            <a:r>
+              <a:t>•  Reporting &amp; CSV Export: Filter leave history by department, status, or type; export compliance records to CSV.</a:t>
             </a:r>
           </a:p>
         </p:txBody>
@@ -7816,25 +9130,95 @@
       <p:grpSpPr/>
       <p:sp>
         <p:nvSpPr>
-          <p:cNvPr id="2" name="Rounded Rectangle 1"/>
+          <p:cNvPr id="2" name="TextBox 1"/>
+          <p:cNvSpPr txBox="1"/>
+          <p:nvPr/>
+        </p:nvSpPr>
+        <p:spPr>
+          <a:xfrm>
+            <a:off x="731520" y="411480"/>
+            <a:ext cx="10698480" cy="274320"/>
+          </a:xfrm>
+          <a:prstGeom prst="rect">
+            <a:avLst/>
+          </a:prstGeom>
+          <a:noFill/>
+        </p:spPr>
+        <p:txBody>
+          <a:bodyPr wrap="none" lIns="0" tIns="0" rIns="0" bIns="0">
+            <a:spAutoFit/>
+          </a:bodyPr>
+          <a:lstStyle/>
+          <a:p>
+            <a:pPr>
+              <a:defRPr sz="1000" b="1">
+                <a:solidFill>
+                  <a:srgbClr val="2B6CB0"/>
+                </a:solidFill>
+                <a:latin typeface="Arial"/>
+              </a:defRPr>
+            </a:pPr>
+            <a:r>
+              <a:t>SYSTEM IMPLEMENTATION</a:t>
+            </a:r>
+          </a:p>
+        </p:txBody>
+      </p:sp>
+      <p:sp>
+        <p:nvSpPr>
+          <p:cNvPr id="3" name="TextBox 2"/>
+          <p:cNvSpPr txBox="1"/>
+          <p:nvPr/>
+        </p:nvSpPr>
+        <p:spPr>
+          <a:xfrm>
+            <a:off x="731520" y="685800"/>
+            <a:ext cx="10698480" cy="548640"/>
+          </a:xfrm>
+          <a:prstGeom prst="rect">
+            <a:avLst/>
+          </a:prstGeom>
+          <a:noFill/>
+        </p:spPr>
+        <p:txBody>
+          <a:bodyPr wrap="none" lIns="0" tIns="0" rIns="0" bIns="0">
+            <a:spAutoFit/>
+          </a:bodyPr>
+          <a:lstStyle/>
+          <a:p>
+            <a:pPr>
+              <a:defRPr sz="2200" b="1">
+                <a:solidFill>
+                  <a:srgbClr val="1A365D"/>
+                </a:solidFill>
+                <a:latin typeface="Arial"/>
+              </a:defRPr>
+            </a:pPr>
+            <a:r>
+              <a:t>Key Business Logic &amp; Validation Rules</a:t>
+            </a:r>
+          </a:p>
+        </p:txBody>
+      </p:sp>
+      <p:sp>
+        <p:nvSpPr>
+          <p:cNvPr id="4" name="Rectangle 3"/>
           <p:cNvSpPr/>
           <p:nvPr/>
         </p:nvSpPr>
         <p:spPr>
           <a:xfrm>
-            <a:off x="731520" y="365760"/>
-            <a:ext cx="2560320" cy="320040"/>
-          </a:xfrm>
-          <a:prstGeom prst="roundRect">
+            <a:off x="731520" y="1325880"/>
+            <a:ext cx="10728655" cy="18288"/>
+          </a:xfrm>
+          <a:prstGeom prst="rect">
             <a:avLst/>
           </a:prstGeom>
           <a:solidFill>
-            <a:srgbClr val="EEF2FF"/>
+            <a:srgbClr val="2B6CB0"/>
           </a:solidFill>
-          <a:ln w="12700">
-            <a:solidFill>
-              <a:srgbClr val="C7D2FE"/>
-            </a:solidFill>
+          <a:ln>
+            <a:noFill/>
           </a:ln>
         </p:spPr>
         <p:style>
@@ -7852,67 +9236,23 @@
           </a:fontRef>
         </p:style>
         <p:txBody>
-          <a:bodyPr rtlCol="0" anchor="ctr" wrap="square" lIns="0" tIns="0" rIns="0" bIns="0"/>
-          <a:lstStyle/>
-          <a:p>
-            <a:pPr algn="ctr">
-              <a:defRPr sz="1000" b="1">
-                <a:solidFill>
-                  <a:srgbClr val="4F46E5"/>
-                </a:solidFill>
-              </a:defRPr>
-            </a:pPr>
-            <a:r>
-              <a:t>●  TESTING &amp; RELIABILITY</a:t>
-            </a:r>
-          </a:p>
-        </p:txBody>
-      </p:sp>
-      <p:sp>
-        <p:nvSpPr>
-          <p:cNvPr id="3" name="TextBox 2"/>
-          <p:cNvSpPr txBox="1"/>
-          <p:nvPr/>
-        </p:nvSpPr>
-        <p:spPr>
-          <a:xfrm>
-            <a:off x="731520" y="777240"/>
-            <a:ext cx="10698480" cy="640080"/>
-          </a:xfrm>
-          <a:prstGeom prst="rect">
-            <a:avLst/>
-          </a:prstGeom>
-          <a:noFill/>
-        </p:spPr>
-        <p:txBody>
-          <a:bodyPr wrap="square" lIns="0" tIns="0" rIns="0" bIns="0">
-            <a:spAutoFit/>
-          </a:bodyPr>
-          <a:lstStyle/>
-          <a:p>
-            <a:pPr>
-              <a:defRPr sz="2600" b="1">
-                <a:solidFill>
-                  <a:srgbClr val="0F172A"/>
-                </a:solidFill>
-              </a:defRPr>
-            </a:pPr>
-            <a:r>
-              <a:t>Verification &amp; Quality Assurance (100% Passed)</a:t>
-            </a:r>
-          </a:p>
-        </p:txBody>
-      </p:sp>
-      <p:sp>
-        <p:nvSpPr>
-          <p:cNvPr id="4" name="Rectangle 3"/>
+          <a:bodyPr rtlCol="0" anchor="ctr"/>
+          <a:lstStyle/>
+          <a:p>
+            <a:pPr algn="ctr"/>
+          </a:p>
+        </p:txBody>
+      </p:sp>
+      <p:sp>
+        <p:nvSpPr>
+          <p:cNvPr id="5" name="Rectangle 4"/>
           <p:cNvSpPr/>
           <p:nvPr/>
         </p:nvSpPr>
         <p:spPr>
           <a:xfrm>
-            <a:off x="731520" y="1463040"/>
-            <a:ext cx="10728655" cy="18288"/>
+            <a:off x="731520" y="6217920"/>
+            <a:ext cx="10728655" cy="13716"/>
           </a:xfrm>
           <a:prstGeom prst="rect">
             <a:avLst/>
@@ -7948,59 +9288,14 @@
       </p:sp>
       <p:sp>
         <p:nvSpPr>
-          <p:cNvPr id="5" name="Rounded Rectangle 4"/>
-          <p:cNvSpPr/>
-          <p:nvPr/>
-        </p:nvSpPr>
-        <p:spPr>
-          <a:xfrm>
-            <a:off x="731520" y="1737360"/>
-            <a:ext cx="10728655" cy="1097280"/>
-          </a:xfrm>
-          <a:prstGeom prst="roundRect">
-            <a:avLst/>
-          </a:prstGeom>
-          <a:solidFill>
-            <a:srgbClr val="F0FDF4"/>
-          </a:solidFill>
-          <a:ln w="12700">
-            <a:solidFill>
-              <a:srgbClr val="BBF7D0"/>
-            </a:solidFill>
-          </a:ln>
-        </p:spPr>
-        <p:style>
-          <a:lnRef idx="1">
-            <a:schemeClr val="accent1"/>
-          </a:lnRef>
-          <a:fillRef idx="3">
-            <a:schemeClr val="accent1"/>
-          </a:fillRef>
-          <a:effectRef idx="2">
-            <a:schemeClr val="accent1"/>
-          </a:effectRef>
-          <a:fontRef idx="minor">
-            <a:schemeClr val="lt1"/>
-          </a:fontRef>
-        </p:style>
-        <p:txBody>
-          <a:bodyPr rtlCol="0" anchor="ctr"/>
-          <a:lstStyle/>
-          <a:p>
-            <a:pPr algn="ctr"/>
-          </a:p>
-        </p:txBody>
-      </p:sp>
-      <p:sp>
-        <p:nvSpPr>
           <p:cNvPr id="6" name="TextBox 5"/>
           <p:cNvSpPr txBox="1"/>
           <p:nvPr/>
         </p:nvSpPr>
         <p:spPr>
           <a:xfrm>
-            <a:off x="1005840" y="1874519"/>
-            <a:ext cx="10149840" cy="822960"/>
+            <a:off x="731520" y="6263640"/>
+            <a:ext cx="7315200" cy="365760"/>
           </a:xfrm>
           <a:prstGeom prst="rect">
             <a:avLst/>
@@ -8008,55 +9303,77 @@
           <a:noFill/>
         </p:spPr>
         <p:txBody>
-          <a:bodyPr wrap="none">
+          <a:bodyPr wrap="none" lIns="0" tIns="0" rIns="0" bIns="0">
             <a:spAutoFit/>
           </a:bodyPr>
           <a:lstStyle/>
           <a:p>
             <a:pPr>
-              <a:defRPr sz="1800" b="1">
-                <a:solidFill>
-                  <a:srgbClr val="059669"/>
-                </a:solidFill>
-              </a:defRPr>
-            </a:pPr>
-            <a:r>
-              <a:t>✔  Automated Test Suite: 17 of 17 Tests Passed (100% Pass Rate in 4.44s)</a:t>
-            </a:r>
-          </a:p>
-          <a:p>
-            <a:pPr>
-              <a:spcBef>
-                <a:spcPts val="400"/>
-              </a:spcBef>
-              <a:defRPr sz="1200">
-                <a:solidFill>
-                  <a:srgbClr val="0F172A"/>
-                </a:solidFill>
-              </a:defRPr>
-            </a:pPr>
-            <a:r>
-              <a:t>Comprehensive automated unit and integration tests executing against isolated temporary SQLite databases on every build.</a:t>
-            </a:r>
-          </a:p>
-        </p:txBody>
-      </p:sp>
-      <p:sp>
-        <p:nvSpPr>
-          <p:cNvPr id="7" name="Rounded Rectangle 6"/>
+              <a:defRPr sz="950">
+                <a:solidFill>
+                  <a:srgbClr val="718096"/>
+                </a:solidFill>
+                <a:latin typeface="Arial"/>
+              </a:defRPr>
+            </a:pPr>
+            <a:r>
+              <a:t>Employee Leave Management System | Project Presentation</a:t>
+            </a:r>
+          </a:p>
+        </p:txBody>
+      </p:sp>
+      <p:sp>
+        <p:nvSpPr>
+          <p:cNvPr id="7" name="TextBox 6"/>
+          <p:cNvSpPr txBox="1"/>
+          <p:nvPr/>
+        </p:nvSpPr>
+        <p:spPr>
+          <a:xfrm>
+            <a:off x="9601200" y="6263640"/>
+            <a:ext cx="1828800" cy="365760"/>
+          </a:xfrm>
+          <a:prstGeom prst="rect">
+            <a:avLst/>
+          </a:prstGeom>
+          <a:noFill/>
+        </p:spPr>
+        <p:txBody>
+          <a:bodyPr wrap="none" lIns="0" tIns="0" rIns="0" bIns="0">
+            <a:spAutoFit/>
+          </a:bodyPr>
+          <a:lstStyle/>
+          <a:p>
+            <a:pPr algn="r">
+              <a:defRPr sz="950">
+                <a:solidFill>
+                  <a:srgbClr val="718096"/>
+                </a:solidFill>
+                <a:latin typeface="Arial"/>
+              </a:defRPr>
+            </a:pPr>
+            <a:r>
+              <a:t>Slide 8 of 10</a:t>
+            </a:r>
+          </a:p>
+        </p:txBody>
+      </p:sp>
+      <p:sp>
+        <p:nvSpPr>
+          <p:cNvPr id="8" name="Rectangle 7"/>
           <p:cNvSpPr/>
           <p:nvPr/>
         </p:nvSpPr>
         <p:spPr>
           <a:xfrm>
-            <a:off x="731520" y="3017520"/>
-            <a:ext cx="3474720" cy="3291840"/>
-          </a:xfrm>
-          <a:prstGeom prst="roundRect">
+            <a:off x="731520" y="1554480"/>
+            <a:ext cx="10728655" cy="804672"/>
+          </a:xfrm>
+          <a:prstGeom prst="rect">
             <a:avLst/>
           </a:prstGeom>
           <a:solidFill>
-            <a:srgbClr val="F8FAFC"/>
+            <a:srgbClr val="FFFFFF"/>
           </a:solidFill>
           <a:ln w="12700">
             <a:solidFill>
@@ -8088,14 +9405,14 @@
       </p:sp>
       <p:sp>
         <p:nvSpPr>
-          <p:cNvPr id="8" name="TextBox 7"/>
+          <p:cNvPr id="9" name="TextBox 8"/>
           <p:cNvSpPr txBox="1"/>
           <p:nvPr/>
         </p:nvSpPr>
         <p:spPr>
           <a:xfrm>
-            <a:off x="914400" y="3154680"/>
-            <a:ext cx="3108960" cy="3017520"/>
+            <a:off x="914400" y="1627632"/>
+            <a:ext cx="10332720" cy="685800"/>
           </a:xfrm>
           <a:prstGeom prst="rect">
             <a:avLst/>
@@ -8111,107 +9428,49 @@
             <a:pPr>
               <a:defRPr sz="1300" b="1">
                 <a:solidFill>
-                  <a:srgbClr val="4F46E5"/>
-                </a:solidFill>
-              </a:defRPr>
-            </a:pPr>
-            <a:r>
-              <a:t>Calculation &amp; Engine Tests</a:t>
+                  <a:srgbClr val="1A365D"/>
+                </a:solidFill>
+                <a:latin typeface="Arial"/>
+              </a:defRPr>
+            </a:pPr>
+            <a:r>
+              <a:t>1. Business Day Calculation Algorithm</a:t>
             </a:r>
           </a:p>
           <a:p>
             <a:pPr>
               <a:spcBef>
-                <a:spcPts val="500"/>
+                <a:spcPts val="300"/>
               </a:spcBef>
-              <a:defRPr sz="1000">
-                <a:solidFill>
-                  <a:srgbClr val="0F172A"/>
-                </a:solidFill>
-              </a:defRPr>
-            </a:pPr>
-            <a:r>
-              <a:t>• Regular Business Days: Mon-Wed correctly computed as 3 days</a:t>
-            </a:r>
-          </a:p>
-          <a:p>
-            <a:pPr>
-              <a:spcBef>
-                <a:spcPts val="500"/>
-              </a:spcBef>
-              <a:defRPr sz="1000">
-                <a:solidFill>
-                  <a:srgbClr val="0F172A"/>
-                </a:solidFill>
-              </a:defRPr>
-            </a:pPr>
-            <a:r>
-              <a:t>• Weekend Exclusion: Fri-Mon computes 2 days (Sat/Sun skipped)</a:t>
-            </a:r>
-          </a:p>
-          <a:p>
-            <a:pPr>
-              <a:spcBef>
-                <a:spcPts val="500"/>
-              </a:spcBef>
-              <a:defRPr sz="1000">
-                <a:solidFill>
-                  <a:srgbClr val="0F172A"/>
-                </a:solidFill>
-              </a:defRPr>
-            </a:pPr>
-            <a:r>
-              <a:t>• Holiday Exclusion: Public holidays excluded from count</a:t>
-            </a:r>
-          </a:p>
-          <a:p>
-            <a:pPr>
-              <a:spcBef>
-                <a:spcPts val="500"/>
-              </a:spcBef>
-              <a:defRPr sz="1000">
-                <a:solidFill>
-                  <a:srgbClr val="0F172A"/>
-                </a:solidFill>
-              </a:defRPr>
-            </a:pPr>
-            <a:r>
-              <a:t>• Half-Day Validation: Exact 0.5-day duration verified</a:t>
-            </a:r>
-          </a:p>
-          <a:p>
-            <a:pPr>
-              <a:spcBef>
-                <a:spcPts val="500"/>
-              </a:spcBef>
-              <a:defRPr sz="1000">
-                <a:solidFill>
-                  <a:srgbClr val="0F172A"/>
-                </a:solidFill>
-              </a:defRPr>
-            </a:pPr>
-            <a:r>
-              <a:t>• Negative Date Orders: End date &lt; start date rejected</a:t>
-            </a:r>
-          </a:p>
-        </p:txBody>
-      </p:sp>
-      <p:sp>
-        <p:nvSpPr>
-          <p:cNvPr id="9" name="Rounded Rectangle 8"/>
+              <a:defRPr sz="1100">
+                <a:solidFill>
+                  <a:srgbClr val="2D3748"/>
+                </a:solidFill>
+                <a:latin typeface="Arial"/>
+              </a:defRPr>
+            </a:pPr>
+            <a:r>
+              <a:t>The system iterates through each calendar day in the requested date range. If a day falls on Saturday (weekday 5) or Sunday (weekday 6) or matches an official public holiday date in the database, it is automatically excluded. Only net business working days are counted.</a:t>
+            </a:r>
+          </a:p>
+        </p:txBody>
+      </p:sp>
+      <p:sp>
+        <p:nvSpPr>
+          <p:cNvPr id="10" name="Rectangle 9"/>
           <p:cNvSpPr/>
           <p:nvPr/>
         </p:nvSpPr>
         <p:spPr>
           <a:xfrm>
-            <a:off x="4343400" y="3017520"/>
-            <a:ext cx="3474720" cy="3291840"/>
-          </a:xfrm>
-          <a:prstGeom prst="roundRect">
+            <a:off x="731520" y="2450591"/>
+            <a:ext cx="10728655" cy="804672"/>
+          </a:xfrm>
+          <a:prstGeom prst="rect">
             <a:avLst/>
           </a:prstGeom>
           <a:solidFill>
-            <a:srgbClr val="F8FAFC"/>
+            <a:srgbClr val="FFFFFF"/>
           </a:solidFill>
           <a:ln w="12700">
             <a:solidFill>
@@ -8243,14 +9502,14 @@
       </p:sp>
       <p:sp>
         <p:nvSpPr>
-          <p:cNvPr id="10" name="TextBox 9"/>
+          <p:cNvPr id="11" name="TextBox 10"/>
           <p:cNvSpPr txBox="1"/>
           <p:nvPr/>
         </p:nvSpPr>
         <p:spPr>
           <a:xfrm>
-            <a:off x="4526280" y="3154680"/>
-            <a:ext cx="3108960" cy="3017520"/>
+            <a:off x="914400" y="2523743"/>
+            <a:ext cx="10332720" cy="685800"/>
           </a:xfrm>
           <a:prstGeom prst="rect">
             <a:avLst/>
@@ -8266,107 +9525,49 @@
             <a:pPr>
               <a:defRPr sz="1300" b="1">
                 <a:solidFill>
-                  <a:srgbClr val="4F46E5"/>
-                </a:solidFill>
-              </a:defRPr>
-            </a:pPr>
-            <a:r>
-              <a:t>Workflow &amp; State Tests</a:t>
+                  <a:srgbClr val="1A365D"/>
+                </a:solidFill>
+                <a:latin typeface="Arial"/>
+              </a:defRPr>
+            </a:pPr>
+            <a:r>
+              <a:t>2. Pending Hold Mechanism</a:t>
             </a:r>
           </a:p>
           <a:p>
             <a:pPr>
               <a:spcBef>
-                <a:spcPts val="500"/>
+                <a:spcPts val="300"/>
               </a:spcBef>
-              <a:defRPr sz="1000">
-                <a:solidFill>
-                  <a:srgbClr val="0F172A"/>
-                </a:solidFill>
-              </a:defRPr>
-            </a:pPr>
-            <a:r>
-              <a:t>• Pending Hold Creation: Applying locks quota to prevent double-booking</a:t>
-            </a:r>
-          </a:p>
-          <a:p>
-            <a:pPr>
-              <a:spcBef>
-                <a:spcPts val="500"/>
-              </a:spcBef>
-              <a:defRPr sz="1000">
-                <a:solidFill>
-                  <a:srgbClr val="0F172A"/>
-                </a:solidFill>
-              </a:defRPr>
-            </a:pPr>
-            <a:r>
-              <a:t>• Manager Approval: Transfers pending hold to used days</a:t>
-            </a:r>
-          </a:p>
-          <a:p>
-            <a:pPr>
-              <a:spcBef>
-                <a:spcPts val="500"/>
-              </a:spcBef>
-              <a:defRPr sz="1000">
-                <a:solidFill>
-                  <a:srgbClr val="0F172A"/>
-                </a:solidFill>
-              </a:defRPr>
-            </a:pPr>
-            <a:r>
-              <a:t>• Manager Rejection: Releases pending hold with no penalty</a:t>
-            </a:r>
-          </a:p>
-          <a:p>
-            <a:pPr>
-              <a:spcBef>
-                <a:spcPts val="500"/>
-              </a:spcBef>
-              <a:defRPr sz="1000">
-                <a:solidFill>
-                  <a:srgbClr val="0F172A"/>
-                </a:solidFill>
-              </a:defRPr>
-            </a:pPr>
-            <a:r>
-              <a:t>• Employee Cancellation: Instant restoration of held quota</a:t>
-            </a:r>
-          </a:p>
-          <a:p>
-            <a:pPr>
-              <a:spcBef>
-                <a:spcPts val="500"/>
-              </a:spcBef>
-              <a:defRPr sz="1000">
-                <a:solidFill>
-                  <a:srgbClr val="0F172A"/>
-                </a:solidFill>
-              </a:defRPr>
-            </a:pPr>
-            <a:r>
-              <a:t>• Insufficient Balance: Rejects request when quota exceeded</a:t>
-            </a:r>
-          </a:p>
-        </p:txBody>
-      </p:sp>
-      <p:sp>
-        <p:nvSpPr>
-          <p:cNvPr id="11" name="Rounded Rectangle 10"/>
+              <a:defRPr sz="1100">
+                <a:solidFill>
+                  <a:srgbClr val="2D3748"/>
+                </a:solidFill>
+                <a:latin typeface="Arial"/>
+              </a:defRPr>
+            </a:pPr>
+            <a:r>
+              <a:t>When an employee applies for leave, the requested days are immediately added to 'pending_days' in their balance record. This temporarily locks the quota to prevent concurrent double-booking. Upon approval, pending days move to 'used_days'; if rejected or cancelled, pending days are released.</a:t>
+            </a:r>
+          </a:p>
+        </p:txBody>
+      </p:sp>
+      <p:sp>
+        <p:nvSpPr>
+          <p:cNvPr id="12" name="Rectangle 11"/>
           <p:cNvSpPr/>
           <p:nvPr/>
         </p:nvSpPr>
         <p:spPr>
           <a:xfrm>
-            <a:off x="7955280" y="3017520"/>
-            <a:ext cx="3474720" cy="3291840"/>
-          </a:xfrm>
-          <a:prstGeom prst="roundRect">
+            <a:off x="731520" y="3346704"/>
+            <a:ext cx="10728655" cy="804672"/>
+          </a:xfrm>
+          <a:prstGeom prst="rect">
             <a:avLst/>
           </a:prstGeom>
           <a:solidFill>
-            <a:srgbClr val="F8FAFC"/>
+            <a:srgbClr val="FFFFFF"/>
           </a:solidFill>
           <a:ln w="12700">
             <a:solidFill>
@@ -8398,14 +9599,14 @@
       </p:sp>
       <p:sp>
         <p:nvSpPr>
-          <p:cNvPr id="12" name="TextBox 11"/>
+          <p:cNvPr id="13" name="TextBox 12"/>
           <p:cNvSpPr txBox="1"/>
           <p:nvPr/>
         </p:nvSpPr>
         <p:spPr>
           <a:xfrm>
-            <a:off x="8138160" y="3154680"/>
-            <a:ext cx="3108960" cy="3017520"/>
+            <a:off x="914400" y="3419856"/>
+            <a:ext cx="10332720" cy="685800"/>
           </a:xfrm>
           <a:prstGeom prst="rect">
             <a:avLst/>
@@ -8421,87 +9622,223 @@
             <a:pPr>
               <a:defRPr sz="1300" b="1">
                 <a:solidFill>
-                  <a:srgbClr val="4F46E5"/>
-                </a:solidFill>
-              </a:defRPr>
-            </a:pPr>
-            <a:r>
-              <a:t>Security &amp; Edge-Case Tests</a:t>
+                  <a:srgbClr val="1A365D"/>
+                </a:solidFill>
+                <a:latin typeface="Arial"/>
+              </a:defRPr>
+            </a:pPr>
+            <a:r>
+              <a:t>3. Date Overlap and Conflict Detection</a:t>
             </a:r>
           </a:p>
           <a:p>
             <a:pPr>
               <a:spcBef>
-                <a:spcPts val="500"/>
+                <a:spcPts val="300"/>
               </a:spcBef>
-              <a:defRPr sz="1000">
-                <a:solidFill>
-                  <a:srgbClr val="0F172A"/>
-                </a:solidFill>
-              </a:defRPr>
-            </a:pPr>
-            <a:r>
-              <a:t>• Role-Based Protection: Prevents unauthorized admin access</a:t>
+              <a:defRPr sz="1100">
+                <a:solidFill>
+                  <a:srgbClr val="2D3748"/>
+                </a:solidFill>
+                <a:latin typeface="Arial"/>
+              </a:defRPr>
+            </a:pPr>
+            <a:r>
+              <a:t>Before saving an application, the system queries existing pending and approved records for the same employee. If the requested date range overlaps with any existing booking, the application is rejected with a descriptive warning message.</a:t>
+            </a:r>
+          </a:p>
+        </p:txBody>
+      </p:sp>
+      <p:sp>
+        <p:nvSpPr>
+          <p:cNvPr id="14" name="Rectangle 13"/>
+          <p:cNvSpPr/>
+          <p:nvPr/>
+        </p:nvSpPr>
+        <p:spPr>
+          <a:xfrm>
+            <a:off x="731520" y="4242816"/>
+            <a:ext cx="10728655" cy="804672"/>
+          </a:xfrm>
+          <a:prstGeom prst="rect">
+            <a:avLst/>
+          </a:prstGeom>
+          <a:solidFill>
+            <a:srgbClr val="FFFFFF"/>
+          </a:solidFill>
+          <a:ln w="12700">
+            <a:solidFill>
+              <a:srgbClr val="E2E8F0"/>
+            </a:solidFill>
+          </a:ln>
+        </p:spPr>
+        <p:style>
+          <a:lnRef idx="1">
+            <a:schemeClr val="accent1"/>
+          </a:lnRef>
+          <a:fillRef idx="3">
+            <a:schemeClr val="accent1"/>
+          </a:fillRef>
+          <a:effectRef idx="2">
+            <a:schemeClr val="accent1"/>
+          </a:effectRef>
+          <a:fontRef idx="minor">
+            <a:schemeClr val="lt1"/>
+          </a:fontRef>
+        </p:style>
+        <p:txBody>
+          <a:bodyPr rtlCol="0" anchor="ctr"/>
+          <a:lstStyle/>
+          <a:p>
+            <a:pPr algn="ctr"/>
+          </a:p>
+        </p:txBody>
+      </p:sp>
+      <p:sp>
+        <p:nvSpPr>
+          <p:cNvPr id="15" name="TextBox 14"/>
+          <p:cNvSpPr txBox="1"/>
+          <p:nvPr/>
+        </p:nvSpPr>
+        <p:spPr>
+          <a:xfrm>
+            <a:off x="914400" y="4315968"/>
+            <a:ext cx="10332720" cy="685800"/>
+          </a:xfrm>
+          <a:prstGeom prst="rect">
+            <a:avLst/>
+          </a:prstGeom>
+          <a:noFill/>
+        </p:spPr>
+        <p:txBody>
+          <a:bodyPr wrap="square">
+            <a:spAutoFit/>
+          </a:bodyPr>
+          <a:lstStyle/>
+          <a:p>
+            <a:pPr>
+              <a:defRPr sz="1300" b="1">
+                <a:solidFill>
+                  <a:srgbClr val="1A365D"/>
+                </a:solidFill>
+                <a:latin typeface="Arial"/>
+              </a:defRPr>
+            </a:pPr>
+            <a:r>
+              <a:t>4. Balance Sufficiency Verification</a:t>
             </a:r>
           </a:p>
           <a:p>
             <a:pPr>
               <a:spcBef>
-                <a:spcPts val="500"/>
+                <a:spcPts val="300"/>
               </a:spcBef>
-              <a:defRPr sz="1000">
-                <a:solidFill>
-                  <a:srgbClr val="0F172A"/>
-                </a:solidFill>
-              </a:defRPr>
-            </a:pPr>
-            <a:r>
-              <a:t>• Overlapping Collisions: Rejects conflicting concurrent leaves</a:t>
+              <a:defRPr sz="1100">
+                <a:solidFill>
+                  <a:srgbClr val="2D3748"/>
+                </a:solidFill>
+                <a:latin typeface="Arial"/>
+              </a:defRPr>
+            </a:pPr>
+            <a:r>
+              <a:t>Applications requesting more business days than the remaining available quota (total_allocated - used_days - pending_days) are automatically rejected prior to database insertion.</a:t>
+            </a:r>
+          </a:p>
+        </p:txBody>
+      </p:sp>
+      <p:sp>
+        <p:nvSpPr>
+          <p:cNvPr id="16" name="Rectangle 15"/>
+          <p:cNvSpPr/>
+          <p:nvPr/>
+        </p:nvSpPr>
+        <p:spPr>
+          <a:xfrm>
+            <a:off x="731520" y="5138928"/>
+            <a:ext cx="10728655" cy="804672"/>
+          </a:xfrm>
+          <a:prstGeom prst="rect">
+            <a:avLst/>
+          </a:prstGeom>
+          <a:solidFill>
+            <a:srgbClr val="FFFFFF"/>
+          </a:solidFill>
+          <a:ln w="12700">
+            <a:solidFill>
+              <a:srgbClr val="E2E8F0"/>
+            </a:solidFill>
+          </a:ln>
+        </p:spPr>
+        <p:style>
+          <a:lnRef idx="1">
+            <a:schemeClr val="accent1"/>
+          </a:lnRef>
+          <a:fillRef idx="3">
+            <a:schemeClr val="accent1"/>
+          </a:fillRef>
+          <a:effectRef idx="2">
+            <a:schemeClr val="accent1"/>
+          </a:effectRef>
+          <a:fontRef idx="minor">
+            <a:schemeClr val="lt1"/>
+          </a:fontRef>
+        </p:style>
+        <p:txBody>
+          <a:bodyPr rtlCol="0" anchor="ctr"/>
+          <a:lstStyle/>
+          <a:p>
+            <a:pPr algn="ctr"/>
+          </a:p>
+        </p:txBody>
+      </p:sp>
+      <p:sp>
+        <p:nvSpPr>
+          <p:cNvPr id="17" name="TextBox 16"/>
+          <p:cNvSpPr txBox="1"/>
+          <p:nvPr/>
+        </p:nvSpPr>
+        <p:spPr>
+          <a:xfrm>
+            <a:off x="914400" y="5212080"/>
+            <a:ext cx="10332720" cy="685800"/>
+          </a:xfrm>
+          <a:prstGeom prst="rect">
+            <a:avLst/>
+          </a:prstGeom>
+          <a:noFill/>
+        </p:spPr>
+        <p:txBody>
+          <a:bodyPr wrap="square">
+            <a:spAutoFit/>
+          </a:bodyPr>
+          <a:lstStyle/>
+          <a:p>
+            <a:pPr>
+              <a:defRPr sz="1300" b="1">
+                <a:solidFill>
+                  <a:srgbClr val="1A365D"/>
+                </a:solidFill>
+                <a:latin typeface="Arial"/>
+              </a:defRPr>
+            </a:pPr>
+            <a:r>
+              <a:t>5. Security &amp; Input Sanitization</a:t>
             </a:r>
           </a:p>
           <a:p>
             <a:pPr>
               <a:spcBef>
-                <a:spcPts val="500"/>
+                <a:spcPts val="300"/>
               </a:spcBef>
-              <a:defRPr sz="1000">
-                <a:solidFill>
-                  <a:srgbClr val="0F172A"/>
-                </a:solidFill>
-              </a:defRPr>
-            </a:pPr>
-            <a:r>
-              <a:t>• Email Uniqueness: Prevents duplicate employee registration</a:t>
-            </a:r>
-          </a:p>
-          <a:p>
-            <a:pPr>
-              <a:spcBef>
-                <a:spcPts val="500"/>
-              </a:spcBef>
-              <a:defRPr sz="1000">
-                <a:solidFill>
-                  <a:srgbClr val="0F172A"/>
-                </a:solidFill>
-              </a:defRPr>
-            </a:pPr>
-            <a:r>
-              <a:t>• Negative Quota Guards: Validates allocation thresholds</a:t>
-            </a:r>
-          </a:p>
-          <a:p>
-            <a:pPr>
-              <a:spcBef>
-                <a:spcPts val="500"/>
-              </a:spcBef>
-              <a:defRPr sz="1000">
-                <a:solidFill>
-                  <a:srgbClr val="0F172A"/>
-                </a:solidFill>
-              </a:defRPr>
-            </a:pPr>
-            <a:r>
-              <a:t>• Audit Trail Verification: Verifies log entry on all critical operations</a:t>
+              <a:defRPr sz="1100">
+                <a:solidFill>
+                  <a:srgbClr val="2D3748"/>
+                </a:solidFill>
+                <a:latin typeface="Arial"/>
+              </a:defRPr>
+            </a:pPr>
+            <a:r>
+              <a:t>Strict role-based authorization decorators (@login_required, @admin_required) prevent privilege escalation. Form inputs and parameters use SQL query parameter binding to eliminate SQL injection vulnerabilities.</a:t>
             </a:r>
           </a:p>
         </p:txBody>
@@ -8526,25 +9863,95 @@
       <p:grpSpPr/>
       <p:sp>
         <p:nvSpPr>
-          <p:cNvPr id="2" name="Rounded Rectangle 1"/>
+          <p:cNvPr id="2" name="TextBox 1"/>
+          <p:cNvSpPr txBox="1"/>
+          <p:nvPr/>
+        </p:nvSpPr>
+        <p:spPr>
+          <a:xfrm>
+            <a:off x="731520" y="411480"/>
+            <a:ext cx="10698480" cy="274320"/>
+          </a:xfrm>
+          <a:prstGeom prst="rect">
+            <a:avLst/>
+          </a:prstGeom>
+          <a:noFill/>
+        </p:spPr>
+        <p:txBody>
+          <a:bodyPr wrap="none" lIns="0" tIns="0" rIns="0" bIns="0">
+            <a:spAutoFit/>
+          </a:bodyPr>
+          <a:lstStyle/>
+          <a:p>
+            <a:pPr>
+              <a:defRPr sz="1000" b="1">
+                <a:solidFill>
+                  <a:srgbClr val="2B6CB0"/>
+                </a:solidFill>
+                <a:latin typeface="Arial"/>
+              </a:defRPr>
+            </a:pPr>
+            <a:r>
+              <a:t>QUALITY ASSURANCE</a:t>
+            </a:r>
+          </a:p>
+        </p:txBody>
+      </p:sp>
+      <p:sp>
+        <p:nvSpPr>
+          <p:cNvPr id="3" name="TextBox 2"/>
+          <p:cNvSpPr txBox="1"/>
+          <p:nvPr/>
+        </p:nvSpPr>
+        <p:spPr>
+          <a:xfrm>
+            <a:off x="731520" y="685800"/>
+            <a:ext cx="10698480" cy="548640"/>
+          </a:xfrm>
+          <a:prstGeom prst="rect">
+            <a:avLst/>
+          </a:prstGeom>
+          <a:noFill/>
+        </p:spPr>
+        <p:txBody>
+          <a:bodyPr wrap="none" lIns="0" tIns="0" rIns="0" bIns="0">
+            <a:spAutoFit/>
+          </a:bodyPr>
+          <a:lstStyle/>
+          <a:p>
+            <a:pPr>
+              <a:defRPr sz="2200" b="1">
+                <a:solidFill>
+                  <a:srgbClr val="1A365D"/>
+                </a:solidFill>
+                <a:latin typeface="Arial"/>
+              </a:defRPr>
+            </a:pPr>
+            <a:r>
+              <a:t>Testing Methodology &amp; Verification Results</a:t>
+            </a:r>
+          </a:p>
+        </p:txBody>
+      </p:sp>
+      <p:sp>
+        <p:nvSpPr>
+          <p:cNvPr id="4" name="Rectangle 3"/>
           <p:cNvSpPr/>
           <p:nvPr/>
         </p:nvSpPr>
         <p:spPr>
           <a:xfrm>
-            <a:off x="731520" y="365760"/>
-            <a:ext cx="2560320" cy="320040"/>
-          </a:xfrm>
-          <a:prstGeom prst="roundRect">
+            <a:off x="731520" y="1325880"/>
+            <a:ext cx="10728655" cy="18288"/>
+          </a:xfrm>
+          <a:prstGeom prst="rect">
             <a:avLst/>
           </a:prstGeom>
           <a:solidFill>
-            <a:srgbClr val="EEF2FF"/>
+            <a:srgbClr val="2B6CB0"/>
           </a:solidFill>
-          <a:ln w="12700">
-            <a:solidFill>
-              <a:srgbClr val="C7D2FE"/>
-            </a:solidFill>
+          <a:ln>
+            <a:noFill/>
           </a:ln>
         </p:spPr>
         <p:style>
@@ -8562,67 +9969,23 @@
           </a:fontRef>
         </p:style>
         <p:txBody>
-          <a:bodyPr rtlCol="0" anchor="ctr" wrap="square" lIns="0" tIns="0" rIns="0" bIns="0"/>
-          <a:lstStyle/>
-          <a:p>
-            <a:pPr algn="ctr">
-              <a:defRPr sz="1000" b="1">
-                <a:solidFill>
-                  <a:srgbClr val="4F46E5"/>
-                </a:solidFill>
-              </a:defRPr>
-            </a:pPr>
-            <a:r>
-              <a:t>●  SUMMARY &amp; ROADMAP</a:t>
-            </a:r>
-          </a:p>
-        </p:txBody>
-      </p:sp>
-      <p:sp>
-        <p:nvSpPr>
-          <p:cNvPr id="3" name="TextBox 2"/>
-          <p:cNvSpPr txBox="1"/>
-          <p:nvPr/>
-        </p:nvSpPr>
-        <p:spPr>
-          <a:xfrm>
-            <a:off x="731520" y="777240"/>
-            <a:ext cx="10698480" cy="640080"/>
-          </a:xfrm>
-          <a:prstGeom prst="rect">
-            <a:avLst/>
-          </a:prstGeom>
-          <a:noFill/>
-        </p:spPr>
-        <p:txBody>
-          <a:bodyPr wrap="square" lIns="0" tIns="0" rIns="0" bIns="0">
-            <a:spAutoFit/>
-          </a:bodyPr>
-          <a:lstStyle/>
-          <a:p>
-            <a:pPr>
-              <a:defRPr sz="2600" b="1">
-                <a:solidFill>
-                  <a:srgbClr val="0F172A"/>
-                </a:solidFill>
-              </a:defRPr>
-            </a:pPr>
-            <a:r>
-              <a:t>Conclusion &amp; Project Achievements</a:t>
-            </a:r>
-          </a:p>
-        </p:txBody>
-      </p:sp>
-      <p:sp>
-        <p:nvSpPr>
-          <p:cNvPr id="4" name="Rectangle 3"/>
+          <a:bodyPr rtlCol="0" anchor="ctr"/>
+          <a:lstStyle/>
+          <a:p>
+            <a:pPr algn="ctr"/>
+          </a:p>
+        </p:txBody>
+      </p:sp>
+      <p:sp>
+        <p:nvSpPr>
+          <p:cNvPr id="5" name="Rectangle 4"/>
           <p:cNvSpPr/>
           <p:nvPr/>
         </p:nvSpPr>
         <p:spPr>
           <a:xfrm>
-            <a:off x="731520" y="1463040"/>
-            <a:ext cx="10728655" cy="18288"/>
+            <a:off x="731520" y="6217920"/>
+            <a:ext cx="10728655" cy="13716"/>
           </a:xfrm>
           <a:prstGeom prst="rect">
             <a:avLst/>
@@ -8658,20 +10021,189 @@
       </p:sp>
       <p:sp>
         <p:nvSpPr>
-          <p:cNvPr id="5" name="Rounded Rectangle 4"/>
+          <p:cNvPr id="6" name="TextBox 5"/>
+          <p:cNvSpPr txBox="1"/>
+          <p:nvPr/>
+        </p:nvSpPr>
+        <p:spPr>
+          <a:xfrm>
+            <a:off x="731520" y="6263640"/>
+            <a:ext cx="7315200" cy="365760"/>
+          </a:xfrm>
+          <a:prstGeom prst="rect">
+            <a:avLst/>
+          </a:prstGeom>
+          <a:noFill/>
+        </p:spPr>
+        <p:txBody>
+          <a:bodyPr wrap="none" lIns="0" tIns="0" rIns="0" bIns="0">
+            <a:spAutoFit/>
+          </a:bodyPr>
+          <a:lstStyle/>
+          <a:p>
+            <a:pPr>
+              <a:defRPr sz="950">
+                <a:solidFill>
+                  <a:srgbClr val="718096"/>
+                </a:solidFill>
+                <a:latin typeface="Arial"/>
+              </a:defRPr>
+            </a:pPr>
+            <a:r>
+              <a:t>Employee Leave Management System | Project Presentation</a:t>
+            </a:r>
+          </a:p>
+        </p:txBody>
+      </p:sp>
+      <p:sp>
+        <p:nvSpPr>
+          <p:cNvPr id="7" name="TextBox 6"/>
+          <p:cNvSpPr txBox="1"/>
+          <p:nvPr/>
+        </p:nvSpPr>
+        <p:spPr>
+          <a:xfrm>
+            <a:off x="9601200" y="6263640"/>
+            <a:ext cx="1828800" cy="365760"/>
+          </a:xfrm>
+          <a:prstGeom prst="rect">
+            <a:avLst/>
+          </a:prstGeom>
+          <a:noFill/>
+        </p:spPr>
+        <p:txBody>
+          <a:bodyPr wrap="none" lIns="0" tIns="0" rIns="0" bIns="0">
+            <a:spAutoFit/>
+          </a:bodyPr>
+          <a:lstStyle/>
+          <a:p>
+            <a:pPr algn="r">
+              <a:defRPr sz="950">
+                <a:solidFill>
+                  <a:srgbClr val="718096"/>
+                </a:solidFill>
+                <a:latin typeface="Arial"/>
+              </a:defRPr>
+            </a:pPr>
+            <a:r>
+              <a:t>Slide 9 of 10</a:t>
+            </a:r>
+          </a:p>
+        </p:txBody>
+      </p:sp>
+      <p:sp>
+        <p:nvSpPr>
+          <p:cNvPr id="8" name="Rectangle 7"/>
           <p:cNvSpPr/>
           <p:nvPr/>
         </p:nvSpPr>
         <p:spPr>
           <a:xfrm>
-            <a:off x="731520" y="1737360"/>
-            <a:ext cx="5212080" cy="4572000"/>
-          </a:xfrm>
-          <a:prstGeom prst="roundRect">
+            <a:off x="731520" y="1554480"/>
+            <a:ext cx="10728655" cy="914400"/>
+          </a:xfrm>
+          <a:prstGeom prst="rect">
             <a:avLst/>
           </a:prstGeom>
           <a:solidFill>
-            <a:srgbClr val="F8FAFC"/>
+            <a:srgbClr val="F0FDF4"/>
+          </a:solidFill>
+          <a:ln>
+            <a:solidFill>
+              <a:srgbClr val="BBF7D0"/>
+            </a:solidFill>
+          </a:ln>
+        </p:spPr>
+        <p:style>
+          <a:lnRef idx="1">
+            <a:schemeClr val="accent1"/>
+          </a:lnRef>
+          <a:fillRef idx="3">
+            <a:schemeClr val="accent1"/>
+          </a:fillRef>
+          <a:effectRef idx="2">
+            <a:schemeClr val="accent1"/>
+          </a:effectRef>
+          <a:fontRef idx="minor">
+            <a:schemeClr val="lt1"/>
+          </a:fontRef>
+        </p:style>
+        <p:txBody>
+          <a:bodyPr rtlCol="0" anchor="ctr"/>
+          <a:lstStyle/>
+          <a:p>
+            <a:pPr algn="ctr"/>
+          </a:p>
+        </p:txBody>
+      </p:sp>
+      <p:sp>
+        <p:nvSpPr>
+          <p:cNvPr id="9" name="TextBox 8"/>
+          <p:cNvSpPr txBox="1"/>
+          <p:nvPr/>
+        </p:nvSpPr>
+        <p:spPr>
+          <a:xfrm>
+            <a:off x="914400" y="1645920"/>
+            <a:ext cx="10332720" cy="731520"/>
+          </a:xfrm>
+          <a:prstGeom prst="rect">
+            <a:avLst/>
+          </a:prstGeom>
+          <a:noFill/>
+        </p:spPr>
+        <p:txBody>
+          <a:bodyPr wrap="none">
+            <a:spAutoFit/>
+          </a:bodyPr>
+          <a:lstStyle/>
+          <a:p>
+            <a:pPr>
+              <a:defRPr sz="1600" b="1">
+                <a:solidFill>
+                  <a:srgbClr val="28A745"/>
+                </a:solidFill>
+                <a:latin typeface="Arial"/>
+              </a:defRPr>
+            </a:pPr>
+            <a:r>
+              <a:t>Automated Unit Test Results: 17 Passed / 0 Failed (100% Pass Rate)</a:t>
+            </a:r>
+          </a:p>
+          <a:p>
+            <a:pPr>
+              <a:spcBef>
+                <a:spcPts val="300"/>
+              </a:spcBef>
+              <a:defRPr sz="1150">
+                <a:solidFill>
+                  <a:srgbClr val="2D3748"/>
+                </a:solidFill>
+                <a:latin typeface="Arial"/>
+              </a:defRPr>
+            </a:pPr>
+            <a:r>
+              <a:t>Executed using Python's standard unittest test runner against isolated test databases. Execution time: 4.44 seconds.</a:t>
+            </a:r>
+          </a:p>
+        </p:txBody>
+      </p:sp>
+      <p:sp>
+        <p:nvSpPr>
+          <p:cNvPr id="10" name="Rectangle 9"/>
+          <p:cNvSpPr/>
+          <p:nvPr/>
+        </p:nvSpPr>
+        <p:spPr>
+          <a:xfrm>
+            <a:off x="731520" y="2651760"/>
+            <a:ext cx="3474720" cy="3291840"/>
+          </a:xfrm>
+          <a:prstGeom prst="rect">
+            <a:avLst/>
+          </a:prstGeom>
+          <a:solidFill>
+            <a:srgbClr val="FFFFFF"/>
           </a:solidFill>
           <a:ln w="12700">
             <a:solidFill>
@@ -8703,14 +10235,93 @@
       </p:sp>
       <p:sp>
         <p:nvSpPr>
-          <p:cNvPr id="6" name="TextBox 5"/>
+          <p:cNvPr id="11" name="Rectangle 10"/>
+          <p:cNvSpPr/>
+          <p:nvPr/>
+        </p:nvSpPr>
+        <p:spPr>
+          <a:xfrm>
+            <a:off x="731520" y="2651760"/>
+            <a:ext cx="3474720" cy="457200"/>
+          </a:xfrm>
+          <a:prstGeom prst="rect">
+            <a:avLst/>
+          </a:prstGeom>
+          <a:solidFill>
+            <a:srgbClr val="2B6CB0"/>
+          </a:solidFill>
+          <a:ln>
+            <a:noFill/>
+          </a:ln>
+        </p:spPr>
+        <p:style>
+          <a:lnRef idx="1">
+            <a:schemeClr val="accent1"/>
+          </a:lnRef>
+          <a:fillRef idx="3">
+            <a:schemeClr val="accent1"/>
+          </a:fillRef>
+          <a:effectRef idx="2">
+            <a:schemeClr val="accent1"/>
+          </a:effectRef>
+          <a:fontRef idx="minor">
+            <a:schemeClr val="lt1"/>
+          </a:fontRef>
+        </p:style>
+        <p:txBody>
+          <a:bodyPr rtlCol="0" anchor="ctr"/>
+          <a:lstStyle/>
+          <a:p>
+            <a:pPr algn="ctr"/>
+          </a:p>
+        </p:txBody>
+      </p:sp>
+      <p:sp>
+        <p:nvSpPr>
+          <p:cNvPr id="12" name="TextBox 11"/>
           <p:cNvSpPr txBox="1"/>
           <p:nvPr/>
         </p:nvSpPr>
         <p:spPr>
           <a:xfrm>
-            <a:off x="1005840" y="1920240"/>
-            <a:ext cx="4663440" cy="4206240"/>
+            <a:off x="731520" y="2697480"/>
+            <a:ext cx="3474720" cy="365760"/>
+          </a:xfrm>
+          <a:prstGeom prst="rect">
+            <a:avLst/>
+          </a:prstGeom>
+          <a:noFill/>
+        </p:spPr>
+        <p:txBody>
+          <a:bodyPr wrap="none">
+            <a:spAutoFit/>
+          </a:bodyPr>
+          <a:lstStyle/>
+          <a:p>
+            <a:pPr algn="ctr">
+              <a:defRPr sz="1200" b="1">
+                <a:solidFill>
+                  <a:srgbClr val="FFFFFF"/>
+                </a:solidFill>
+                <a:latin typeface="Arial"/>
+              </a:defRPr>
+            </a:pPr>
+            <a:r>
+              <a:t>Calculation Unit Tests</a:t>
+            </a:r>
+          </a:p>
+        </p:txBody>
+      </p:sp>
+      <p:sp>
+        <p:nvSpPr>
+          <p:cNvPr id="13" name="TextBox 12"/>
+          <p:cNvSpPr txBox="1"/>
+          <p:nvPr/>
+        </p:nvSpPr>
+        <p:spPr>
+          <a:xfrm>
+            <a:off x="868680" y="3200400"/>
+            <a:ext cx="3200400" cy="2651760"/>
           </a:xfrm>
           <a:prstGeom prst="rect">
             <a:avLst/>
@@ -8724,154 +10335,102 @@
           <a:lstStyle/>
           <a:p>
             <a:pPr>
-              <a:defRPr sz="1600" b="1">
-                <a:solidFill>
-                  <a:srgbClr val="4F46E5"/>
-                </a:solidFill>
-              </a:defRPr>
-            </a:pPr>
-            <a:r>
-              <a:t>Key Project Achievements</a:t>
-            </a:r>
-          </a:p>
-          <a:p>
-            <a:pPr>
               <a:spcBef>
-                <a:spcPts val="1200"/>
+                <a:spcPts val="0"/>
               </a:spcBef>
-              <a:defRPr sz="1300" b="1">
-                <a:solidFill>
-                  <a:srgbClr val="0F172A"/>
-                </a:solidFill>
-              </a:defRPr>
-            </a:pPr>
-            <a:r>
-              <a:t>⭐  Enterprise-Ready Architecture:</a:t>
+              <a:defRPr sz="980">
+                <a:solidFill>
+                  <a:srgbClr val="2D3748"/>
+                </a:solidFill>
+                <a:latin typeface="Arial"/>
+              </a:defRPr>
+            </a:pPr>
+            <a:r>
+              <a:t>• Regular Day Counting: Mon-Wed correctly computes 3.0 days.</a:t>
             </a:r>
           </a:p>
           <a:p>
             <a:pPr>
               <a:spcBef>
-                <a:spcPts val="200"/>
+                <a:spcPts val="400"/>
               </a:spcBef>
-              <a:defRPr sz="1100">
-                <a:solidFill>
-                  <a:srgbClr val="64748B"/>
-                </a:solidFill>
-              </a:defRPr>
-            </a:pPr>
-            <a:r>
-              <a:t>Delivered a fully responsive, zero-defect employee leave platform with modern aesthetics.</a:t>
+              <a:defRPr sz="980">
+                <a:solidFill>
+                  <a:srgbClr val="2D3748"/>
+                </a:solidFill>
+                <a:latin typeface="Arial"/>
+              </a:defRPr>
+            </a:pPr>
+            <a:r>
+              <a:t>• Weekend Exclusion: Fri-Mon correctly computes 2.0 days.</a:t>
             </a:r>
           </a:p>
           <a:p>
             <a:pPr>
               <a:spcBef>
-                <a:spcPts val="1200"/>
+                <a:spcPts val="400"/>
               </a:spcBef>
-              <a:defRPr sz="1300" b="1">
-                <a:solidFill>
-                  <a:srgbClr val="0F172A"/>
-                </a:solidFill>
-              </a:defRPr>
-            </a:pPr>
-            <a:r>
-              <a:t>⭐  100% Automated Calculations:</a:t>
+              <a:defRPr sz="980">
+                <a:solidFill>
+                  <a:srgbClr val="2D3748"/>
+                </a:solidFill>
+                <a:latin typeface="Arial"/>
+              </a:defRPr>
+            </a:pPr>
+            <a:r>
+              <a:t>• Holiday Exclusion: Public holidays excluded from total count.</a:t>
             </a:r>
           </a:p>
           <a:p>
             <a:pPr>
               <a:spcBef>
-                <a:spcPts val="200"/>
+                <a:spcPts val="400"/>
               </a:spcBef>
-              <a:defRPr sz="1100">
-                <a:solidFill>
-                  <a:srgbClr val="64748B"/>
-                </a:solidFill>
-              </a:defRPr>
-            </a:pPr>
-            <a:r>
-              <a:t>Eliminated manual computation errors via dynamic holiday-aware date algorithms.</a:t>
+              <a:defRPr sz="980">
+                <a:solidFill>
+                  <a:srgbClr val="2D3748"/>
+                </a:solidFill>
+                <a:latin typeface="Arial"/>
+              </a:defRPr>
+            </a:pPr>
+            <a:r>
+              <a:t>• Half-Day Calculation: Single date half-day verified as 0.5 days.</a:t>
             </a:r>
           </a:p>
           <a:p>
             <a:pPr>
               <a:spcBef>
-                <a:spcPts val="1200"/>
+                <a:spcPts val="400"/>
               </a:spcBef>
-              <a:defRPr sz="1300" b="1">
-                <a:solidFill>
-                  <a:srgbClr val="0F172A"/>
-                </a:solidFill>
-              </a:defRPr>
-            </a:pPr>
-            <a:r>
-              <a:t>⭐  Robust Security &amp; Compliance:</a:t>
-            </a:r>
-          </a:p>
-          <a:p>
-            <a:pPr>
-              <a:spcBef>
-                <a:spcPts val="200"/>
-              </a:spcBef>
-              <a:defRPr sz="1100">
-                <a:solidFill>
-                  <a:srgbClr val="64748B"/>
-                </a:solidFill>
-              </a:defRPr>
-            </a:pPr>
-            <a:r>
-              <a:t>PBKDF2 SHA-256 password security, role isolation, and comprehensive audit logs.</a:t>
-            </a:r>
-          </a:p>
-          <a:p>
-            <a:pPr>
-              <a:spcBef>
-                <a:spcPts val="1200"/>
-              </a:spcBef>
-              <a:defRPr sz="1300" b="1">
-                <a:solidFill>
-                  <a:srgbClr val="0F172A"/>
-                </a:solidFill>
-              </a:defRPr>
-            </a:pPr>
-            <a:r>
-              <a:t>⭐  Cloud Production Deployment:</a:t>
-            </a:r>
-          </a:p>
-          <a:p>
-            <a:pPr>
-              <a:spcBef>
-                <a:spcPts val="200"/>
-              </a:spcBef>
-              <a:defRPr sz="1100">
-                <a:solidFill>
-                  <a:srgbClr val="64748B"/>
-                </a:solidFill>
-              </a:defRPr>
-            </a:pPr>
-            <a:r>
-              <a:t>Configured with Gunicorn WSGI and Render cloud blueprints for instant zero-downtime serving.</a:t>
-            </a:r>
-          </a:p>
-        </p:txBody>
-      </p:sp>
-      <p:sp>
-        <p:nvSpPr>
-          <p:cNvPr id="7" name="Rounded Rectangle 6"/>
+              <a:defRPr sz="980">
+                <a:solidFill>
+                  <a:srgbClr val="2D3748"/>
+                </a:solidFill>
+                <a:latin typeface="Arial"/>
+              </a:defRPr>
+            </a:pPr>
+            <a:r>
+              <a:t>• Date Sequence Guard: End date earlier than start date rejected.</a:t>
+            </a:r>
+          </a:p>
+        </p:txBody>
+      </p:sp>
+      <p:sp>
+        <p:nvSpPr>
+          <p:cNvPr id="14" name="Rectangle 13"/>
           <p:cNvSpPr/>
           <p:nvPr/>
         </p:nvSpPr>
         <p:spPr>
           <a:xfrm>
-            <a:off x="6217920" y="1737360"/>
-            <a:ext cx="5212080" cy="4572000"/>
-          </a:xfrm>
-          <a:prstGeom prst="roundRect">
+            <a:off x="4389120" y="2651760"/>
+            <a:ext cx="3474720" cy="3291840"/>
+          </a:xfrm>
+          <a:prstGeom prst="rect">
             <a:avLst/>
           </a:prstGeom>
           <a:solidFill>
-            <a:srgbClr val="F8FAFC"/>
+            <a:srgbClr val="FFFFFF"/>
           </a:solidFill>
           <a:ln w="12700">
             <a:solidFill>
@@ -8903,14 +10462,93 @@
       </p:sp>
       <p:sp>
         <p:nvSpPr>
-          <p:cNvPr id="8" name="TextBox 7"/>
+          <p:cNvPr id="15" name="Rectangle 14"/>
+          <p:cNvSpPr/>
+          <p:nvPr/>
+        </p:nvSpPr>
+        <p:spPr>
+          <a:xfrm>
+            <a:off x="4389120" y="2651760"/>
+            <a:ext cx="3474720" cy="457200"/>
+          </a:xfrm>
+          <a:prstGeom prst="rect">
+            <a:avLst/>
+          </a:prstGeom>
+          <a:solidFill>
+            <a:srgbClr val="2B6CB0"/>
+          </a:solidFill>
+          <a:ln>
+            <a:noFill/>
+          </a:ln>
+        </p:spPr>
+        <p:style>
+          <a:lnRef idx="1">
+            <a:schemeClr val="accent1"/>
+          </a:lnRef>
+          <a:fillRef idx="3">
+            <a:schemeClr val="accent1"/>
+          </a:fillRef>
+          <a:effectRef idx="2">
+            <a:schemeClr val="accent1"/>
+          </a:effectRef>
+          <a:fontRef idx="minor">
+            <a:schemeClr val="lt1"/>
+          </a:fontRef>
+        </p:style>
+        <p:txBody>
+          <a:bodyPr rtlCol="0" anchor="ctr"/>
+          <a:lstStyle/>
+          <a:p>
+            <a:pPr algn="ctr"/>
+          </a:p>
+        </p:txBody>
+      </p:sp>
+      <p:sp>
+        <p:nvSpPr>
+          <p:cNvPr id="16" name="TextBox 15"/>
           <p:cNvSpPr txBox="1"/>
           <p:nvPr/>
         </p:nvSpPr>
         <p:spPr>
           <a:xfrm>
-            <a:off x="6492240" y="1920240"/>
-            <a:ext cx="4663440" cy="4206240"/>
+            <a:off x="4389120" y="2697480"/>
+            <a:ext cx="3474720" cy="365760"/>
+          </a:xfrm>
+          <a:prstGeom prst="rect">
+            <a:avLst/>
+          </a:prstGeom>
+          <a:noFill/>
+        </p:spPr>
+        <p:txBody>
+          <a:bodyPr wrap="none">
+            <a:spAutoFit/>
+          </a:bodyPr>
+          <a:lstStyle/>
+          <a:p>
+            <a:pPr algn="ctr">
+              <a:defRPr sz="1200" b="1">
+                <a:solidFill>
+                  <a:srgbClr val="FFFFFF"/>
+                </a:solidFill>
+                <a:latin typeface="Arial"/>
+              </a:defRPr>
+            </a:pPr>
+            <a:r>
+              <a:t>Workflow Integration Tests</a:t>
+            </a:r>
+          </a:p>
+        </p:txBody>
+      </p:sp>
+      <p:sp>
+        <p:nvSpPr>
+          <p:cNvPr id="17" name="TextBox 16"/>
+          <p:cNvSpPr txBox="1"/>
+          <p:nvPr/>
+        </p:nvSpPr>
+        <p:spPr>
+          <a:xfrm>
+            <a:off x="4526280" y="3200400"/>
+            <a:ext cx="3200400" cy="2651760"/>
           </a:xfrm>
           <a:prstGeom prst="rect">
             <a:avLst/>
@@ -8924,134 +10562,309 @@
           <a:lstStyle/>
           <a:p>
             <a:pPr>
-              <a:defRPr sz="1600" b="1">
-                <a:solidFill>
-                  <a:srgbClr val="059669"/>
-                </a:solidFill>
-              </a:defRPr>
-            </a:pPr>
-            <a:r>
-              <a:t>Future Enhancement Scope</a:t>
-            </a:r>
-          </a:p>
-          <a:p>
-            <a:pPr>
               <a:spcBef>
-                <a:spcPts val="1200"/>
+                <a:spcPts val="0"/>
               </a:spcBef>
-              <a:defRPr sz="1300" b="1">
-                <a:solidFill>
-                  <a:srgbClr val="0F172A"/>
-                </a:solidFill>
-              </a:defRPr>
-            </a:pPr>
-            <a:r>
-              <a:t>🚀  Instant Slack &amp; Teams Webhooks:</a:t>
+              <a:defRPr sz="980">
+                <a:solidFill>
+                  <a:srgbClr val="2D3748"/>
+                </a:solidFill>
+                <a:latin typeface="Arial"/>
+              </a:defRPr>
+            </a:pPr>
+            <a:r>
+              <a:t>• Apply &amp; Pending Hold: Application places instant hold on quota.</a:t>
             </a:r>
           </a:p>
           <a:p>
             <a:pPr>
               <a:spcBef>
-                <a:spcPts val="200"/>
+                <a:spcPts val="400"/>
               </a:spcBef>
-              <a:defRPr sz="1100">
-                <a:solidFill>
-                  <a:srgbClr val="64748B"/>
-                </a:solidFill>
-              </a:defRPr>
-            </a:pPr>
-            <a:r>
-              <a:t>Real-time notifications sent to company messaging channels on application submission and approvals.</a:t>
+              <a:defRPr sz="980">
+                <a:solidFill>
+                  <a:srgbClr val="2D3748"/>
+                </a:solidFill>
+                <a:latin typeface="Arial"/>
+              </a:defRPr>
+            </a:pPr>
+            <a:r>
+              <a:t>• Manager Approval: Transfers pending hold to used days accurately.</a:t>
             </a:r>
           </a:p>
           <a:p>
             <a:pPr>
               <a:spcBef>
-                <a:spcPts val="1200"/>
+                <a:spcPts val="400"/>
               </a:spcBef>
-              <a:defRPr sz="1300" b="1">
-                <a:solidFill>
-                  <a:srgbClr val="0F172A"/>
-                </a:solidFill>
-              </a:defRPr>
-            </a:pPr>
-            <a:r>
-              <a:t>🚀  Two-Way Google &amp; Outlook Calendar Sync:</a:t>
+              <a:defRPr sz="980">
+                <a:solidFill>
+                  <a:srgbClr val="2D3748"/>
+                </a:solidFill>
+                <a:latin typeface="Arial"/>
+              </a:defRPr>
+            </a:pPr>
+            <a:r>
+              <a:t>• Manager Rejection: Releases pending hold with zero quota deduction.</a:t>
             </a:r>
           </a:p>
           <a:p>
             <a:pPr>
               <a:spcBef>
-                <a:spcPts val="200"/>
+                <a:spcPts val="400"/>
               </a:spcBef>
-              <a:defRPr sz="1100">
-                <a:solidFill>
-                  <a:srgbClr val="64748B"/>
-                </a:solidFill>
-              </a:defRPr>
-            </a:pPr>
-            <a:r>
-              <a:t>Approved leaves automatically reflected on team shared Google Calendars.</a:t>
+              <a:defRPr sz="980">
+                <a:solidFill>
+                  <a:srgbClr val="2D3748"/>
+                </a:solidFill>
+                <a:latin typeface="Arial"/>
+              </a:defRPr>
+            </a:pPr>
+            <a:r>
+              <a:t>• Self-Service Cancel: Cancelled pending leaves restore balance.</a:t>
             </a:r>
           </a:p>
           <a:p>
             <a:pPr>
               <a:spcBef>
-                <a:spcPts val="1200"/>
+                <a:spcPts val="400"/>
               </a:spcBef>
-              <a:defRPr sz="1300" b="1">
-                <a:solidFill>
-                  <a:srgbClr val="0F172A"/>
-                </a:solidFill>
-              </a:defRPr>
-            </a:pPr>
-            <a:r>
-              <a:t>🚀  Biometric &amp; Punch Clock Attendance:</a:t>
-            </a:r>
-          </a:p>
+              <a:defRPr sz="980">
+                <a:solidFill>
+                  <a:srgbClr val="2D3748"/>
+                </a:solidFill>
+                <a:latin typeface="Arial"/>
+              </a:defRPr>
+            </a:pPr>
+            <a:r>
+              <a:t>• Insufficient Balance: Rejects request when quota is exceeded.</a:t>
+            </a:r>
+          </a:p>
+        </p:txBody>
+      </p:sp>
+      <p:sp>
+        <p:nvSpPr>
+          <p:cNvPr id="18" name="Rectangle 17"/>
+          <p:cNvSpPr/>
+          <p:nvPr/>
+        </p:nvSpPr>
+        <p:spPr>
+          <a:xfrm>
+            <a:off x="8046720" y="2651760"/>
+            <a:ext cx="3474720" cy="3291840"/>
+          </a:xfrm>
+          <a:prstGeom prst="rect">
+            <a:avLst/>
+          </a:prstGeom>
+          <a:solidFill>
+            <a:srgbClr val="FFFFFF"/>
+          </a:solidFill>
+          <a:ln w="12700">
+            <a:solidFill>
+              <a:srgbClr val="E2E8F0"/>
+            </a:solidFill>
+          </a:ln>
+        </p:spPr>
+        <p:style>
+          <a:lnRef idx="1">
+            <a:schemeClr val="accent1"/>
+          </a:lnRef>
+          <a:fillRef idx="3">
+            <a:schemeClr val="accent1"/>
+          </a:fillRef>
+          <a:effectRef idx="2">
+            <a:schemeClr val="accent1"/>
+          </a:effectRef>
+          <a:fontRef idx="minor">
+            <a:schemeClr val="lt1"/>
+          </a:fontRef>
+        </p:style>
+        <p:txBody>
+          <a:bodyPr rtlCol="0" anchor="ctr"/>
+          <a:lstStyle/>
+          <a:p>
+            <a:pPr algn="ctr"/>
+          </a:p>
+        </p:txBody>
+      </p:sp>
+      <p:sp>
+        <p:nvSpPr>
+          <p:cNvPr id="19" name="Rectangle 18"/>
+          <p:cNvSpPr/>
+          <p:nvPr/>
+        </p:nvSpPr>
+        <p:spPr>
+          <a:xfrm>
+            <a:off x="8046720" y="2651760"/>
+            <a:ext cx="3474720" cy="457200"/>
+          </a:xfrm>
+          <a:prstGeom prst="rect">
+            <a:avLst/>
+          </a:prstGeom>
+          <a:solidFill>
+            <a:srgbClr val="2B6CB0"/>
+          </a:solidFill>
+          <a:ln>
+            <a:noFill/>
+          </a:ln>
+        </p:spPr>
+        <p:style>
+          <a:lnRef idx="1">
+            <a:schemeClr val="accent1"/>
+          </a:lnRef>
+          <a:fillRef idx="3">
+            <a:schemeClr val="accent1"/>
+          </a:fillRef>
+          <a:effectRef idx="2">
+            <a:schemeClr val="accent1"/>
+          </a:effectRef>
+          <a:fontRef idx="minor">
+            <a:schemeClr val="lt1"/>
+          </a:fontRef>
+        </p:style>
+        <p:txBody>
+          <a:bodyPr rtlCol="0" anchor="ctr"/>
+          <a:lstStyle/>
+          <a:p>
+            <a:pPr algn="ctr"/>
+          </a:p>
+        </p:txBody>
+      </p:sp>
+      <p:sp>
+        <p:nvSpPr>
+          <p:cNvPr id="20" name="TextBox 19"/>
+          <p:cNvSpPr txBox="1"/>
+          <p:nvPr/>
+        </p:nvSpPr>
+        <p:spPr>
+          <a:xfrm>
+            <a:off x="8046720" y="2697480"/>
+            <a:ext cx="3474720" cy="365760"/>
+          </a:xfrm>
+          <a:prstGeom prst="rect">
+            <a:avLst/>
+          </a:prstGeom>
+          <a:noFill/>
+        </p:spPr>
+        <p:txBody>
+          <a:bodyPr wrap="none">
+            <a:spAutoFit/>
+          </a:bodyPr>
+          <a:lstStyle/>
+          <a:p>
+            <a:pPr algn="ctr">
+              <a:defRPr sz="1200" b="1">
+                <a:solidFill>
+                  <a:srgbClr val="FFFFFF"/>
+                </a:solidFill>
+                <a:latin typeface="Arial"/>
+              </a:defRPr>
+            </a:pPr>
+            <a:r>
+              <a:t>Security &amp; Validation Tests</a:t>
+            </a:r>
+          </a:p>
+        </p:txBody>
+      </p:sp>
+      <p:sp>
+        <p:nvSpPr>
+          <p:cNvPr id="21" name="TextBox 20"/>
+          <p:cNvSpPr txBox="1"/>
+          <p:nvPr/>
+        </p:nvSpPr>
+        <p:spPr>
+          <a:xfrm>
+            <a:off x="8183880" y="3200400"/>
+            <a:ext cx="3200400" cy="2651760"/>
+          </a:xfrm>
+          <a:prstGeom prst="rect">
+            <a:avLst/>
+          </a:prstGeom>
+          <a:noFill/>
+        </p:spPr>
+        <p:txBody>
+          <a:bodyPr wrap="square">
+            <a:spAutoFit/>
+          </a:bodyPr>
+          <a:lstStyle/>
           <a:p>
             <a:pPr>
               <a:spcBef>
-                <a:spcPts val="200"/>
+                <a:spcPts val="0"/>
               </a:spcBef>
-              <a:defRPr sz="1100">
-                <a:solidFill>
-                  <a:srgbClr val="64748B"/>
-                </a:solidFill>
-              </a:defRPr>
-            </a:pPr>
-            <a:r>
-              <a:t>Integration with hardware fingerprint/facial attendance scanners.</a:t>
+              <a:defRPr sz="980">
+                <a:solidFill>
+                  <a:srgbClr val="2D3748"/>
+                </a:solidFill>
+                <a:latin typeface="Arial"/>
+              </a:defRPr>
+            </a:pPr>
+            <a:r>
+              <a:t>• Authentication Check: Valid login session creation verified.</a:t>
             </a:r>
           </a:p>
           <a:p>
             <a:pPr>
               <a:spcBef>
-                <a:spcPts val="1200"/>
+                <a:spcPts val="400"/>
               </a:spcBef>
-              <a:defRPr sz="1300" b="1">
-                <a:solidFill>
-                  <a:srgbClr val="0F172A"/>
-                </a:solidFill>
-              </a:defRPr>
-            </a:pPr>
-            <a:r>
-              <a:t>🚀  AI Predictive Absence Forecasting:</a:t>
+              <a:defRPr sz="980">
+                <a:solidFill>
+                  <a:srgbClr val="2D3748"/>
+                </a:solidFill>
+                <a:latin typeface="Arial"/>
+              </a:defRPr>
+            </a:pPr>
+            <a:r>
+              <a:t>• Role Separation: Prevents standard users accessing admin portal.</a:t>
             </a:r>
           </a:p>
           <a:p>
             <a:pPr>
               <a:spcBef>
-                <a:spcPts val="200"/>
+                <a:spcPts val="400"/>
               </a:spcBef>
-              <a:defRPr sz="1100">
-                <a:solidFill>
-                  <a:srgbClr val="64748B"/>
-                </a:solidFill>
-              </a:defRPr>
-            </a:pPr>
-            <a:r>
-              <a:t>Machine learning models forecasting seasonal departmental staffing deficits.</a:t>
+              <a:defRPr sz="980">
+                <a:solidFill>
+                  <a:srgbClr val="2D3748"/>
+                </a:solidFill>
+                <a:latin typeface="Arial"/>
+              </a:defRPr>
+            </a:pPr>
+            <a:r>
+              <a:t>• Overlap Prevention: Blocks concurrent overlapping leave dates.</a:t>
+            </a:r>
+          </a:p>
+          <a:p>
+            <a:pPr>
+              <a:spcBef>
+                <a:spcPts val="400"/>
+              </a:spcBef>
+              <a:defRPr sz="980">
+                <a:solidFill>
+                  <a:srgbClr val="2D3748"/>
+                </a:solidFill>
+                <a:latin typeface="Arial"/>
+              </a:defRPr>
+            </a:pPr>
+            <a:r>
+              <a:t>• Duplicate Email Check: Prevents multiple accounts with same email.</a:t>
+            </a:r>
+          </a:p>
+          <a:p>
+            <a:pPr>
+              <a:spcBef>
+                <a:spcPts val="400"/>
+              </a:spcBef>
+              <a:defRPr sz="980">
+                <a:solidFill>
+                  <a:srgbClr val="2D3748"/>
+                </a:solidFill>
+                <a:latin typeface="Arial"/>
+              </a:defRPr>
+            </a:pPr>
+            <a:r>
+              <a:t>• Quota Threshold Guard: Rejects negative quota allocation values.</a:t>
             </a:r>
           </a:p>
         </p:txBody>
